--- a/topic-09-week9/unit-2/talk-01/firebase.pptx
+++ b/topic-09-week9/unit-2/talk-01/firebase.pptx
@@ -141,6 +141,389 @@
     <inkml:context xml:id="ctx0">
       <inkml:inkSource xml:id="inkSrc0">
         <inkml:traceFormat>
+          <inkml:channel name="X" type="integer" min="-749" max="3091" units="cm"/>
+          <inkml:channel name="Y" type="integer" min="-1085" max="1664" units="cm"/>
+          <inkml:channel name="T" type="integer" max="2.14748E9" units="dev"/>
+        </inkml:traceFormat>
+        <inkml:channelProperties>
+          <inkml:channelProperty channel="X" name="resolution" value="121.13564" units="1/cm"/>
+          <inkml:channelProperty channel="Y" name="resolution" value="130.28436" units="1/cm"/>
+          <inkml:channelProperty channel="T" name="resolution" value="1" units="1/dev"/>
+        </inkml:channelProperties>
+      </inkml:inkSource>
+      <inkml:timestamp xml:id="ts0" timeString="2025-11-12T13:02:22.591"/>
+    </inkml:context>
+    <inkml:brush xml:id="br0">
+      <inkml:brushProperty name="width" value="0.05292" units="cm"/>
+      <inkml:brushProperty name="height" value="0.05292" units="cm"/>
+      <inkml:brushProperty name="color" value="#FF0000"/>
+    </inkml:brush>
+  </inkml:definitions>
+  <inkml:trace contextRef="#ctx0" brushRef="#br0">24941 6491 0,'36'-35'62,"-36"-18"-46,35 0 0,-17 0 15,-1 18-31,1-18 15,17-18 1,-35 54 0,18-1-1,-18 0-15,0 1 32,0-1-17,-53 18 173,-35 35-173,-1 18 1,37-17 0,34-36-16,53-18 140,18 0-124,35-17-1,0-18 1,-52 35 0,-19 18-1,1 0 32,0 0 31,17 53-46,36 89-1,-54-107-16,1-18-15,-1 1 16,-17-53 93</inkml:trace>
+  <inkml:trace contextRef="#ctx0" brushRef="#br0" timeOffset="1623.48">31397 6544 0,'0'-35'109,"0"17"-93,-17-88 0,-36 18-1,53 53-15,-18 0 16,0-18 0,1 35-16,17-17 15,-18-1 1,18 19-1,0-1 1,0 0 0,-18 18-1,1 0 251,-18 36-250,17 17-1,-17-18-15,-18 71 31,53-89-15,0-34 93,0-1-93,0-17-16,35 0 16,-17 17-16,-18-17 15,17-1-15,1-17 16,17 36 0,-17 17 93,35 35-78,-36-17 0,19-18-15,-19 17 0,1 1-1</inkml:trace>
+  <inkml:trace contextRef="#ctx0" brushRef="#br0" timeOffset="39054.83">9066 10142 0,'53'0'204,"53"0"-189,53 0 1,-36 0-1,-34 0 1,-37 0 0,-34 0-16,0 0 15,-1 0 1,36 0 0,53 0 15,18 0-16,-19 18 1,54-18 0,-18 18-1,36-18 1,-36 0 0,-106 0-16,0 0 15,-17 0 1,0 0-16,35 0 31,-1 0-15,37 0-1,-1 0 1,-18 0 0,-34 0 15,34 0-16,-17 0 1,-18 0 0,-17 0-1,0 0 1,-1 0 62,1 0 125,-18 17 157,18-17-204</inkml:trace>
+  <inkml:trace contextRef="#ctx0" brushRef="#br0" timeOffset="48317.16">4216 11112 0,'35'0'156,"265"0"-124,106 0 15,-265 0-32,-124 0 16,1 0-15,0 0 0,-1 0-1,1-17 1,17 17 0,18 0-1,-18 0 1,-17 0-1,17 0 1,1 0 15,-1 0-15,0 0 0,18 0 15,35-18-16,36 18 1,34 0 0,-34-17-1,-54 17 1,-34 0 0,-1 0-16,0 0 15,53 0 1,71 0-1,35 0 1,-17 0 0,-124 0-1,-36 0 1,-17 17 46,18-17-30,-1 0 15,19 0-16,-19 0-16,1 0 1,0 0 15,-1 0-15,1 0 0,0 0 15,-1 0-16,1 0 17,-1 0-1,1 0 94</inkml:trace>
+  <inkml:trace contextRef="#ctx0" brushRef="#br0" timeOffset="61816.36">32244 2187 0,'-18'71'125,"18"-18"-109,-17-18-16,-1 0 15,-35 89 1,35-54 0,-17-17-1,0 35 1,17-35 0,-17 18 15,17-18-16,-17-18 1,17 18 0,1-18-1,17-17 1,-18-18-16,18 18 47,0-1-16,-18 18-15,1-17-1,-18 35 1,17 18 0,0-19-1,18-34 1,0-71 203,0-17-204,0-36 16,0 71-15,0-1 0,0 89 156,18 71-141,-18-89-16,18-35 1,-1 0 203,1-18-204,17 1 1,-17-19 0,-1 36-1,-17-17 1</inkml:trace>
+  <inkml:trace contextRef="#ctx0" brushRef="#br0" timeOffset="63102.23">31803 2981 0,'18'0'219,"-18"35"-204,17-17 1,1 17 0,-18-17-16,17-18 15,-17 17 1,0 1 0</inkml:trace>
+  <inkml:trace contextRef="#ctx0" brushRef="#br0" timeOffset="74478.24">21290 12083 0,'18'0'78,"17"0"-63,53 0-15,36 0 16,34 0-16,1 0 16,35-18-16,0 18 15,247-18 1,-194 18 0,-106-17 15,-70 17-16,-18 0 1,-36 0 0</inkml:trace>
+  <inkml:trace contextRef="#ctx0" brushRef="#br0" timeOffset="81669.13">6262 13018 0,'53'0'203,"0"0"-187,158 0 0,72 0-1,-37 17 1,-34-17 0,-106 0-1,-71 0 1</inkml:trace>
+  <inkml:trace contextRef="#ctx0" brushRef="#br0" timeOffset="83556.92">9596 13088 0,'17'0'266,"54"0"-250,-36 0-1,-17 0 1,17 0 0,-17 0 46,-1 0 47,1 0-93,17 0 0,-17 0-1,70-18 1,-17 18 0,34 0 15,-16 0-16,-37 0 1,-16 0 0,-1 0-1,0 0 1,1 0 0,-19 0-1,1-17 1,0 17-1,-1 0 1,1 0 0,35 0-1,17 0 1,-52 0 0,17 0-16,0 0 15,-17-18 1,17 18-16,-17 0 15,0 0 1,-1 0 0,1 0 171,123 0-156,-123 0-31,-1 0 16</inkml:trace>
+  <inkml:trace contextRef="#ctx0" brushRef="#br0" timeOffset="84451.29">11359 13088 0,'36'0'125,"34"-18"-110,36 1 1,0-1 0,-71 18-16,-17 0 15,0 0 1</inkml:trace>
+  <inkml:trace contextRef="#ctx0" brushRef="#br0" timeOffset="104154.19">27164 6385 0,'0'-17'47,"0"-19"-16,18 1-15,-1-18-1,1-35 1,35 0 0,-36-18-1,19 0 1,-19 0-1,-17 53-15,36-70 16,-19 52 0,-17 1-1,18 17 1,-1 0 0,-17 35 15,0 1-16,-35 34 95,-18 19-95,18 17 1,-18-18 0,18-18-1,17 1 1,89-88 93,17 17-93,18 0 0,-53 35-1,-18 0 1,-17 36 46,17 53-46,-35-18 0,17-18 15</inkml:trace>
+  <inkml:trace contextRef="#ctx0" brushRef="#br0" timeOffset="107836.9">32544 5927 0,'-18'0'47,"0"0"-16,1-18 1,-18-17-17,-36-18 1,-17-35 0,53 70-1,-1-17 1,-34-18-1,52 35 1,-17-17 0,17 35-1,18-18 1,-17 18 0,-1-17 15,0-1-16,1 18-15,17-18 16,17 18 234,1 0-234,17 0-1,-17 0 1,-1 0 203,1 0-141,0 18-47,-36-18 235,0 0-251,1 0 17,-18 0-17,17 0 1,0 0-1,1 0 1,-1 0 15,0 0-15,1 0 62,17 35 94,35 53-141,-35-70-15,0 0-1,18-1 1,-18 1 15,0-36 126,0-35-126,0 18 0,0 18-15,0-1 15,0-17 0,17 35 63,1 0-16,-18-18-62,18 18 15,-1 0 0,1 0-15,-1 0-1,1 0 1,0 0 0,-1 0-1,1 0-15,0 0 16,17 0 31,-17 0 15,-1 0-30,1 0 14,-1 0-14,-17 18-17,36-18 1,-19 17 46,1-17-15,0 0-15</inkml:trace>
+  <inkml:trace contextRef="#ctx0" brushRef="#br0" timeOffset="134086.26">28169 12136 0,'-17'-18'125,"17"0"-109,0-17-16,0-53 15,0 17 1,0-17 0,-18 0-1,18-36 1,0 1-1,-18 17 1,1 0 0,17 53-1,-18-35 1,18 53 0,0-18-16,0-35 31,-18 52-31,18 1 15,0-35 1,0 34 0,-17-17-1,17 36 1,-18 70 328,-35 70-313,36-105-31,-1 35 31,18-36 0,35-122 126,-17 87-142,88-123 1,-36 53 0,-52 52 15,-18 19-16,35 17 48,18 35-32,18 71 0,-54-89 1</inkml:trace>
+  <inkml:trace contextRef="#ctx0" brushRef="#br0" timeOffset="170214.98">28046 10654 0,'-18'35'172,"-35"18"-156,36 0 15,-1-53 0,18 18 0,0-1-15,-18 1 0,18 0-16,0-1 31,0-87 125,36 17-125,17 0-15,-18 0 0,-18 35-1,1 18 32,0 0-16,-1 0 16,1 0-15,0 0-1,17 18-16,-17 0 1,-1 52 0,36-17-1,-53-18 1,18-17 0,-18 0-1,0-1 1,0 1-1,0-36 142,17 18-142,-17-17 17,0-1-1,0 0-16,0 1-15,18 17 16,0-18 0,-18 0-1,0-17 17,17 35-1,-17-18-16,0 1 1,0-18 156,0-1-156,-17 36-1,17-17-15,0 70 125,0-1-109,0-16-1,0-1 1,0 0 0,0-17-1,17-18 1,-17 18-16,0-1 47,-17-17 15,-1 0-15,-35 18-31,18-18-16,-18 0 15,-18 0 1,1 0 0,35 0-16,-1 0 15,19 0 63,-1 0-62,0 0 0,1 0-1,-1 0 1,71-18 125,-18 1-126,36-19 1,52-34-1,-52 17-15,-36 53 16,-17-18 0,-1 1-1,-17 34 63,18 18-62,-18-17 0,0-36 62,0 1-47,0 87 16,0 1-31,0-53-1,0-1 16,-18-17-15,-17-70 0,18-1-1,-1 53-15,0 1 16,-17 17 0,17 0-16,1 0 15,-1 0 1,-17 0-16,35 17 15</inkml:trace>
+  <inkml:trace contextRef="#ctx0" brushRef="#br0" timeOffset="174818.17">5715 15028 0,'18'0'94,"17"0"-79,0 0 1,36 0 0,17 0-1,0 0 1,18 0 0,-35 0-1,-19 0 1,-34 0-1,17-17 1,-17 17 15,0 0-15,-1 0 0,1 0 15,0 0 16,-1 0 171,1 0-202,-1 0 0,1 0-1,0 0 17,-1 0-17,1 0 1</inkml:trace>
+  <inkml:trace contextRef="#ctx0" brushRef="#br0" timeOffset="175851">5239 16122 0,'17'0'109,"248"0"-93,0-18 15,52 18-16,1-17 1,-71-1 0,-177 18-16,1 0 15,-18 0-15,-36 0 16,1 0 0,-1 0-16,1 0 15,0 0 1,-1 0-1,1 0 1</inkml:trace>
+  <inkml:trace contextRef="#ctx0" brushRef="#br0" timeOffset="192319.5">16122 15064 0,'18'0'125,"-1"0"-110,18 0 17,-17 0-17,0 0 16,-1 0-15,1 0 0,0 0-1,-1 0 1,1 0 0,17 0 15,1 0-16,16 0 1,19 0 0,-36 0-16,18 0 15,53 0 1,-53-18-16,-18 18 16,53 0-1,-35 0 1,18 0-1,-1 0 1,-17-18 0,-17 18-1,-19 0 1,1 0 0,0 0 15,34 0-16,-16 0 1,-19 0-16,1 0 16,17 0-1,1 0 1,-1 0 0,18 0-1,-18 0 1,0 0-1,18 0 1,-17 0 0,-1 18-1,-18-18 1,1 0-16,0 0 16,-1 0 15,1 0-16</inkml:trace>
+  <inkml:trace contextRef="#ctx0" brushRef="#br0" timeOffset="195418.22">28116 10636 0,'-17'0'47,"-1"0"31,18 18-63,-18-18 1,18 18 0,-17 17-1,-18-18 1,35 1-1,-18-18 1,18 18 15,-18-18-15,36 0 109,17 0-94,-17 0-15,-1 0-1,1 0 1,0 35 0,-1-35-1,-17 18-15</inkml:trace>
+  <inkml:trace contextRef="#ctx0" brushRef="#br0" timeOffset="196445.95">23601 10442 0,'0'18'141,"0"0"-110,0-1 1,17-17-1</inkml:trace>
+  <inkml:trace contextRef="#ctx0" brushRef="#br0" timeOffset="198510.9">32138 10354 0,'18'18'110,"-18"-1"-79,17 36 0,-17-35-15,0 0 171,18-18-171</inkml:trace>
+  <inkml:trace contextRef="#ctx0" brushRef="#br0" timeOffset="-182558.89">10971 16157 0</inkml:trace>
+  <inkml:trace contextRef="#ctx0" brushRef="#br0" timeOffset="-180370.67">17727 16157 0,'18'0'125,"17"0"-110,53 0 1,53 0 0,71 0-1,35 0 1,-71 0-1,-70 0 1,-71 0 0,1 0-1,-19 0-15,19 0 16,-1 0 0,88 18 30,-34-18-30,16 0 0,19 0-1,-1 0 1,1 17 0,-18-17-1,-1 0 1,-52 0-16,18 0 15,158-17 1,-70 17 0,17 0-1,1-18 1,17 18 0,17 0-1,-52-17 16,0 17-15,-36 0 0,19 0-1,-19 0 1,-52-18-16,34 18 16,178-18-1,-72 1 1,19-1-1,-36 0 1,0 1 0,-18 17-1,-52 0 1,-72-18 0,1 18 15,-35 0-31,0 0 15,17 0 1,-17-18-16,34 18 31,1 0-15,-17 0 0,17 0-1,17 0 1,36-17-1,0 17 1,-36 0 0,-52-18-1</inkml:trace>
+  <inkml:trace contextRef="#ctx0" brushRef="#br0" timeOffset="-177546.11">32156 10266 0,'17'0'47,"1"17"-16,-18 19-16,0 34 1,35 1 0,-35-36-1,18 18 1,0-18 0,17 36 15,-18-36-31,1 36 15,0-18 1,17 17 0,-17-17-1,17 0 1,-17 18 0,17-19-1,0 19 1,-17-18-1,17 0 1,-17-35 0,-18-54 109,-53-52-110,0 0 1,0-36 0,18 89-16,17 0 15,0-18 1,1 18-16,-1 17 15,-35-70 1,0 17 0,0-35-1,0 36 1,1-18 0,16 35-1,19 35 16,-1 0-15,0 1 0,1 17-1,-19 0 79,1 70-63,17-34-31,18 34 32,0 18-1,18-52-31,-18-19 15,18 19-15,-1-19 32</inkml:trace>
+  <inkml:trace contextRef="#ctx0" brushRef="#br0" timeOffset="-157346.9">9525 3704 0,'71'0'140,"669"71"-108,266-18-1,-777-53-16,247 0 1,-17 0 0,-194 0-16,193 0 15,-17 0 1,35 0 0,18 0-1,-88 0 1,-71 0-1,36 0 1,-36 0 0,-265 0-16,-17 0 15,-18 0 1</inkml:trace>
+  <inkml:trace contextRef="#ctx0" brushRef="#br0" timeOffset="-149647.52">3510 14270 0,'-106'0'141,"18"0"-126,-53-18 1,0 1 0,70 17-1,71 88 173,0 18-173,0 88 1,0-53 0,-17-71-16,17 36 15,-18 106 1,0-1-1,18-105-15,-17 88 16,-1-53 0,18-17-1,0-71 1,0-36 0,0 19 15,0-1-16,0 0 1,71-17 125,123 17-126,-88-17-15,35-18 16,-124 0 0</inkml:trace>
+</inkml:ink>
+</file>
+
+<file path=ppt/ink/ink10.xml><?xml version="1.0" encoding="utf-8"?>
+<inkml:ink xmlns:inkml="http://www.w3.org/2003/InkML">
+  <inkml:definitions>
+    <inkml:context xml:id="ctx0">
+      <inkml:inkSource xml:id="inkSrc0">
+        <inkml:traceFormat>
+          <inkml:channel name="X" type="integer" min="-749" max="3091" units="cm"/>
+          <inkml:channel name="Y" type="integer" min="-1085" max="1664" units="cm"/>
+          <inkml:channel name="T" type="integer" max="2.14748E9" units="dev"/>
+        </inkml:traceFormat>
+        <inkml:channelProperties>
+          <inkml:channelProperty channel="X" name="resolution" value="121.13564" units="1/cm"/>
+          <inkml:channelProperty channel="Y" name="resolution" value="130.28436" units="1/cm"/>
+          <inkml:channelProperty channel="T" name="resolution" value="1" units="1/dev"/>
+        </inkml:channelProperties>
+      </inkml:inkSource>
+      <inkml:timestamp xml:id="ts0" timeString="2025-11-12T13:26:08.640"/>
+    </inkml:context>
+    <inkml:brush xml:id="br0">
+      <inkml:brushProperty name="width" value="0.05292" units="cm"/>
+      <inkml:brushProperty name="height" value="0.05292" units="cm"/>
+      <inkml:brushProperty name="color" value="#FF0000"/>
+    </inkml:brush>
+  </inkml:definitions>
+  <inkml:trace contextRef="#ctx0" brushRef="#br0">9895 5186 0,'-17'0'109</inkml:trace>
+  <inkml:trace contextRef="#ctx0" brushRef="#br0" timeOffset="1849.44">8731 5186 0,'18'0'109,"511"-18"-78,106-52 0,-423 52-15,-106 0 0,-36 1-1,-17-1 1,-18 18 0,18 0-1,-17 0 1,-19-18-1,36 18 1,-18 0-16,1-17 16,-19 17-1,19 0 1,-36-18 93,17 18 110,248 18-188,-36-18 1,-194 0-17,18 0 1</inkml:trace>
+  <inkml:trace contextRef="#ctx0" brushRef="#br0" timeOffset="2811.97">6844 5062 0,'18'0'31,"140"0"0,72 0-15,52-17 0,0 17-1,-141 0-15,-53 0 16,18 0-16,-35 0 16,-18 0-16,17 0 15,-17 0 1,-35 0-1</inkml:trace>
+  <inkml:trace contextRef="#ctx0" brushRef="#br0" timeOffset="5133.06">14746 5133 0,'35'0'110,"54"0"-95,105 0 1,-18 0 0,-105-18-16,17 18 15,-53 0 1,-17 0-1,35 0 1,52 0 0,19 0-1,35 0 1,-54 0 0,-16 0-1,122 0 16,-158 0-15,71 18 0,-18 0-16,52-18 15,-52 0 1,-35 0 0,-54 0-1,1 0 220</inkml:trace>
+  <inkml:trace contextRef="#ctx0" brushRef="#br0" timeOffset="24863.87">4798 5151 0,'0'17'94,"17"-17"-48,1 0-30,0 0 0,140 0-1,19-35 1,-1 0 0,-35 17-1,-88 0 1,-35 1-1,17 17 32,36 17-31,-18 19 0,0-19-1,-36 1 1,1-18-1,-18 18 1,17-1 0,19 1-1,-19-1 1,1 1 0,-18 0-1,0-1 1,18-17-1,-18 18 79,0 0-63,0-54 126,-36 1-142,36 17 1,0 1 0,-17-18-1,17 17 16,0 0-15,-18 1 0,18-1 77,18 53 48,-1-17-125,-17 17-16,0 0 15,18 1 1,-18-19 0,18 1-1,-18 0 79,-36-18-63,1-18 0,17 18-15,1 0 0,-1-18 15,1 18-15,-1 0 15,0 0 0,18-17 94,0-36-78,53 18-31,-53 17-16,18 0 15,-1 18-15,-17-35 16,18 35-16,-18 18 125,-35 17-110,17 0 1</inkml:trace>
+  <inkml:trace contextRef="#ctx0" brushRef="#br0" timeOffset="32182.71">12259 5080 0,'-71'0'156,"-34"0"-125,87 18-31,-17-18 31,17 17-15,0-17 15,1 36-15,-36-1 0,35-18-1,1-17-15,17 18 16,-18-18-1,18 35 1,-18-17 15,1 17-15,-1-17 0,0 0 15,18-1-16,0 1 32,-17-18 141,17-18-48,0-35-124,0 18 0,0 17-1,0-17 1,0 17 15,17 18 313,1 0-313,0 0 32,-18 18-32,0 0 0,17-1 0,19 19-15,-36-19 0,17 1 62,-17 0 62,-17-18-124,-1 0 0,0 0 15,1 0 47,17-18 0,-18 18-31,18-18 16</inkml:trace>
+  <inkml:trace contextRef="#ctx0" brushRef="#br0" timeOffset="51783.01">9119 6068 0,'0'17'94,"0"54"-79,71 176 1,-36-88 0,0-1-1,-17-34 1,0-18 0,-1-53-1,1 0 32,0-36-31,-18 1-16,0-1 15,17 19 1,-17-19 0,-17-17 109</inkml:trace>
+  <inkml:trace contextRef="#ctx0" brushRef="#br0" timeOffset="52428.75">8802 7161 0,'0'-17'62,"106"-124"-46,17-36 0,1 36-1,-19 18 1,-52 52-1,-35 36 1,0 17 0,-18 1-16,17 17 15,-17-18-15,0 0 16,18-17 0,17 0 30,-17 17-30</inkml:trace>
+  <inkml:trace contextRef="#ctx0" brushRef="#br0" timeOffset="58412.93">10901 5944 0,'35'0'203,"141"-106"-172,-123 106-15,-53-17 31,18 17 250,17 0-282,18 0 1,-35 0 0,17 0-1,-17 17 1,-1-17-1,-105 18 126,18-18-125,-1 18-1,1-1 1,34-17 0,1 0-1,-18 18 1,0-18-1,18 18-15,0-18 16,17 0-16,0 0 16,1 0-1,34 0 173,89 0-173,0 0-15,0-18 16,-53 18 0,-36 0 62,1 0-63,0 0 1,17 0 0,-17 0 187,17-18-172,-17 18 63,-54 0-79,-34 0 1,-1 0 0,18 0-1,18 0 1,17 0 0,54 0 109,52 0-110,-35-17 1,-18-1-1</inkml:trace>
+  <inkml:trace contextRef="#ctx0" brushRef="#br0" timeOffset="65943.14">13106 6703 0,'17'0'187</inkml:trace>
+  <inkml:trace contextRef="#ctx0" brushRef="#br0" timeOffset="71212.3">13106 6562 0,'17'17'140,"19"107"-124,-1-1 0,35 18-1,-52-88-15,0-17 16,17 34 0,-35-52-1,18-1 32,-18 1-31,17 17-1,-17 1 1,0-19 0</inkml:trace>
+  <inkml:trace contextRef="#ctx0" brushRef="#br0" timeOffset="72299.78">13176 7302 0,'0'-35'78,"18"-18"-62,52-53 0,-17 18-1,0 0 1,-17 53-1,-36 0 1,17 35 0,-17-18-16,0 0 62</inkml:trace>
+  <inkml:trace contextRef="#ctx0" brushRef="#br0" timeOffset="82772.74">8943 9507 0,'18'0'109,"158"-17"-93,124 17-1,17 0 1,-105 0 0,-124 0-1,-70 0 1,35 0 46,70 0-46,124 0 0,-53 17-1,53 1 1,-53-18 0,-123 18-1,-54-18 1,1 0 62,194 17-47,299 54 0,-158-18-15,-36-18 0,-193-17-1,-89-18 1</inkml:trace>
+  <inkml:trace contextRef="#ctx0" brushRef="#br0" timeOffset="117813.17">10954 12982 0,'35'-17'94,"230"-1"-63,-89 18-15,-70 0 0,-36 0-1,-52 0 1,0-18 0,17 18-1,-17 0-15,17 0 16,0-17-16,0 17 15,89 0 1,-89 0 0,36 0-1,-36 0 1,0 0 0,-17 0-1,0 0 1,-18-18 15,35 18 94,282-18-94,1 18 1,-248 0-17,-52 0 48,123 0-32,0 0 0,18 18-15,-88 0-1,-54-18 1,1 0 62,17 0-62,0-18 15,18 18-15,-35-18-1,17 18 1,-17 0 0,-1 0-1,19 0 1,-36-17-1,17 17 1,54 0 109,-18 0-109,88 0-1,35 17 1,-70 1 0,-53-18-1,-35 0-15,17 0 63,53 0-48,-17 0 1,-36 0 0,0 18-1,18-18 16,-17 0-15,-19 17 0,36-17 281,88-35-266,-106 35-16,-17 0 1,-71-18 250,18 1-251,-18-1-15,-18 0 16,54 18 0,17 36 93,53-1-78,-36-35-15,1 0-16,0 18 15,-1-18-15,1 0 16,-18 17 0,35-17-1,-35 18 1,18 0 0,-1-1 15,-17 1 0,0 0 16,0-1-31,-17-17-1,-1 18 1,1-1-1</inkml:trace>
+  <inkml:trace contextRef="#ctx0" brushRef="#br0" timeOffset="120443.84">11289 13476 0,'0'0'0,"53"0"15,0 0 1,0 0-1,-18 0 1,0 0 0,-17 0-1,-1 0 1,19 0 62,-1 0-62,71-18-1,-18 1 1,0 17 0,-70 0-1,0 0 16,17 0-15,-18 0 0,19 0-1,-19 0-15,1 0 16,88 17 0,0 1 15,-106 17 63,0-17-79,-18 17 1,0-17-1,1-18-15,17 18 16,-18 17 0,0 0-1,1 0 1,-36 1 0,0-19-1,18 1 1,-18 0 15,-18-18-15,54 17-1,-1 1-15,-17-18 32,17 18-17,0-18 16,1 17-15,-1-17 0,1 0-1,-19 0 1,-34 0 0,-1 0-1,1 0 1,17 0 15,35 0-15,-17 0-16,-36 0 15,18 0 1,0 0 0,36 0-1,-1 0 48,-17 0-32,-18 0 0,-18 0 0,54 0 173</inkml:trace>
+  <inkml:trace contextRef="#ctx0" brushRef="#br0" timeOffset="122584.29">11007 11642 0</inkml:trace>
+  <inkml:trace contextRef="#ctx0" brushRef="#br0" timeOffset="122786.23">11024 11642 0</inkml:trace>
+  <inkml:trace contextRef="#ctx0" brushRef="#br0" timeOffset="130588.13">10795 14164 0,'-35'0'46,"-1"0"-30,1 18 15,0-18 1,17 0-1,1 0 0,-1 0-15,0 0-16,18 17 15,-35-17 1,17 0 0,1 0-1,-1 0 1,-17 0-1,17 0 1,1 18 0,-1-18-1,0 0 1,1 0 0,-19 0-1,1 0 16,0 0-15,17 0-16,1 0 16,-1 0-1,-17 0 1,-1 0 0,1 0-1,0 0 1,17 0-1,1 0 1,-1 0 0,0 0-1,1 0-15,-1 0 16,0 0-16,-17 0 16,-71-18-1,71 1 1,0 17-1,-106-18 1,88 0 0,17 1-1,1 17 1,-18 0 0,18 0-1,0-18 1,-1 18-1,19 0 1,-1 0 93,-105 0-77,17 0-1,-35 18-15,70-18-16,18 0 15,18 0-15,0 0 16,17 0-1,0 0 1,1 0 0,-1 0-1,-70 0 1,17 0 0,1 0-1,-1 0 32,54 0-31,-1 0 15,0 0-15,1 0-16,-1 0 15,-53 0 1,54 0-1,-1 0 32,1 0-31,-19 0 0,1 17-1,0-17 16,-1 0-15,19 0-16,17 18 16,-18-18-1,1 0 1,-1 0 0,-17 18-1,-18-18 1,35 17-1,0-17 1,1 0 0,-1 0-1,-35 0 1,0 18 0,36-18-16,-1 0 15,0 0 1,1 0-16,-1 0 47,0 0-32,1 0 1,-1 0 0,1 0-1,-1 0 95,-17 0-95,-18 0 1,17 0 15,19 0-15,-19 0-1,19 0 1,-1 0 0,-17 0-1,17 0 1,1 0-1,-19 0 1,1 0 0,17 0-1,1 0 1,-1 0 15,-17 0 0,17 0 16,1 0-31,-1 0 0,-70 0-1,53-18 1,-18 18-1,35 0 1,0 0 0,1 0 62,-1 0-47,0 0 0,-17 0-15,18 0 125,17-17 124,17 17-46,1-18-188,35-17 0,-36 17 1,1 18-17,0-18 17,-1 18-17,1-17 1,-18-1 15,18 18-15,-54 18 124,-17 17-124,36-35 0,17 18-1,-18-18 32,0 17 0,1 1-16,17 0 0,17-1 235,1 1-235,0-18-15,-1 18 0,1-1-1,0-17 16,-1 18-15,1-18 0,0 18-1,17-1 1,-53-34 343,18-19-343,0 1 0,0 17-1,0 1 1,-17-1-1,17 0 1,0 1 0,0-1-1,0 0 17,0 1-1,0-1-31,0 36 187,0 17-155,0 0-1,0-17-16,-18-18 64,0 0-64</inkml:trace>
+  <inkml:trace contextRef="#ctx0" brushRef="#br0" timeOffset="137035.79">7655 15857 0,'36'-53'47,"16"18"-16,1-18-15,-35 53-1,53-70 16,-36 34-15,-17 19-16,-1-1 16,18-35-1,1 18 1,-1 0 0,0-1-1,-17 19 1,0-1-1,-1-17 1,1 17 0,-1 1-1,1-1 1,-18 0 0,0 1-1,18 17 16,-18-18 1,17 18-17,-17-18 1,18 1 0,0-1-1,-18 0 16,-18 18 48,-35 0-64,-53 0 32,106 18-31,-17-18-1,52 0 126,71-18-125,-71 1-1,-17-1 16,-18 36 16,0-1-31,0 1-16,0 0 16,0 17-16,0-17 15,0 17 1,0-17-1,0-1 1,17-17 218</inkml:trace>
+  <inkml:trace contextRef="#ctx0" brushRef="#br0" timeOffset="151082.6">6456 10566 0,'-53'0'125,"18"0"-109,35 53 140,0 105-125,0-87 0,0-36-15,0-17 0,0-1-1,0 1 1,0 35 0,0-35-16,0 17 15,0-17 1,0 17-1,0-18 1,0 19 0,0-19-1,17 1 157,1-18-156,0 0-16,34 0 15,-16 18 1,-19-18 0</inkml:trace>
+  <inkml:trace contextRef="#ctx0" brushRef="#br0" timeOffset="154523.95">6914 14005 0,'-17'0'172,"-71"0"-156,35 0-16,0 0 15,0 0 1,35 0 0,1 0 62,-1 0-63,-53 0 1,-17 0 0,35 18-1,36-18 1,-1 0 15,-35 18-15,35-18-1,-17 0 1,35 17 125,0 1-126,0 17 1,0-17 0,0 17-1,0-17 1,0-1-1,0 1 1,0 0 0,0-1-1,0 19 1,-17 16 0,-1-52-1,18 36-15,0-19 31,0 1 16,70-18 110,54 0-142,176 0 16,-159-18-15,-106 18 0</inkml:trace>
+  <inkml:trace contextRef="#ctx0" brushRef="#br0" timeOffset="158347.99">6615 14658 0,'0'-18'78,"-18"18"-62,-17-17-1,-18 17 1,35 0 47,-17 0-48,17 0 16,1 0-15,-1 0 31,0 0-16,18 17 47,0 19-62,0-1 0,0 18-1,0 0 16,0 17-15,0-52-16,0-1 16,-17 72-1,-1-1 1,0-35 0,1 0-1,17-36 1,0 1-1,0 0 1,0-1 0,0 1 77,35-18-77,159 35 0,18-17-1,-1 17 1,-140-17 0,-53-18-1,-1 0 141</inkml:trace>
+  <inkml:trace contextRef="#ctx0" brushRef="#br0" timeOffset="173051.93">17410 9596 0,'247'0'266,"-124"0"-250,71 0-1,-70 0 1,-72 0 0,-16 0 93,87 0-93,-70 0-1,159 0 16,-54 17-15,-122-17 0,-1 0-1,18 0 1,35 0 0,0 0-1,-17 0 1,-18 0-1,-36 0 1,1 0-16,17 0 31,1 0-15,17 0 0,0 0-1,35 0 16,0 0-15,-18 0 0,-34 0-1,-19 0 1,1 0 0,17 0-1,36 0 1,-18 0-16,0 0 15,105 0 1,-69 0 0,-1 0-1,-18 0 1,19 0 0,-54 0-1,-18 0 16,1 0-15,17 0 109,301 18-109,-142-1-1,0 1 1,-71 0 0,-35-1-1,-70-17 1,0 0-1,-1 0-15,1 0 16,17 0 0,0 0-1,-17 0 1</inkml:trace>
+  <inkml:trace contextRef="#ctx0" brushRef="#br0" timeOffset="186269.8">8555 13635 0,'17'53'156,"19"35"-140,-19-53-16,19 36 15,-19-36 1,1 18 0,17-18-1,1 18 1,-1 0-1,0 18 1,-17-18 0,-1-36-1,1-17 1,-18 36-16,18-19 16,17 18-1,-35-17 1,35 17-1,18 54 1,-35-54 0,-1-35-1</inkml:trace>
+  <inkml:trace contextRef="#ctx0" brushRef="#br0" timeOffset="186972.25">8572 14552 0,'0'0'16,"0"-35"62,53-36-63,36-35 1,16 1 0,37-19-1,34-35 16,-105 89-31,-1 17 16,-17-35-16,0 17 16,-18 36-16,-17 17 15,-18 1 1</inkml:trace>
+  <inkml:trace contextRef="#ctx0" brushRef="#br0" timeOffset="210659.54">6668 15434 0,'0'18'78,"105"-18"-47,-69 0-15,-1 0-16,0 0 16,18 17-16,18-17 15,17 0 1,71 0-1,52 0 1,36 0 0,-35 0-1,-71 0 1,-35-17 0,0 17-1,-18 0 16,-35 0-31,0 0 16,0-18-16,-1 18 16,213-35-1,-53 35 1,-18 0 0,-71-18-1,-35 0 1,18 1-1,0-1 1,-35 18 0,-18-17-1,-36 17 1,-17-18 0,35 18 46,18 0-46,0 0-1,-35 0 1,0 0 0,17 0-1,-17 0 1,-1 0-1,1 0 17,-1 0-17,-17-18-15,53 18 16,-35 0 0,17 0-1,159-17 32,-105 17-31,-19 0-1,-35 0 1,-17 0 140,35 0-125,-18 0-31,-17-18 16,17 18 0,-53-18 312,-17 1-313,0-1 1,17 18 0,54 18 281,34 17-266,-35-35 0,-35 35 47,-35 1-47,-35 87 16,17-52-15</inkml:trace>
+  <inkml:trace contextRef="#ctx0" brushRef="#br0" timeOffset="-206279.91">10883 15663 0,'18'0'78,"35"0"-62,-18 0-16,-17 0 15,87-17 1,1 17 0,-17 0-1,34 0 16,53 0-15,-34 0 0,-19 0-1,53 0 1,71 35 0,-35-17-1,0-1 1,-107-17-16,-16 0 15,175 0 1,-87 0 0,-19 0-1,-17 0 1,1 0 0,-1-17-1,17 17 16,19 0-15,-18-18 0,-54 0-1,-52 1 1,-35 17-16,0-18 31,-18 0 16,-89 18 172,-16-17-204,16 17 1,37-35 0,-1 17-1,35 18 1,18-18 31,-18 36 47,18 0-79,0-1 1,18 18-1,17-35 1,1 0-16</inkml:trace>
+  <inkml:trace contextRef="#ctx0" brushRef="#br0" timeOffset="-205349.79">14517 15646 0,'0'17'63,"-35"54"-47,-1-53-1,1 52 1,-18-17-1,35-18 1,18-17 0,-17-18-1</inkml:trace>
+  <inkml:trace contextRef="#ctx0" brushRef="#br0" timeOffset="-191263.79">14358 15558 0,'-18'0'110,"1"0"30,-1 0-77,1 0-48,-1 0 17,0 0-17,1 0 1,34 0 234,36 0-219,-18 17-31,-17 1 16,53-18-1,-18 35 1,-1-35 0,-16 18-1,-19-1 1,19-17-1,-36 18 1,17-18-16,1 0 31,-18 18-15,18-18 0,-1 0-1,-17 17 16,18-17-15,-18 18 0,17-18-1,19 18 1,-36-1 171,-18-17-171,0 18 0,1-1-1,-18 1 17,17 0-17,0-1 1,1 1-1,-1 0 1,0-18 0,1 17-1,-19 1 1,19 0 0,-1-18-1,1 17 16,-1-17-15,0 18 15,1-18-15,-1 0 250,-35 35-251,35-35-15,-34 18 16,34-1-1,0-17 142,1 0-142,17-17 32,0-36-31,0 18-16,0-1 15,0-52 1,0 0 0,0 53-1,0-1 1,0 19 0,0-1-1,0 0 1,0 1 15,17 17 16,1 0 0,-18-18 0,18 1-16,-1-1 0,1 18 32,17 88-48,0-17 1,-17-18 0,-18-1-1,0 1 1,0 0-1,35-123 95,-17 70-79,0 0 16,-18-53 47,0 18-94</inkml:trace>
+  <inkml:trace contextRef="#ctx0" brushRef="#br0" timeOffset="-177896.8">14834 12823 0,'18'0'172,"0"0"-78,-18 18-63,52-18 0,-52 18-31,18-18 16,0 0 0,-18 17-1</inkml:trace>
+  <inkml:trace contextRef="#ctx0" brushRef="#br0" timeOffset="-175895.73">14764 12682 0,'35'18'109,"0"17"-93,-17-35 0,17 18-1,-17 17 1,-1-17 46,19-1-30,-36 1-32,17 0 31,-17-1 125,0 19-140,0-19-16,-35 1 15,17 17 1,1-17 0,-1 0-1,1-18 16,17 17-15,0 1 0,-18-18-1,18 17 1,-18-17-16,1 0 16,-1 18-1,0 0 32,18-1-31,-17-17 31,17 18-32,-18-18 1,18 18 15,-18-18 94,18-71-78,0 18-31,0 36-1,0-54 16,18 36-15,-18 17 0,0 0-1,0 1 17,0-1-1,0 0-16,0 1-15,18-18 32,-18-1-17,0 19-15,0-1 32,17 18 46,-17 53-47,18 0-15,-18 35-1,0-53 1,0-17-1</inkml:trace>
+  <inkml:trace contextRef="#ctx0" brushRef="#br0" timeOffset="-133568.89">22278 7126 0,'0'88'78,"-53"-17"-62,18 35-1,-36 17 1,-17 18-1,35-35 1,18-18 0,0 1-1,-1-1 1,1 0 0,17-70-16,18-1 15,0 1 1,0-1-1,-17 1 1,-1-18 140,0-53-140,18-35 0,0 0-1,0 17 16,0 18-15,0 36 0,0-1-1,18 89 126,0-1-125,-1 36-1,1-53 16,0-35-15,-1-18 93,1-36-93,0 19-16,-1-1 16,1 0-1,-1 1 1,1 17 0,0 0-1</inkml:trace>
+  <inkml:trace contextRef="#ctx0" brushRef="#br0" timeOffset="-126598.27">19773 12277 0,'0'88'156,"0"-18"-124,0-34-17,0-19 1,-17 1 15,17 0-15,-18-1-1,18 1 1,0 0 0,-18-1-1,18 1 1,-17-1 0,17 1-1,-18 17 16,0-17 1,18 0-17,-17 17 1,17-17 0,0-1-1,-18-17 1,18 35-1,0-17 1,0 0-16,-18 17 31,18-17-15,0-54 375,0 19-376,0-1 1,0 0 46,0 1-46,-17 17 0,17-18-1,0 1 16,0-19-15,0 19 0,0-1-1,0 0 1,0 1 0,0-1-1,0 0 1,-18 18-1,36 18 845,-18 35-829,0-35-15,0-1-1,17 1 1,-17 17 31,0-17-16,0-1-15,0 1 187,0 0-188,0-1 17,0 1-17,18-18 48,0 0 202,123-53-233,-106 35-17,0 1-15,1-1 16,-1 1-16,-17-1 31</inkml:trace>
+  <inkml:trace contextRef="#ctx0" brushRef="#br0" timeOffset="-113113.59">21890 15152 0,'-18'0'172,"18"-18"-156,0 1-16,0-19 15,0 1 16,18 0-15,-18 17 0,18-17-1,-18 17 1,0 0 0,0-17-1,17 18 16,-52 17 204,0 17-220,17 1 1,0-18 0,36 0 156,17 17-141,-17-17-16,17 0 1,-35 18 0,18-18 124</inkml:trace>
+  <inkml:trace contextRef="#ctx0" brushRef="#br0" timeOffset="-103988.75">19861 14164 0,'18'-18'109,"17"-35"-93,1 1-1,16-19 1,-34 36-16,0 17 16,-1-17-16,-17 17 15,0 1-15,18 17 16,-18-18-16,18 0 15,-18 1-15,0-1 16,17-17 0,-17 17-1,0 0 1,18 1 0,-18-1-1,18 18 16,-36 0 204,-17 18-220,17-1 1,0 1-16,-17 0 16,17-1-1,1-17 79,52-17 15,0-1-93,1-17 0,-1 35-1,-35-18 1,18 18 62,-1 0 31,-17 18-77,36 52-17,-36-17 1,17-17 0,1-1-1</inkml:trace>
+</inkml:ink>
+</file>
+
+<file path=ppt/ink/ink11.xml><?xml version="1.0" encoding="utf-8"?>
+<inkml:ink xmlns:inkml="http://www.w3.org/2003/InkML">
+  <inkml:definitions>
+    <inkml:context xml:id="ctx0">
+      <inkml:inkSource xml:id="inkSrc0">
+        <inkml:traceFormat>
+          <inkml:channel name="X" type="integer" min="-749" max="3091" units="cm"/>
+          <inkml:channel name="Y" type="integer" min="-1085" max="1664" units="cm"/>
+          <inkml:channel name="T" type="integer" max="2.14748E9" units="dev"/>
+        </inkml:traceFormat>
+        <inkml:channelProperties>
+          <inkml:channelProperty channel="X" name="resolution" value="121.13564" units="1/cm"/>
+          <inkml:channelProperty channel="Y" name="resolution" value="130.28436" units="1/cm"/>
+          <inkml:channelProperty channel="T" name="resolution" value="1" units="1/dev"/>
+        </inkml:channelProperties>
+      </inkml:inkSource>
+      <inkml:timestamp xml:id="ts0" timeString="2025-11-12T13:32:33.257"/>
+    </inkml:context>
+    <inkml:brush xml:id="br0">
+      <inkml:brushProperty name="width" value="0.05292" units="cm"/>
+      <inkml:brushProperty name="height" value="0.05292" units="cm"/>
+      <inkml:brushProperty name="color" value="#FF0000"/>
+    </inkml:brush>
+  </inkml:definitions>
+  <inkml:trace contextRef="#ctx0" brushRef="#br0">11307 6985 0,'105'0'47,"19"18"-31,423-18-1,-53 0 1,17-36 0,-123 19-1,-123-1 1,-195 18 15</inkml:trace>
+  <inkml:trace contextRef="#ctx0" brushRef="#br0" timeOffset="930.93">19914 6862 0,'36'0'62,"211"17"-31,158-17-15,54 0 0,-53 0-1,-107 0 1,-105 0 0,-123 18-1,-18-18 1,-35 0-1</inkml:trace>
+  <inkml:trace contextRef="#ctx0" brushRef="#br0" timeOffset="13451.83">18344 7902 0,'212'18'78,"88"0"-63,-159-18-15,53 0 16,-123 0 0,-54 0-1</inkml:trace>
+  <inkml:trace contextRef="#ctx0" brushRef="#br0" timeOffset="16299.94">18327 9013 0,'35'0'94,"353"0"-47,-35 18-32,0-18 16,-212-18-15,-18 18 0,-35-17-1,1 17 1,-1 0 0,-18-18-1,-17 18 1,-17 0-1,17 0 1,17 0 0,-17 0-16,0 0 15,106 0 1,-71 0 0,0 0-1,-35 0 16,35 0-15,36 0 0,-1 0-1,-17 0 1,53 0 0,-36 18-1,1-18 1,-54 17-16,1-17 15,176 0 1,-71 18 0,-17 0-1,70-1 1,0 1 0,-35-18-1,-52 0 16,16 0-15,-69 0 0,16 0-1,19 0 1,-71-18-16,0 18 16,123-17-1,-70-1 1,0 18-1,0-18 1,35 18 0,-35-17-1,-18 17 1,-18 0 0,1 0-1,-36 0 16,18 0-15,-18 0 0,-35-18-1</inkml:trace>
+  <inkml:trace contextRef="#ctx0" brushRef="#br0" timeOffset="17379.43">5768 10107 0,'123'0'78,"18"0"-62,36 0-1,-54 0 1,-87 0-1</inkml:trace>
+  <inkml:trace contextRef="#ctx0" brushRef="#br0" timeOffset="18232.24">9384 10954 0,'35'0'78,"230"-18"-62,52-17-1,-140 0 1,-89 17 0,-71 18 109</inkml:trace>
+  <inkml:trace contextRef="#ctx0" brushRef="#br0" timeOffset="20827.8">19861 10936 0,'18'0'125,"123"0"-110,-35 0-15,17 0 16,71 0 0,-88 0-16,71 18 15,-1-18 1,-70 0 0,0 0-1,-18 0 1,0 0-1,-17 0 1,17 0 0,0 17-1,18-17 1,-53 18 0,0-18-16,106 0 15,-107 0 1,90 0-1,-1 0 1,-53 0 0,0 0-1,18 0 1,-18 0 0,18 0-1,0 0 1,17 0-1,-52 0 1,-1 0 0,36 0-1,-35 0-15,35 0 16,176 0 0,-106 0-1,106-18 32,-158 18-31,-18 0-1,0 0 1,-1-35 0,1 35-1,-53 0-15,0 0 16,18-18-16,17 18 15,-18 0-15,142 0 16,-18 0 0,-71 0-1,1-17 1,-1 17 0,36 0-1,-71-18 1,1 18 15,-19 0-15,18-17-1,53-1 1,-17 0 0,-89 18-16,18-17 15,0 17 1,-35 0-1,17 0 1,18 0 0,35 0-1,-17 0 1,-1 0 0,-35 0-1,1 0-15,52 0 16,0 0 15,-17 0-31,-1 0 16,142 0-1,-106 0 1,17 0 0,-17 0-1,35 0 1,-35 0-1,-18 0 1,-17 0 0,-18-18-1,35 18 1,0 0 0,-53 0-16,1 0 15,-19-18-15,54 18 31,-36 0-15,18 0 0,17-17-1,19 17 1,-1 0 0,0 0-1,-17 0 1,-1-18-1,1 18 1,-18 0-16,-36 0 16,19 0-16,-1 0 15,18 0 1,-36 0 0</inkml:trace>
+  <inkml:trace contextRef="#ctx0" brushRef="#br0" timeOffset="45957.52">12806 12083 0,'17'0'62,"1"0"-46,0 0 0,-1 0-1,1 0 1,35 0 0,-18 0-1,18-18-15,124 0 16,-107 18 15,-35 0-15,-17 0-1,0 0 204,17 0-203,18 0-1,0 0 1,17 0 0,18 0-1,-70 0-15,17 0 16,-17 0-1,0 0-15,-1 0 16</inkml:trace>
+  <inkml:trace contextRef="#ctx0" brushRef="#br0" timeOffset="49033.06">11289 13141 0,'18'0'94,"599"0"-63,230 0 0,-477 0-15,-88 0 0,-88 0-1,-70-18 1,-36 18 0,-35 0-1,-36 0 1,213-17 124,70 17-124,35 0 0,-18 0-1,-105 0 1,-124 0 0,-53 0-1,1 0 1,-1 0-16,0 0 15,89-18 1,-36 0 0,-18 18-1,-17 0 1,0 0 0,-17 0-1,-1 0 1,0 0 15,-17 0-15,35 0-1,35 0 1,-71 0-16</inkml:trace>
+  <inkml:trace contextRef="#ctx0" brushRef="#br0" timeOffset="50092.22">21872 13053 0,'0'0'0,"106"0"16,-88 0 0</inkml:trace>
+  <inkml:trace contextRef="#ctx0" brushRef="#br0" timeOffset="51635">7338 13811 0,'17'0'46,"72"0"-30,-1 0 0,18 0-1,-36 0 1,-35 0 0,-17 0-1</inkml:trace>
+  <inkml:trace contextRef="#ctx0" brushRef="#br0" timeOffset="52816.19">13176 14058 0,'194'-35'78,"18"0"-62,35 35-1,176 0 1,-193 0-16,52 0 16,88 0-1,-141 0 16,-193 0-15</inkml:trace>
+  <inkml:trace contextRef="#ctx0" brushRef="#br0" timeOffset="55875.8">16104 11606 0,'18'0'110,"264"-70"-79,-176 52-31,0 1 15,70-19 1,-35 19 0,-105 17-1,-54-18 126</inkml:trace>
+  <inkml:trace contextRef="#ctx0" brushRef="#br0" timeOffset="56700.63">16228 11501 0,'35'-53'156,"18"17"-140,-35 19-1</inkml:trace>
+  <inkml:trace contextRef="#ctx0" brushRef="#br0" timeOffset="57050.02">16263 11501 0,'0'17'62,"18"-17"-30,-1 0-17,-17 18 1,18-1-16,17 1 31</inkml:trace>
+  <inkml:trace contextRef="#ctx0" brushRef="#br0" timeOffset="74860.22">12118 14905 0,'88'0'109,"265"0"-78,-36 0 0,-299 0 1,17 0 327,89 0-343,299 35-1,0-17 1,54-18 0,34 17-1,-299 1-15,-18-18 16,-53 0-16,-17 18 15,52-18 1,-141 0 0,-17 0-1,-1 0 17,89 0-17,159 17 16,17 1-15,-158-18-16,17 0 16,70 0-1,-70 0 1,-52 0-16,-1 0 16,123 0-1,-52 0 1,-18 0-1,71 0 1,-18 0 0,0 0-1,18 0 1,-18 0 0,-53 0-1,35 0 16,18 0-15,-123 0-16,17 0 16,88 0-1,-70 0 1,-70 0 0,34 0-1,36 0 1,0 0-1,-18-18 1,-17 18 0,-19 0-1,1 0 1,0 0 0,0 0-16,0 0 15,18-17 1,123 17-1,0-18 1,-36 18 0,-34-18-1,35 18 1,17 0 0,89 0-1,-18 0 1,-18 0-1,-17 0 1,-107 0-16,-16 0 16,-1 0-16,18 0 15,211 0 1,-158 0 0,-36 0-1,107 18 32,-160-18-31,-17 0-1</inkml:trace>
+  <inkml:trace contextRef="#ctx0" brushRef="#br0" timeOffset="75954.78">25912 15011 0,'70'17'125,"36"-17"-109,-53 0-16,0 0 16,17 0-1,1 0 1,-18 0 0,-18 0-1,36 0 32,-18 0-31,-18 0-1,-18 0 1,1 0 0</inkml:trace>
+  <inkml:trace contextRef="#ctx0" brushRef="#br0" timeOffset="77563.98">5627 15822 0,'0'18'93,"35"-18"-77,71 0 0,-36 0-1,1 0 1,17 0 0,36 0-1,34 0 1,-69-18-1,16 18 1,-16 0-16,-1 0 16,18 0-16,105 0 15,-17 0 1,-17 0 0,-89 0-1,-53 0 1</inkml:trace>
+  <inkml:trace contextRef="#ctx0" brushRef="#br0" timeOffset="83183.09">2575 15469 0,'18'0'47,"17"-17"-32,36-19-15,17 1 16,229-88 0,-70 70-1,-17 17 1,-36-16 0,-71-1-1,-35 17 1,-35 19 15,-35-1-15,17 0-1,-17 1-15,17 17 16,-17-18-16,-1-17 16,72 17-1,-72 1 1,19-1-1,-1 0 1,-18 1 0,1 17-1,-53 0 767,-71 0-767,-88 0 16,88 0-15,88 0 0,1 0 62,70 0 62,0 0-124,0 0-16,17 0 16,195 0-1,-107 0 1,-105 0 0,-35 0-1,-18 17 313,-88 71-296,-36 1-1,19-54-16,69 18 1,1-35 0,35-1-1,-18 18 32,-17-17-31,35 17-16,0-17 31,-18-18 110,36-53-94,35-70-32,0 52 1,-35 18-1,-1 18 1,-17 17 0,0 1-1,0-1 48,-17 106 156,-1-70-188,0-54 47,-17-16-62,17 16-1,1 19 1,-1 17-1,-35-18 1,-17 18 0,-1 0-1,53 0-15,1 0 16,-1 0 0,-17 18 124,-18-1-124,18 1-1,35 17 126,35 18-125,0-35-1,-17-18 32,88 0-31,35 0-1,0 0 1,-71 0 0,-87 0 62,-1 0-63,53-18 64,1 0-48,-89 18 109,0 0-124,-35 0 0,17 0-1,1 0 1,70-17 62,-18 17 31,-211 0-77,140 0-17,1 0 1,71 0 0,158 0 30,-18 0-30,-70 0 0,-53-18 15,-35 18 0,-18 0 0,141 0 32,0 0-32,-70 0-15,0 0 78</inkml:trace>
+  <inkml:trace contextRef="#ctx0" brushRef="#br0" timeOffset="99938.91">2469 13723 0,'36'0'62,"281"-88"-30,1 17-1,-36 18 0,-88 0 0,-194 36 63,88-18 47,124-18-126,-106 17 1,-106 19 109,-36-1-109,-122-35-1,69 18 1,-16 0 0,16 17-1,125 18 126,17 0-126,17 0 1,18 0 0,18 35-1,-35-17 1,-54-18 0,-17 35 109,-17 53-110,-36 1 1,0-19-1,18-35 1,35-17 0,0 0 234,-18 17-219,0 0 0,18-17 0</inkml:trace>
+  <inkml:trace contextRef="#ctx0" brushRef="#br0" timeOffset="101107.06">3581 13194 0,'17'0'31,"1"18"32,0-18-48,17 17 1,0-17 0,0 18-1,54-1 1,-54 1 0,-17 0-1,-1-18 1,1 0 93</inkml:trace>
+</inkml:ink>
+</file>
+
+<file path=ppt/ink/ink12.xml><?xml version="1.0" encoding="utf-8"?>
+<inkml:ink xmlns:inkml="http://www.w3.org/2003/InkML">
+  <inkml:definitions>
+    <inkml:context xml:id="ctx0">
+      <inkml:inkSource xml:id="inkSrc0">
+        <inkml:traceFormat>
+          <inkml:channel name="X" type="integer" min="-749" max="3091" units="cm"/>
+          <inkml:channel name="Y" type="integer" min="-1085" max="1664" units="cm"/>
+          <inkml:channel name="T" type="integer" max="2.14748E9" units="dev"/>
+        </inkml:traceFormat>
+        <inkml:channelProperties>
+          <inkml:channelProperty channel="X" name="resolution" value="121.13564" units="1/cm"/>
+          <inkml:channelProperty channel="Y" name="resolution" value="130.28436" units="1/cm"/>
+          <inkml:channelProperty channel="T" name="resolution" value="1" units="1/dev"/>
+        </inkml:channelProperties>
+      </inkml:inkSource>
+      <inkml:timestamp xml:id="ts0" timeString="2025-11-12T13:34:44.757"/>
+    </inkml:context>
+    <inkml:brush xml:id="br0">
+      <inkml:brushProperty name="width" value="0.05292" units="cm"/>
+      <inkml:brushProperty name="height" value="0.05292" units="cm"/>
+      <inkml:brushProperty name="color" value="#FF0000"/>
+    </inkml:brush>
+  </inkml:definitions>
+  <inkml:trace contextRef="#ctx0" brushRef="#br0">9013 5944 0,'18'0'63,"53"-17"-48,105-19 1,18 1-1,-18 17 1,-87 1 0,-72 17-16</inkml:trace>
+  <inkml:trace contextRef="#ctx0" brushRef="#br0" timeOffset="1121.9">19526 5909 0,'-17'0'47,"70"0"31,70 0-63,-17-18 1,17 18 0,-35-17-1,-70 17 1</inkml:trace>
+  <inkml:trace contextRef="#ctx0" brushRef="#br0" timeOffset="3822.04">8555 7091 0,'88'0'141,"212"-18"-110,53 18-15,-300 0-1,70 0 1,-35 0 0,-17 18-1,88-18 16,-18 0-15,53 0 0,0 0-1,-53-18 1,0 18 0,-35 0-1,53-17 1,87 17-1,-104-18-15,16 18 16,-17-18-16,54 18 16,-37 0-16,19-17 15,317-1 1,-195-17 0,-34 17-1,-106 0 16,-142 18-15</inkml:trace>
+  <inkml:trace contextRef="#ctx0" brushRef="#br0" timeOffset="5342.88">9031 9437 0,'35'0'171,"195"0"-155,140 0 0,106 0-1,-35-53 1,36 35 0,-178-17-1,-122 17 1,-89 18-1,-70-17 1,-1 17 0,-17-18-1,36 18-15,17 0 16,-36 0 0</inkml:trace>
+  <inkml:trace contextRef="#ctx0" brushRef="#br0" timeOffset="7174.18">9666 12100 0,'35'0'94,"336"-17"-63,-283-1-15,194 0-1,71 18 1,-106-17 0,-194 17-1</inkml:trace>
+  <inkml:trace contextRef="#ctx0" brushRef="#br0" timeOffset="10382.87">10460 14111 0,'35'0'78,"71"0"-62,35-18 0,-17 18-1,-19 0 1,-52 0 0,-35 0 15,-18-17-16,35 17-15,-17 0 16,-1 0 0</inkml:trace>
+  <inkml:trace contextRef="#ctx0" brushRef="#br0" timeOffset="13815.02">10389 16633 0,'0'-17'172,"36"-177"-141,-19 106-16,-17-1 1,18 19 0,-18-1-1,35-35 1,-17-35 0,17 18-1,-35 17 1,18 71-16,-18 0 15,0-36 1,0 18 0,0 18-1,0-18 1,0 35 0,0-52-1,0 34 16,0 19-15,0-36 0,0 18-1,0-54 1,0 72-16,0-1 16,0-35-1,0 18 1,0 0-1,0-1 1,0 1 0,-18 53 140,0-1-140,1 1-1,-36 17 1,18 0-1,17-17 1,0 0 0,-17-1-1,35 1 1,-18 0 0,18-1-16,-17-17 15,70-53 188,-18 0-187,0 18 0,-17 18-1,0-1 32,-1 18 203,54 35-203,-18 18-16,35 0-15,-18 0-1,-17-18 1,-17-35 0,-19 18-1,-17 0 1</inkml:trace>
+  <inkml:trace contextRef="#ctx0" brushRef="#br0" timeOffset="18582.95">20179 7038 0,'18'0'172,"281"0"-156,72 0 15,-18 18-15,-177-18-16,71 0 15,-124 17 1,-87-17 0,17 0 62,105 0-63,19 0 1,-1 0 0,-88 0-16,-17 0 15,88 0 16,-54-17-15,1-1 0,-35 18-1,-18 0 1,0 0 0,-36-18-1,54 18 1,-36 0-16,0 0 15,1-17-15,-19 17 16,54 0 0,-53 0-1,-1 0-15,1 0 16,17 0 0,0 0-1,36 0 16,-36 0-15,18 0 0,-18 0-1,18 0 1,35 0 0,-70 0-16,17 0 15,18 0 1,-35 0-1,17 0 17,53 17-17,1-17 1,-36 0 0</inkml:trace>
+  <inkml:trace contextRef="#ctx0" brushRef="#br0" timeOffset="19440.04">25329 6897 0,'36'0'109,"34"0"-93,54 0-16,-54 0 15,124 0 1,-70 0-1,-71 0-15,-18 0 16</inkml:trace>
+  <inkml:trace contextRef="#ctx0" brushRef="#br0" timeOffset="20559.53">18274 8026 0,'18'0'79,"370"0"-48,-247 0-16,194-18 1,-18 0 0,-123 18-1,-70-17 1,-89 17 0</inkml:trace>
+  <inkml:trace contextRef="#ctx0" brushRef="#br0" timeOffset="21839.11">18256 5821 0,'265'0'62,"-36"17"-31,-52 1-15,-107 0-16,1-18 16,34 17-1,-52-17 1,36 18-1,34-18 1,53 0 0,-52 0-1,-54 0 1,-52 0 0,0 0 30</inkml:trace>
+  <inkml:trace contextRef="#ctx0" brushRef="#br0" timeOffset="23294.98">18239 8996 0,'70'-18'62,"-17"18"-46,53-17-1,17 17 1,89 0 0,35 0-1,-71 0 1,89 0-1,-36 0 1,-35 17 0,-70-17-1,-54 18 1,-34-18 0</inkml:trace>
+  <inkml:trace contextRef="#ctx0" brushRef="#br0" timeOffset="28566.95">18309 10054 0,'124'-17'110,"493"-19"-79,-123 1 0,-441 17-15</inkml:trace>
+  <inkml:trace contextRef="#ctx0" brushRef="#br0" timeOffset="33215.68">28434 9260 0,'-18'0'63,"36"0"31,0-17-79,17 17 1,-18-18 0,36 18-1,-17 0 1,-1-17 15,-17 17-15,-1-18-1,18 18 1,18-18 0,0 18-1,-35 0 1,-53 0 359,-36 0-360,53 18 1,-52 0 0,17-18-1,35 0 1,18 17 140,-17 1-125,-1-18-15,0 17 0,-17 1-1,53-18 204,52-35-203,-34 35-16,87-53 15,-17 18 1,-53-1 0,-36 36 77,19 0-77,-19 0 0,54-17-1,-53-1 1,17 18-16,-17-18 31,-1 18-15,1 0 46,-18-17 16,-18 17-31,-123 17-16,88 1-15,-17 0 0,17-1-1,35 1 1,0-18 0,1 18-1,-1-18 1,-17 35-1,17-17-15,-35-1 16,36 1 0,-1-18 15,-17 17-15,17 1-1,0 0 16,-34-1-15,34 1 0,0-18-1,18-53 267,36 0-267,-19 0 1,1 0-1,-1 53 1,-17-17 0,0 70 171,0-18-171,-17 18-1,-1-18 1,18-17 0,0-1-1,0 19 1,-17-36 0,17 17 46,0 1 63,52-18-94,-16 18 1,-36-71 311,0 0-327,0 35 0,0 0 62,0-34-47,0 16 0</inkml:trace>
+  <inkml:trace contextRef="#ctx0" brushRef="#br0" timeOffset="35030.94">18680 11042 0,'317'0'407,"-35"0"-392,1 0 1,-1 0 0,-194 0-16,0 0 15,-70 0 1</inkml:trace>
+  <inkml:trace contextRef="#ctx0" brushRef="#br0" timeOffset="38430.9">19544 11994 0,'88'-35'109,"-35"18"-93,106-1-1,-36 0 1,-17 1 0,-71-1-1</inkml:trace>
+  <inkml:trace contextRef="#ctx0" brushRef="#br0" timeOffset="43127.54">21061 13088 0,'123'0'187,"36"0"-171,-53 0-16,106 18 15,-36-18 1,-88 17 0,-70-17-1,-1 0 141,107 0-124,-1 0-17,-34 0 1,-54 0 0</inkml:trace>
+  <inkml:trace contextRef="#ctx0" brushRef="#br0" timeOffset="44829.18">18397 14023 0,'0'0'0,"89"0"15,87 0 1,-88 0 0,0 0-1,-17-18 16,-18 18-15,-18 0 0,18-17-1,-18 17 1,18 0 0,-18 0-1,1 0 1,-19 0-1,19 0 1,-19-18 0,1 18-1</inkml:trace>
+  <inkml:trace contextRef="#ctx0" brushRef="#br0" timeOffset="52215.23">21114 16404 0,'0'-17'63,"0"-1"-48,0-17 1,17-1 0,-17-17-1,18 0 16,0 18-15,-1 0 0,1-18-1,-18 35 1,0 1-16,0-1 16,18-35-1,-1 18 1,-17-36-1,0 18 1,0-35 0,18 35-1,-18-17 1,0 35 0,17-36-1,-17 18 16,0 35-31,0-17 16,0 17-16,0 1 16,18-71-1,-18 35 1,18-18 0,-18 18-1,0-17 1,17-1-1,-17 1 1,18-1 0,-18 36-1,18-18 1,-18 18 0,0 17-1,0 0 16,-18 36 141,0 0-156,-17-1 0,17 1-1,-17-1 16,18 1 1,-1 0-1,18-1-15,-18 1-1,1 0 1,-1-1-16,18 1 15,-71 17 1,71-17 0,0-1 77,53-17-61,-35-17-17,17-1 1,1-17 0,-19 35-16,18-53 15,1 35 1,-19 1-1,1-1 1,0 18 0,-18-18-1,17-17 1,-17 18 0,18 17-1,-18-18 16,18 18 141,-1 0-125,1 0-16,-18 35-15,18-17 0,-1 17-1,1 0 1,-18 1 0,17-19-1,-17 1 1,0 17-1,18-35 1,-18 18 0,0-1-16,0 19 31,0-19 0,0 1-15,0 0 93,0-36 16,-18-35-94,1 53-31,17-18 16,-18 1 0,18-1-1,-17 1-15,17-36 32,-18 17-17,18 19 1,-18-1-1,18 0 1,-17 18 0,34 0 109,1 0-110,-18 18 1,18 17 0,-1 1-1,-17-19 1,0 1-1,-17-18 48,-36-106-32,53 71 0,-36 35 126,-17 0-126,0 17 0,18-17 0,35 18 16,-35-18-15,35 18-17,-18-18 1,1 17-1,17 1 1,35 0 390,35-1-390,1 1 0,-36-18-1,1 0 1,-19 0 46,19 0-30,-19 0-1,1 0 16,-53 0 62,-107 0-78,72 0 1,176 0 93,-89 0-110,-70 0 48,18 0-32,141 0 47,-88 0-62,-71-18 46,53-17 79,17 17-110,1 18-15,-18-35 124,0 70-30,0 1-79,-18-36 31,1 0-46,-1 0 15,0-18 110,1 18-125,-1-18-1,-17 18 1,17 0-1,-17 36 1,0-1 0,-1-35-1,36 18 1,36-54 187,-1 19-187,71-54-1,-36 36 1,-52 35 0,17 0 187,1 35-172,-19-17-15,1-18-16,-1 35 15,1-17 16,-18-1-15,18-17 0,-1 18-1,-17 0 1,18-18 31</inkml:trace>
+</inkml:ink>
+</file>
+
+<file path=ppt/ink/ink13.xml><?xml version="1.0" encoding="utf-8"?>
+<inkml:ink xmlns:inkml="http://www.w3.org/2003/InkML">
+  <inkml:definitions>
+    <inkml:context xml:id="ctx0">
+      <inkml:inkSource xml:id="inkSrc0">
+        <inkml:traceFormat>
+          <inkml:channel name="X" type="integer" min="-749" max="3091" units="cm"/>
+          <inkml:channel name="Y" type="integer" min="-1085" max="1664" units="cm"/>
+          <inkml:channel name="T" type="integer" max="2.14748E9" units="dev"/>
+        </inkml:traceFormat>
+        <inkml:channelProperties>
+          <inkml:channelProperty channel="X" name="resolution" value="121.13564" units="1/cm"/>
+          <inkml:channelProperty channel="Y" name="resolution" value="130.28436" units="1/cm"/>
+          <inkml:channelProperty channel="T" name="resolution" value="1" units="1/dev"/>
+        </inkml:channelProperties>
+      </inkml:inkSource>
+      <inkml:timestamp xml:id="ts0" timeString="2025-11-12T13:35:55.873"/>
+    </inkml:context>
+    <inkml:brush xml:id="br0">
+      <inkml:brushProperty name="width" value="0.05292" units="cm"/>
+      <inkml:brushProperty name="height" value="0.05292" units="cm"/>
+      <inkml:brushProperty name="color" value="#FF0000"/>
+    </inkml:brush>
+  </inkml:definitions>
+  <inkml:trace contextRef="#ctx0" brushRef="#br0">8837 7655 0,'18'0'125,"35"0"-63,158 18-46,-87-18-16,-54 18 15,54-18 1,-71 17 0,-36-17-16</inkml:trace>
+  <inkml:trace contextRef="#ctx0" brushRef="#br0" timeOffset="710.47">12188 7973 0,'18'0'78,"141"0"-47,-106 0-15,123 0-1,-176-18 1</inkml:trace>
+  <inkml:trace contextRef="#ctx0" brushRef="#br0" timeOffset="1777.97">7479 8220 0,'18'0'47,"317"17"-16,-159-17-15,230 36 0,-1-1-1,-87-17 1,-159-18-1</inkml:trace>
+  <inkml:trace contextRef="#ctx0" brushRef="#br0" timeOffset="7304.17">8467 9366 0,'17'0'235,"213"0"-220,52 36 1,35-19 0,-17 1-1,-18-18 1,-123 17-16,-71-17 15,36 0 1,-89 0 0,-17 0-1,-1 0 17,19 0-17,34 0 1,54 0 15,-54 0-31,1 0 16,35 0-1,-53 0-15,-1 0 16,54 0 0,-70 0-16,34 0 15,1 0 1,-1 0-1,18 0 1,54-17 0,-19 17-1,1 0 1,-19 0 0,-16 0-1,-1 0 16,-53 0-31,0 0 16,1 0 0,-1 0-1,-18 0 1,19 0 0,34 0-1,36 0 1,71 0-1,-1-18 1,0 18 0,1-17-1,-54-1 1,-52 0 0,-54 18-1</inkml:trace>
+  <inkml:trace contextRef="#ctx0" brushRef="#br0" timeOffset="9727.29">6438 10054 0,'53'-17'63,"71"-1"-32,-71 0-31,52 18 31,-69 0-15,-1 0 0,-17 0 31,17 0 31,388 18-47,-282-18-31,406 35 31,70-17 0,-511-18-31,18 0 16,52 0 0,-70 0-1,-35 0 1,-1 0 0,-17 0-1,-18 0-15,-17 0 16,52 17-1,-34-17-15,34 18 16,18-18 0,1 0-1,16 0 1,1 0 0,0 0-1,35-18 1,-35 18 15,-18-17-15,-17 17-1,-36 0-15,18 0 16,-18 0-16,1 0 16,52 0-1,-18 0 1,-17 0-1,18 0 1,-54 0 0</inkml:trace>
+  <inkml:trace contextRef="#ctx0" brushRef="#br0" timeOffset="26319.23">11994 10901 0,'18'0'141,"35"0"-125,176 17-1,89 1 1,-159-18-1,17 0 1,-35 0-16,-53 0 16,159 0-1,-194 0 1,-35 0 296,105-18-296,54 1 0,-36-18-1,-88 17-15,70-17 16,-88 35 0</inkml:trace>
+  <inkml:trace contextRef="#ctx0" brushRef="#br0" timeOffset="28818.62">7796 11430 0,'53'0'47,"-17"0"-31,52 0-1,-18 0 1,1-18-1,-1 18 1,19 0 0,16 0-1,19 0 1,35 0 0,-53 0-16,-18 0 15,176-17 1,-175 17 15,-54 0-15,-18 0-1,36 0 517,159 35-517,123 18 1,53 0-1,-53-18 1,-105-17 0,-125-1-1,-87-17 1</inkml:trace>
+  <inkml:trace contextRef="#ctx0" brushRef="#br0" timeOffset="31412.31">14323 11271 0,'35'0'62,"36"-35"-46,-1 17-1,1-35 1,-1 53 0,-52-17-1,17-1 1,18 0-1,-18 18-15,18-17 16,18-1 0,-36 18-1,-17 0 1,-106 0 125</inkml:trace>
+  <inkml:trace contextRef="#ctx0" brushRef="#br0" timeOffset="32616.98">14323 11271 0,'17'-17'110,"36"-19"-95,0-17 1,0 0 0,0 18-1,-35 35 1,-18-17-16,17 17 15,-34 35 79,-54 35-78,36-34-16,-18-1 31,35-17-15,1-18-16,17 17 15,0 1 17,-18 0-17,53 17 79,18 0-78,-17-35-1,-19 18 16</inkml:trace>
+  <inkml:trace contextRef="#ctx0" brushRef="#br0" timeOffset="37194.96">12065 11553 0,'71'0'32,"34"-17"-17,36 17 1,-17-18 15,-18 18-15,17 0-1,-70-17 1</inkml:trace>
+  <inkml:trace contextRef="#ctx0" brushRef="#br0" timeOffset="39762.93">9807 12912 0,'18'0'62,"17"0"-46,0 0 0,18 0-1,106 0 32,-71 0-31,0 0-1,-52 0 1,17 0 0,0 0-1,-18 0-15,18 0 16,-18 0-16,18 0 15,141 0 1,-88 0 0,0 0-1,35 0 1,-35 0 0,-18 0-1,-18 0 16,-17 0-15,0 0 0,0 0-1,0 0 1,-35 0-16,17 0 16,18 0-1,-18 0 1,36 0-1,35 0 1,17 0 0,0 0-1,19 0 1,-54 17 0,-18-17-1,1 0 16,52 0-15,-52 0-16,52 0 16,89 0-1,-88 0 1,-107 0 0,-52 0 93</inkml:trace>
+  <inkml:trace contextRef="#ctx0" brushRef="#br0" timeOffset="41352.26">10883 13617 0,'0'0'0,"35"0"31,71 0-15,0 0 0,0 0-1,0-17 16,-36 17-15,1 0 0,-1-18-1,1 18 1,0 0 0,-36 0-16,18 0 31,17 0-16,-52 0-15,17 0 16,18 0 0,-35 0-1</inkml:trace>
+  <inkml:trace contextRef="#ctx0" brushRef="#br0" timeOffset="43270.18">7179 14252 0,'0'18'140,"159"0"-108,-89-1-17,177-17 1,-123 0 0,-107 0-1,1 0-15,0 0 110,52 0-95,54 0 1,17 0-1,53 0 1,0 0 0,-71 0-1,-34 0 1,-54 0-16,0 0 16,36 0-1,-54 0-15,54 0 16,35 0 15,0-17-15,-54 17-1,1 0 1,-35 0 0,0 0-1,52 0 1,36 0-1,53-18 1,-36 18 0,-35 0-1,-52 0-15,17 0 16,-18 0 0,-17 0-1,-1 0 1,54 0 15,17 0-15,0 0-1,-70 0 1</inkml:trace>
+  <inkml:trace contextRef="#ctx0" brushRef="#br0" timeOffset="44427.01">7355 14870 0,'18'0'93,"0"0"-77,70 0 0,88 17-1,-105-17-15,35 0 16,0 18-16,-54-18 15,19 0 1</inkml:trace>
+  <inkml:trace contextRef="#ctx0" brushRef="#br0" timeOffset="46000.89">10566 15028 0,'35'0'172,"124"18"-157,-36 0 1,36-18 0,-36 0-1,-34 0 1,-36 0 0,-36 0-1</inkml:trace>
+  <inkml:trace contextRef="#ctx0" brushRef="#br0" timeOffset="46760.2">7073 15681 0,'106'0'109,"17"0"-93,-17 0 0,-70 0-1,-19 0 1</inkml:trace>
+  <inkml:trace contextRef="#ctx0" brushRef="#br0" timeOffset="52160.86">19156 13282 0,'106'0'203,"246"0"-171,-158 0-1</inkml:trace>
+  <inkml:trace contextRef="#ctx0" brushRef="#br0" timeOffset="55055.91">19738 13829 0,'35'0'31,"-17"0"-15,52-18-1,19 18 1,16-17 0,-16 17-1,-19 0 1</inkml:trace>
+  <inkml:trace contextRef="#ctx0" brushRef="#br0" timeOffset="56283.39">28575 13617 0,'18'0'203,"17"0"-203,18 0 16,-36 0 0,1 0-1</inkml:trace>
+  <inkml:trace contextRef="#ctx0" brushRef="#br0" timeOffset="60059.41">20391 14182 0,'35'0'63,"53"0"-47,-53 0-16,36 0 15,-36 0 1</inkml:trace>
+  <inkml:trace contextRef="#ctx0" brushRef="#br0" timeOffset="61117.43">26300 14164 0,'17'0'63,"213"0"-16,69 0-32,-228 0 1,141 18 15,-177-18-15,-17 0-1,17 0 1,0 0 0,0 0-1,-17 0 95</inkml:trace>
+</inkml:ink>
+</file>
+
+<file path=ppt/ink/ink14.xml><?xml version="1.0" encoding="utf-8"?>
+<inkml:ink xmlns:inkml="http://www.w3.org/2003/InkML">
+  <inkml:definitions>
+    <inkml:context xml:id="ctx0">
+      <inkml:inkSource xml:id="inkSrc0">
+        <inkml:traceFormat>
+          <inkml:channel name="X" type="integer" min="-749" max="3091" units="cm"/>
+          <inkml:channel name="Y" type="integer" min="-1085" max="1664" units="cm"/>
+          <inkml:channel name="T" type="integer" max="2.14748E9" units="dev"/>
+        </inkml:traceFormat>
+        <inkml:channelProperties>
+          <inkml:channelProperty channel="X" name="resolution" value="121.13564" units="1/cm"/>
+          <inkml:channelProperty channel="Y" name="resolution" value="130.28436" units="1/cm"/>
+          <inkml:channelProperty channel="T" name="resolution" value="1" units="1/dev"/>
+        </inkml:channelProperties>
+      </inkml:inkSource>
+      <inkml:timestamp xml:id="ts0" timeString="2025-11-12T13:38:48.116"/>
+    </inkml:context>
+    <inkml:brush xml:id="br0">
+      <inkml:brushProperty name="width" value="0.05292" units="cm"/>
+      <inkml:brushProperty name="height" value="0.05292" units="cm"/>
+      <inkml:brushProperty name="color" value="#FF0000"/>
+    </inkml:brush>
+  </inkml:definitions>
+  <inkml:trace contextRef="#ctx0" brushRef="#br0">19438 9066 0,'18'0'109,"35"0"-93,88 0-1,53 0 1,17 0 0,-17 0-1,-88 0 1,-70 0-1,-19 18 17,1-18-17,-1 0 1,1 0 0,0 0-1,70 0 16,-17 0-15,17 0 0,35 0-1,1 0 1,-1 18 0,53-18-1,-17 0-15,-18 0 16,230 17-1,52-17 1,-35 0 0,-194 0-16,-35 0 15,247 0 1,-212 0 0,-71 0-1,71 0 32,-106 0-31,1 0-1,-1 0 1,18 0 0,-1 0-1,-34 0-15,0 0 16,-1 0-16,1 0 15,193 0 1,18 18 0,18-18-1,0 0 1,-18 0 0,-70 0-1,-18 0 16,-70 0-15,-54 0 0,-35 0-16,1 0 15,34 0 1,1 0 0,-54 0-16,54 0 15,17 0 1,36 0-1,-1 0 1,18 0 0,-17 0-1,34 0 1,54 0 0,-53 0-1,-18 0 16,-35 0-15,0 0 0,35 0-1,-71 0 1,18 0 0,18 0-1,-53 0 1,0 0-1,35 0 1,-35 0 0,18 0-1,-36 0-15,18 0 16,18 0 0,17 18-1,-53-18-15,18 0 31,-18 0-15,-17 0 578,-18 17-547,18-17 125,52 0-157,-35 0 1,1 0-1,-19-17 1</inkml:trace>
+  <inkml:trace contextRef="#ctx0" brushRef="#br0" timeOffset="4583.79">4639 10513 0,'18'0'94,"17"0"-79,-17 0 1,34 0 0,37 0-1,34-18 1,18 1 0,-17-1-1,-18 18 1,-36 0 15,1 0-15,-54 0-1,1 0-15,0 0 16,-1 0 0,1 0-16,0 0 15,52 0 1,-17 0-1,0-18 1,17 1 0,-17 17-1,-17-18 1,-36 0 0</inkml:trace>
+  <inkml:trace contextRef="#ctx0" brushRef="#br0" timeOffset="75399.66">12912 12753 0,'35'0'109,"159"0"-77,-88 0-32,176 0 15,36 18 1,-36-18 0,-35 17-1,-106-17 1,-35 0-1,35 0 1,-18 0 0,1 0-1,17 0 1,-35 0 0,-18 0-16,53 0 15,-70 0 1,52 0-1,-17 0 1,0 0 0,-1 0-1,-69 0 1,-1 0 0,18 0-1,35 0 1,-35 0-1,-18 0 1,-17 0-16,0 0 16,-1 0-16,54 0 31,-36 0-15,-17 0-1,-1 0 1,36 0 15,0 0-15,0 0-1</inkml:trace>
+  <inkml:trace contextRef="#ctx0" brushRef="#br0" timeOffset="79719.74">16651 13988 0,'18'0'47,"35"0"-32,53 0 1,-18 0 0,0 0-1,35 0 1,1 0 0,-18 0-1,-89 0 1,36 0-16,18 0 31,-1 0-15,1 0-1,17 0 1,-35 0 0,-18 0-1,1 0 1,-19 0-1,1 0 17,-1 0 374,54-18-390,-18 18-16,-18-18 15,-17 18 1,0 0 62</inkml:trace>
+  <inkml:trace contextRef="#ctx0" brushRef="#br0" timeOffset="83501.89">23812 14235 0,'53'0'63,"124"0"-48,34 0 1,54 0-1,-106 0-15,105 0 16,1 0 0,-18 0-1,0 0 1,-35 0 0,-54 0-1,1 0 16,-36 0-15,1 0 0,17 0-1,-88 0-15,18-18 16,-19 18-16,19 0 16,176-18-1,-35 18 1,17 0-1,53 0 1,71 0 0,-18 0-1,0 0 1,-35 0 0,-53-17-1,-159-1 1,18 18-1,18-18 1,-54 18 0</inkml:trace>
+  <inkml:trace contextRef="#ctx0" brushRef="#br0" timeOffset="92840.54">4286 15222 0,'0'18'109,"18"-18"-93,-18 18 0,18 52-1,-18-35-15,0 36 16,17-18 0,-17-18-1,0-17 1,0 0 15,106-18 172,300 0-172,-283 0-15,89 0 0,-142 0-16,-17 0 15,0 0-15,-17 0 16,34 0 0,-35 0-16,71 0 15,-18 0 1,36 0-1,52 17 1,18-17 0,53 18-1,35-1 1,1-17 0,-19 0-1,-52 0 1,-71 0 15,35 0-15,-123 0-16,53 0 15,35 0 1,71 0 0,17 0-1,-35 0 1,0 0-1,0 0 1,-88 18 0,-71-18-1,-35-18 126,18 1-125,-18-36-1,0 0 1,0 0-1,0 0 1,0 18-16,0 17 16,0 1-1,0-1 17</inkml:trace>
+  <inkml:trace contextRef="#ctx0" brushRef="#br0" timeOffset="96624.67">11077 15222 0,'0'18'109,"0"0"-93,0-1-16,0 1 15,18 52 1,-18-52-16,0 17 15,17 36 1,-17-36 0,0 1-1,18-1 1,-18 0 0,0-17-1,0-1 1,18-17 187,-1 0-78,89 0-94,35 0-15,-17 0-1,17 0 1,-18-17 0,-34-1-1,-54 18 1,18 0-16,35-18 16,-17 18-1,-1 0-15,159-17 16,-87 17 15,-19 0-15,36 0-1,-18 0 1,0-18 0,35 1-1,54-1 1,-19 0-1,1 1 1,0-1 0,-89 18-16,1-18 15,193 18 1,-105 0 0,-1 0-1,178 0 32,-195 0-31,35 0-1,18 18 1,-88-18 0,17 0-1,-106 0-15,19 0 16,17 18-16,-36-18 15,159 35 1,-88-17 0,-17-18-1,-18 0 1,-18 17 0,-35-17-1,0 0 16,-36 0 173,-17 18 296,18-18-407,35 0-15,35-53-62,-70 35 0,17 1-1,-35-1 1,18 18 0,-1 0 46,1 0-31,0 18 1,-1-18-1,-17-18 78,0 0-93,0-17 15,0-36-15,0 54-16,0-54 15,0 1 1,0-1 0,0 18-1,0 18 1,0 17-1</inkml:trace>
+  <inkml:trace contextRef="#ctx0" brushRef="#br0" timeOffset="99996.49">18768 15275 0,'17'53'63,"54"88"-48,-18-70 1,-18 17-1,-17-35 1,-1-18 0,1-17 109,0-18-47,52 0-63,230-35 1,0-1 0,35 1-1,-17 0 1,-213 17 0,-16 18-16,52-17 15,-71 17 1,1 0-16,-18 0 31,17-18-15,-34 18-1,69 0 1,19 0 0,35-18-1,52 1 1,1-1-1,-53 0 1,-36 18 0,-17-17-1,-53 17-15,18 0 16,123 0 0,-18-18-1,71 0 1,53 18 15,0-17-15,-36 17-1,18-18 1,-35 18 0,-35 0-1,-36 0 1,-52 18-1,-71-1-15,35 1 16,18 0 0,-36-1-1,36 1 1,0 0 0,-18-1-1,0 1 1,18 0 15,-17-18-15,34 0-1,-88 0-15,18 0 16,0 0-16,0 0 16,106 0-1,-18 0 1,-53 0-1,0 0 1,18 0 0,-35 0-1,-18 0 1,-1-18 0,1 18-1,-17 0 1,34 0 15,-34 0-31,-1-18 16,106 18-1,-53-17 1,0 17 0,-35-18-1,-18 18 1,-17 0 46,17 0 16,18 18-62,-35-18 0,17 0-1,-35-18 110,0-70-93,-35-18-1,17 18 0,18 70-15,-17 0-1,17 1 17</inkml:trace>
+</inkml:ink>
+</file>
+
+<file path=ppt/ink/ink15.xml><?xml version="1.0" encoding="utf-8"?>
+<inkml:ink xmlns:inkml="http://www.w3.org/2003/InkML">
+  <inkml:definitions>
+    <inkml:context xml:id="ctx0">
+      <inkml:inkSource xml:id="inkSrc0">
+        <inkml:traceFormat>
+          <inkml:channel name="X" type="integer" min="-749" max="3091" units="cm"/>
+          <inkml:channel name="Y" type="integer" min="-1085" max="1664" units="cm"/>
+          <inkml:channel name="T" type="integer" max="2.14748E9" units="dev"/>
+        </inkml:traceFormat>
+        <inkml:channelProperties>
+          <inkml:channelProperty channel="X" name="resolution" value="121.13564" units="1/cm"/>
+          <inkml:channelProperty channel="Y" name="resolution" value="130.28436" units="1/cm"/>
+          <inkml:channelProperty channel="T" name="resolution" value="1" units="1/dev"/>
+        </inkml:channelProperties>
+      </inkml:inkSource>
+      <inkml:timestamp xml:id="ts0" timeString="2025-11-12T13:41:33.444"/>
+    </inkml:context>
+    <inkml:brush xml:id="br0">
+      <inkml:brushProperty name="width" value="0.05292" units="cm"/>
+      <inkml:brushProperty name="height" value="0.05292" units="cm"/>
+      <inkml:brushProperty name="color" value="#FF0000"/>
+    </inkml:brush>
+  </inkml:definitions>
+  <inkml:trace contextRef="#ctx0" brushRef="#br0">7602 6703 0,'18'0'313,"123"0"-297,88 17-1,195-17 1,-1 18-1,-70-18 1,-194 18 0,-142-18-1,19 0 345,16 0-345,19 0 1,-18-18 0,-35 18-1,-1 0 1,-17-18-1,18 18 204,-1 0-188,36 0 1,-35 0-1,17 0 125,-35-35-140,18-18-1,0 36 1,-18-1 0,0 0 46,0 1-15,0-1 16,17 18 62,-17 35-32,18-17-77,-18 0 15,0 17-15,0-17-1,0-1 1,0 18 15,-35-35 376,-54 18-361,-16-18-30,69 0 15,19 0 1,-1 0-1,0 0-16,-17 0 1,-18 0 0,-17 0-1,17 0 1,0 0 0,0 0-1,0 0 1,18 0-1,-18 0 1,35 0 0,0 0-16,1 0 15,-89 0 1,71 0 0,-1 0-1,19 0 1,-18 0 15,17 0-15,-17 0-1,-18 0 1,17 0 0,19 0-1,-36 0 1,18 0-16,-1 0 15,19 0-15,-54 0 16,36 0 0,17 0-1,-17 0 1,17 0 0,-35 0-1,18 0 16,-35-18-15,-1 18 0,-17 0-1,0-17 1,52 17 0,1 0-16,17 0 15,1 0 1,-1 0-1,0 0 79,1 0-78,-18 0 15,17 0-15,0 0-1,-17 0 63,17 0-62,1 0 0,-1 0-1,0 0 1,1 0 0,-1 0-16,-17 0 46,17 0-30,1 0 47,-1 0-48,0 0 1,18-18-1,0 1 157,0-1-156,0-17 0,0 17-1,0 0-15,0 1 16,0-1 203,0 0-188,0 1-16,0-1 17,18 18-17</inkml:trace>
+  <inkml:trace contextRef="#ctx0" brushRef="#br0" timeOffset="6935.72">16140 6050 0,'17'0'47,"-17"35"47,18 36-78,-18-36-16,0 18 15,0 0 1,17-18-1,-17 18 1,0 0 0,0-35-1,0 17 1,0-17 0,0-36 93,0-52-78,0 52-15,0-53-1,0 1 1,0 17 0,18 0-1,-18 18 1,18 35 0,-18-18-16,17 18 93,1 0-77,35 0 15,-18 18-15,-17-1-1,-18 1 17,0 0-17,0-1-15,0 36 16,-35-18 0,17 1-1,18-19 16,-18-17-15,18 18 0,-17-18 31,17 18 46,17 17-77,19 18 0,-1-36 15,-17 19-16,-1-36 1,1 17 31</inkml:trace>
+  <inkml:trace contextRef="#ctx0" brushRef="#br0" timeOffset="7962.75">16528 6456 0,'17'0'109,"36"-18"-93,53-35-1,53 18 1,-53 0-16,-36-1 16,36-16-1,-71-19 1,-35 53 0,-17 18-1,-19-17 32,-34 17-31,35 0-1,-36 0 1,36 0 0,17 0-1,0 0-15,18 17 16,-17 1-1,-1 17 1,1 1 0,-1-1-1,0 0 1,18 0 0,0-17-1,0 17 16,0 1-15,18-19 0,0 1-1,-1 17 1,1-17-16,-1-1 16,-17 1-16,18 0 15,0-18 1,-1 0-1,1 0 17,17 0-17,18-53 1,-53 17 0</inkml:trace>
+  <inkml:trace contextRef="#ctx0" brushRef="#br0" timeOffset="8761.98">17498 6121 0,'0'0'0,"-18"0"15,-35 0 1,18 0-1,0 17-15,35 1 16,-36-18-16,36 18 16,-17-1-1,17 1-15,0 17 16,17 18 0,19 0-1,17 0 16,-36 17-15,1-52 0,-18 17-1,17-17 1,-52-18 62,0 0-62,-53 0-1,70 0 1,0 0 46</inkml:trace>
+  <inkml:trace contextRef="#ctx0" brushRef="#br0" timeOffset="9711.93">17604 6579 0,'0'-17'15,"0"-19"1,0 1 0,0-18-1,0-17 1,17 34 0,1 19-16,-18-1 15,18-17 16,17 0-15,-18 17 15,1 18-15,0 0 15,17 35-15,-35-17-1,18 17 1,-1-17-16,-17 17 31,18 18-15,-18-35 0,0-1-1,0 1 16,-35-1-15,17-17 0,-35 18-1,35-18 1,1 0 0,17 18-1,-18-18 1,1 0-1,-19 0 1,1-36 0,0 1-1,17 18 1</inkml:trace>
+  <inkml:trace contextRef="#ctx0" brushRef="#br0" timeOffset="26517.02">11307 7796 0,'17'0'141,"18"-17"-110,36-1-15,-36 0-16,18 1 15,53-36 1,-18 35 0,-35 1-1,35-1 1,-35 0 0,-35 18-1,0 0 16,-1 0 1,1 0-17,-18-17-15,17 17 32,-17-18-17,-17 18 188,-18 18-187,-18-18 0,0 17-1,35 1 1,-17-18-1,17 18 1,1-18 47,-19 17-32,19-17 0,17 18 0,-36-18-15,36 18 0,-17-18-1,-1 17 32,0-17-16,1 0 16,-1 18-31,0-18 31,1 0 15,17 17-15,-18-17 16,-17 18-32,17-18-31,-17 18 31,17-18 453,18 17-437,-17-17-15,-1 0-1,0 0-16,1 18 1,-1 0 0,18-36 171,0 0-171,18-17-1,17-18 1,0 18 0,-35 0-1,18 17 1,0 0 15,-18 89 141,0-36-156,0 18-1,-18-35 1,0 35 0,1-36-1,17 1 1,0 0-16,-18-18 31,18 17-15,18-17 171,52 0-156,-17 18-15,0-18 0,-35 0-1,-18 18 1,17-18 62</inkml:trace>
+  <inkml:trace contextRef="#ctx0" brushRef="#br0" timeOffset="30232.06">20214 7867 0,'0'-18'125,"18"1"-109,70-36-1,-35 17 1,17 19 0,-52-1-1,17-17 1,-17 35 0,17-18-1,-17 18-15,53-35 31,17-18-15,-35 18 0,17 17-1,-35-17 1,-17 35 0,-18-18-1,-70 36 173,34 0-173,-52 17 1,35-18 0,36 1-16,-19-18 15,19 0 1,17 18-1,-18-18-15,0 17 16,1 1 0,-19 0-1,19-1 1,-1-17 0,-17 18-1,35 0 1,-18-1 15,1-17-15,-1 18-1,18-1 1,-35 1 0,35 0-16,-18-18 15,-17 17 1,17 19-1,0-36 1,1 0 250,17-53-63,0 0-156,0 0-32,0 35 17,0-17-17,0 17 32,17 18 78,-17 36-78,0-19-31,0 36-1,-17-18 1,17-17 15,0 0-15,0-1-1,0 1 1,17-18 93,1 18-93,17-18 0,36 0-1,17 0 16,-35 0-15,-35 0-16</inkml:trace>
+  <inkml:trace contextRef="#ctx0" brushRef="#br0" timeOffset="33212.86">9243 8520 0,'17'0'109,"19"-18"-93,17 18-16,-18 0 15,35 0 1,-34 0-16,17 0 16,70-18-1,-88 18 1,1 0-1,-19 0 1,19 0 0,-19 0 15,1 0 0,-1 0 47,-34 0 32,-107 0-79,19 0-15</inkml:trace>
+  <inkml:trace contextRef="#ctx0" brushRef="#br0" timeOffset="35728.98">19597 8572 0,'35'-35'141,"141"-35"-110,-140 70-15,34-18-1,-52 0 1,0 18 31,-1 0-32,1-17 1,17 17 0,0 0-16,1-18 15,34 0 1,-17 1 0,-35 17-1,-18-18 48,-53 36 77,-141 17-108,123-17-32,-35-1 31,36 1 0,52-18 0,1 18-15,-1-18 0,0 0-1,-17 0-15,35 17 16,-18-17-1,18 18-15,-17-18 16,-1 0 0,1 0-1,-1 18 1,0-18 0</inkml:trace>
+  <inkml:trace contextRef="#ctx0" brushRef="#br0" timeOffset="37629.98">19509 8520 0,'0'-36'109,"17"19"-93,-17-1 0,18 0-1,-18 1-15,18 17 16,-1-18-1,-17 0 1,0 1 0,18-1-1,-1 1 1,-17-1 0,18 0 15,-18 1 0,0 34 78,0 36-93,0-35 0,0 17-1,0-17 1,0 17 0,-18-17-1,18-1 1,0 1 15,0 17-15,-17-17-1,17-1 1,0 1 0,0 0-1,17-18 235,-17 17-234,18-17-1,17 0 1,18 0 0,-17 0-1,-19 0 1</inkml:trace>
+  <inkml:trace contextRef="#ctx0" brushRef="#br0" timeOffset="42764.83">7743 9648 0,'18'0'78,"35"0"-62,71 0 0,-1 0-1,0 0 1,-34 0 0,-72 0-1</inkml:trace>
+  <inkml:trace contextRef="#ctx0" brushRef="#br0" timeOffset="44920.37">16457 9684 0,'18'0'62,"-1"0"-46,1 0 0,17 0-1,-17 0 1,17 0-1,-17 0-15,17 0 16,0 0 0,54 0-1,-36 0 1,17 0 0,36 17-1,-18 1 1,0-18 15,-35 0-15,-18 0-1,-17 0-15</inkml:trace>
+  <inkml:trace contextRef="#ctx0" brushRef="#br0" timeOffset="53471.65">7602 11024 0,'0'53'62,"0"18"-46,0-36 0,0-17 15,0-1 31,89-17 220,87 0-267,89 0 1,34 0 0,-34 0-1,-53 0 1,-107-17-1,-16 17 1,-19 0 0,-52 0-1,0-18 1,17 18 0,-18 0-1,36 0 16,-17 0-15,52-18 0,-35 18-1,17 0 1,18 0 0,-17 0-1,0 0 1,17-17-1,-53 17-15,18 0 16,18 0 0,-54 0-16,18 0 15,71 0 1,-18 0 0,18 0-1,-35 0 1,-1 0 15,-34 0-15,34 0-1,-17 0 1,35 0 0,-52 0-16,17 0 15,-1 0-15,-16 0 16,17 0-16,-18 0 15,0 0-15,53 0 16,18 0 0,0 0-1,70 0 1,-17 0 0,35 0-1,0 17 16,-70-17-15,-36 0 0,-18 0-1,-52 0-15,0 0 16,70 0 0,-53 0-16,53 0 15,18 0 1,0 0-1,18 18 1,17-18 0,-18 0-1,-35 0 1,-35 0 0,-17 0 15,-1 0-31,0 0 15,-17 0 1,17 0-16,-17 0 16,70 0-1,-53 0 1,18 0 0,0 0-1,0 0 1,0 0-1,-36 0 1,36 0 0,18 0-1,-36 0-15,18 0 16,0 0-16,0 0 16,35 0-1,-35 0 1,-35 0-16,-1 18 31,36-18 16,-35 0-31,35 0-1,-18 0 1,-17 0 15,-18-18 266,-18 0-281,18 1-16,0-1 15,0 0 1,0 1 15,0-1-15,0 1-1,-18-1 79,18 0-47,-17 18 281,17-17-250,0-1-15,0 0-16,0 36 656,0 0-672,0 17-15,0-17-16,17-1 31</inkml:trace>
+  <inkml:trace contextRef="#ctx0" brushRef="#br0" timeOffset="59228.81">16616 11307 0,'17'0'125,"19"-18"-109,17 18-16,17-18 15,212 1 1,-52 17 0,-124-18-1,-71 18 1,0 0 0,-17 0-1,17 0 1,18 0 15,35 0-15,-35 0-1,-18 0 1,-17 18 0,0-18-16,17 0 15,18 0 1,-18 0-1,-17 0 1,17 0 0,-17 0-1,35 0 1,52 17 0,-16-17-1,-1 0 16,-53 0-31,-17 0 16,-1 18 0,19-18-1,52 0 1,-18 0 0,-17 0-1,0 0 1,0 0-1,0 0 1,0 0 0,0 0-1,-18 0 1,-17 0 0,-1 0-16,36 0 31,36 0 0,-1 0-15,0 0-1,-17 0 1,-19 0 0,-16 0-1,17 0 1,35 0-1,-53 0 1,0 0 0,18 0-1,-35 0-15,17 0 16,124-18 0,-36 18-1,-34 0 16,16 0-15,-16 0 0,34 0-1,36 0 1,-36 0 0,-17 0-1,-18 0 1,-35 0-16,-17 0 15,-1 0-15,35 0 16,-17 0 0,18 0-1,-18 0 1,17 0 0,19 0-1,-1 0 1,18-17 15,-1 17-15,1-18-1,-53 18-15,18 0 16,70 0 0,-88 0-16,88-18 15,-18 18 1,1 0-1,17 0 1,0-17 0,-18 17-1,-17 0 1,0-18 0,-18 18-1,-35 0 1,-17 0-1,-19 0 1,36-18-16,-18 18 16,89-17-1,-54 17 1,36 0 0,-18 0-1,-35 0 1,0-18-1,-17 18 1,-19 0 0,18 0-1</inkml:trace>
+  <inkml:trace contextRef="#ctx0" brushRef="#br0" timeOffset="66855.92">9719 12541 0,'18'0'282,"-1"0"-251,1 0 0,0 0 0,-1 0 16,1 0-31,-1 0 0,1 0-1,0 0 1,35 0-1,-18 0-15,71 0 16,17 0 0,-17 0-1,-18 0 1,-52 0 0</inkml:trace>
+  <inkml:trace contextRef="#ctx0" brushRef="#br0" timeOffset="67527.89">14799 12700 0,'18'0'16</inkml:trace>
+  <inkml:trace contextRef="#ctx0" brushRef="#br0" timeOffset="68528.21">14041 12700 0,'17'0'109,"71"0"-93,89-18 0,17 1-1,0-1 1,-71 0 0,-87 18-1,-19 0 1</inkml:trace>
+  <inkml:trace contextRef="#ctx0" brushRef="#br0" timeOffset="73528.52">2734 12753 0,'18'0'109,"-1"0"-78,1-18 1,17 18-17,36 0 1,35-17 0,-1-1-1,-16 0 1,-54 18-1,0 0 1,-17 0 0,-1 0-1,1 0 1,-18-17 0,18 17-16,35-18 15,70 0 1,-17 1 15,35-1-15,-53 18-1,-52-17 1,-19 17 0,-17-18 343,-17 0-328,-1 18-15,0-17 15,1 17 0,17-18-15,-18 18-16,18-18 16,-35 18-1,17-17 1,0-1 15,1 18 0,-1 0-15,36 0 93,-1 0-77,1 0-17,-18 18 1,35-18-1,-35 17 1,18 1 0,35 0-1,0-1 1,-53 1-16,17-18 16,19 18-16,-36-1 15,35 1 1,-17 17 15,-18-17-15,0 17-1,0-17 1,-18-1 0,0 19-1,1-19 1,-1-17 15</inkml:trace>
+  <inkml:trace contextRef="#ctx0" brushRef="#br0" timeOffset="83111.89">9507 13917 0,'18'0'234,"105"0"-218,36 0-1,-35 0 1,-54 0 0,-34 0-1,-19 0 63,36 0-62,-18 0-16,54 0 16,-19-18-1,1 18 1,-54 0-1,36-17 1,-17 17 0,-1 0-1,-18 0 1</inkml:trace>
+  <inkml:trace contextRef="#ctx0" brushRef="#br0" timeOffset="83728.64">11624 14023 0,'18'0'31,"52"-18"-15,212 18 30,-52 0-30,-72 0 0,-52 0-1,-35-17 1</inkml:trace>
+  <inkml:trace contextRef="#ctx0" brushRef="#br0" timeOffset="84639.76">13882 14023 0,'17'0'47,"54"0"-16,-18 0-15,141 0 0,53 0-1,-35 0 1,-54 0 0,-70 0-16,-52 0 15,-1-18 1,-17 18 46,-1 0-46,36 0 0,0 0-1,-18 0 1,-17 0-1,17 0 1,-17 0 0,0 0 15</inkml:trace>
+  <inkml:trace contextRef="#ctx0" brushRef="#br0" timeOffset="88488.31">16281 14129 0,'17'0'94,"89"0"-78,35 0-1,53 0 1,-53 0-16,1 0 16,-19 0-16,106 0 15,-52 0 1,-54 0-1,-35 0 1,-35 0 0,18 0-1,-18 0 1,0 0 0,70 17-1,-17-17 16,-53 18-31,-35-18 16,-1 0-16,1 0 31</inkml:trace>
+</inkml:ink>
+</file>
+
+<file path=ppt/ink/ink16.xml><?xml version="1.0" encoding="utf-8"?>
+<inkml:ink xmlns:inkml="http://www.w3.org/2003/InkML">
+  <inkml:definitions>
+    <inkml:context xml:id="ctx0">
+      <inkml:inkSource xml:id="inkSrc0">
+        <inkml:traceFormat>
+          <inkml:channel name="X" type="integer" min="-749" max="3091" units="cm"/>
+          <inkml:channel name="Y" type="integer" min="-1085" max="1664" units="cm"/>
+          <inkml:channel name="T" type="integer" max="2.14748E9" units="dev"/>
+        </inkml:traceFormat>
+        <inkml:channelProperties>
+          <inkml:channelProperty channel="X" name="resolution" value="121.13564" units="1/cm"/>
+          <inkml:channelProperty channel="Y" name="resolution" value="130.28436" units="1/cm"/>
+          <inkml:channelProperty channel="T" name="resolution" value="1" units="1/dev"/>
+        </inkml:channelProperties>
+      </inkml:inkSource>
+      <inkml:timestamp xml:id="ts0" timeString="2025-11-12T13:43:24.852"/>
+    </inkml:context>
+    <inkml:brush xml:id="br0">
+      <inkml:brushProperty name="width" value="0.05292" units="cm"/>
+      <inkml:brushProperty name="height" value="0.05292" units="cm"/>
+      <inkml:brushProperty name="color" value="#FF0000"/>
+    </inkml:brush>
+  </inkml:definitions>
+  <inkml:trace contextRef="#ctx0" brushRef="#br0">20814 4533 0,'0'53'125,"-18"53"-94,18-71-15,0 18 0,-17-35-16,17 17 15,0-17 1,0-1 15,0 19-15,0-19-1,0 1 1,0 17 15,-18-17-15,18-1 15,71-17 282,52 0-298,-17 0 1,-18 0 0,-35 0-1,0 0 1,-18 0-1,-17 0 1,-1 0-16,1 0 16,35 0-1,-35 0-15,35 0 16,35 0 0,18 0-1,-1 0 1,1 0 15,-35 0-15,-36 0-1,18-17 1,0 17 0,17 0-1,1 0 1,0 0-1,-19 0-15,37 0 16,16 0 0,1 0-1,-17 17 1,-1-17 0,-18 0-1,-17 0 1,18 0 15,-18 0-15,-18 0-1,0 0-15,36 0 32,17 0-17,-35 0 1,-18 0-1,-17 0 1,52 0 0,1 0-1,35 18 1,0 17 0,-54-35-1,-34 0 1,-36-53 156,-17-123-141,0 88 0,17 53 0</inkml:trace>
+  <inkml:trace contextRef="#ctx0" brushRef="#br0" timeOffset="26481.31">26088 5821 0,'0'-18'78,"0"-17"-62,0 17-16,0-17 31,0 0-15,0-1-1,0 19-15,0-1 16,0-17-16,0-18 31,-18 0-15,18 18-1,0 0 1,0-1 0,0 1-1,0 0 1,-17-18 0,17 0-1,0-18 16,0 54-31,-18-1 16,18-35-16,0 35 16,0-52-1,0 35 1,0 17 0,0-17-1,0-1 1,0 1-1,0 17 1,0-52 0,0 35-1,0-1-15,0 19 32,0-19-17,-18 36 876,18 18-766,-17-18-94,-1 0 16,18 18-31,-18-18-1,18 17 48,-17 1 140,17 17-188,-18-17-15,1 17 16,-1-17 0,36-18 374,-1 0-343,-17-18-31,18 1-1,-18-1 1,17 0 0,-17 1-1,0-1 17,18 18-17,0-18 1,-18 1 31,17-1-32,1 18 110,0 0-93,17 18-1,18 35 0,-36-36-15,19 19-1,-19-19 1,1 1 15,0-18 47</inkml:trace>
+  <inkml:trace contextRef="#ctx0" brushRef="#br0" timeOffset="36512.48">31627 1782 0,'-36'0'110,"-34"35"-95,-19 0 1,19-17-1,35 17 1,-1-35 0,19 18-1,-1 17 1,-35-17 0,18 17-1,0-18 16,35 1-15,-18 0 15,18-1 1,-18 1-17,18 0 1,-17-18-1,-1 35 1,0-35 125,18 18-110,0-36 297,0-70-297,0 70-31,0-52 32,0-1-1,0 53-31,0-17 31,0 53 172,18 123-172,0-106-15,-18 36 0,17-54-16,-17 19 15,0-19 1,18-17 203,0 0-172,-1 0-1,1 0 1,0 0 16,-1 0-1,1 0-30,-1 0-17,1 0 16,0 0-15,-1 0 0,1 0-1,0 0 1,-1-17 0,1-1 15,0 18 31,-54 0 204,1 0-250,-18 0-1,18 0 1,0 0-1,17 0 1,0 0 0,1 0-1,-1 0 1,0 0 0,1 0-16,-1 0 93,18-18 235,0-35-312,0 18 0,-18 0-1,18 17 1,0 1 0,0-1-1,0 0 16,0 1 1,0-1-17,-17 18 1,17-35 0,0 17 15,0 0-16,0 1 17,17 17 249,1 0-219,-18 17-30,0 1-1,18-18-15,-18 35-1,17-17 1,1 17-1,-18 1 1,0-19-16,18-17 16,-18 35-1,0 1 1,0-19 0,0 1 15,17 0 31,-17-1-46,0 1 0,18-18 515,0 0-500,-1 0 47,1 0 0,-1 0-31,1 0-16,0 0 32,-1 0-1,1 0-15,0 0-15,-18 18 14,17-18-30,1 0 47,0 0 30</inkml:trace>
+  <inkml:trace contextRef="#ctx0" brushRef="#br0" timeOffset="46215.53">27887 3545 0,'18'0'47,"-1"0"-16,36 0 0,0 0 1,35 0 15,-17-17-16,52 17 0,-70-18-15,-17 0-1,-19 18 1,19 0 0,-19-17-1,1 17-15,-1-18 16,1 18-1,0-17 1,-1-1 0,1 18-1,0-18 1,-1 1 0,1 17-1,17-36 32,-17 36-31,-18-35-1,17 35 1,-17-18-16,18 18 16,0-52-1,-1 34 1,1 0-1,0 1 1,-1-1 0,-17 0-1,18 18 1,-18-17 0,0-1-1,18 0 1,-1 1 15,1-1-15,-18 1-16,17 17 15,-17-18 1,0 0 0,18 18-1,-18-17 1,18-1-1,-1 0 1,-17 1 0,18-1 15,-18 0 0,-18 18 188,-17 0-203,-71 0 15,89 0 0,-19 0-15,19 0-1,-1 0 1,-17 0 31,17 0-32,36 0 204,-18 18-203,17-18-1,1 0 1,0 0 0,-1 0-1,1 0 1,17 0 0,18 0-1,-18-18 1,1 18 15,-1-17-15,0 17-1,-17-18 1,0 18 0,-18-17 30,17 17-30,1 0 15,0 0 94,-18 17-109,0 1 0,0 35-1,0-18 1,0 0-1,0-17 1,0 0 0,0-1-16,0 1 15,0-1 1,0 1 46,0 0-30</inkml:trace>
+  <inkml:trace contextRef="#ctx0" brushRef="#br0" timeOffset="63112.28">30127 6403 0,'0'-18'78,"-17"-17"-63,17 17 1,-18-35 0,18-17-1,0 17 1,-18 0 0,18 18-1,0-18 1,0-18-1,0 54-15,0-36 16,0 0 0,0 18-1,0-1 1,0-17 0,18 0-1,-18-17 1,18 35 15,-18-36-15,17 18-1,-17-17 1,0 34 0,0 19-1,-17 52 235,-36 0-234,17 1-1,19-1 1,-1-18 0,18 1 77,0-36 32,53-17-109,-18 0 0,1 0-1,-19 17-15,1 18 16,-1-35 0,1 35 124,17 0-109,-17 17-15,-18 1 0,18 17-1,-1 1 1,1-1 0,0 18-1,-1-36 1,1 1 31,-18 0-32,-18-18 126,1 0-110,-1 0 0,0-18-15,-17 0 0,0 18-16,17-17 15,0 17 1,18-18 0,-17 18-1,-1 0 1,1 0-1,-1 0 1,0 0 0,1 0 93</inkml:trace>
+  <inkml:trace contextRef="#ctx0" brushRef="#br0" timeOffset="71887.67">15734 7250 0,'18'0'110,"70"0"-79,-35 0-31,141 0 31,-71-18-15,1 18 0,-71 0-1,-18 0 1,18 0-1,17 0 1,1 0 0,-1 0-1,1 0 1,-53 0-16,-1 0 16</inkml:trace>
+  <inkml:trace contextRef="#ctx0" brushRef="#br0" timeOffset="73302.61">9737 8449 0,'0'0'0,"88"-35"31,0 17-15,0 0 0,-17 1-1,-1 17 1,-34 0-1,-19 0 1</inkml:trace>
+  <inkml:trace contextRef="#ctx0" brushRef="#br0" timeOffset="74053.52">14041 8449 0,'35'-18'109,"18"1"-93,123 17-1,-70-18 1,-18-17 0,-17 35-1,-36 0 1,-35-18 15</inkml:trace>
+  <inkml:trace contextRef="#ctx0" brushRef="#br0" timeOffset="74815.69">18256 8378 0,'18'0'46,"35"-17"1,0-1-31,17 1 0,-17-1-1,0 18 1,-35 0-1,-18-18 1</inkml:trace>
+  <inkml:trace contextRef="#ctx0" brushRef="#br0" timeOffset="77886.56">16245 9172 0,'71'0'125,"211"0"-93,-17 0-1,-124 0 0,-53 0 0,-70 0 1</inkml:trace>
+  <inkml:trace contextRef="#ctx0" brushRef="#br0" timeOffset="79703.39">19597 8961 0,'17'0'62,"19"0"-46,87 0 0,36 17-1,-71-17-15,-17 0 16,17 18-16,-35-18 16,53 17-1,-18-17 1,-18 0-1,1 0 1,0 0 0,-19 0-1,1 0 1,-35 0 0,17 0-16,36 18 31,17-18-31,-35 0 31,-35 0-31,-1 0 16,18 18-1</inkml:trace>
+  <inkml:trace contextRef="#ctx0" brushRef="#br0" timeOffset="81308.96">7743 9984 0,'18'0'110,"70"0"-95,53 0 1,53 17 0,18 1-1,-88 0 1,-89-18-16</inkml:trace>
+  <inkml:trace contextRef="#ctx0" brushRef="#br0" timeOffset="82431.78">10425 10019 0,'88'0'94,"265"0"-63,352 0 0,-423 0-15,-35 0 0,-35 0-1,-18 0 1,0 18 0,0-18-1,35 17 1,1 1-1,-89-18 1,-88 0-16,-18 0 16,0 0-16,18 0 15,88 0 1,-53 0 0,18 0-1,53 0 32,-71 0-31,0-18-1,18 1 1,-35 17 0,-18 0-1,-18 0-15,0 0 16,-17 0-1,17 0-15</inkml:trace>
+  <inkml:trace contextRef="#ctx0" brushRef="#br0" timeOffset="84520.63">8026 10848 0,'17'0'328,"1"0"-313,70 0 1,-17-18 0,-36 18-16,18 0 15</inkml:trace>
+  <inkml:trace contextRef="#ctx0" brushRef="#br0" timeOffset="86302.84">10160 10848 0,'18'0'78,"17"0"-62,124-18 0,70 1-1,-141-1-15,36 18 16,70-18-1,-124 1-15,1 17 16</inkml:trace>
+  <inkml:trace contextRef="#ctx0" brushRef="#br0" timeOffset="87528.53">16616 10760 0,'35'0'125,"71"0"-109,35 0-1,53 0 1,0 0 0,-18 17-1,19-17 1,-37 0 15,-52 18-15,-35-18-1,-54 0-15,1 0 16</inkml:trace>
+</inkml:ink>
+</file>
+
+<file path=ppt/ink/ink17.xml><?xml version="1.0" encoding="utf-8"?>
+<inkml:ink xmlns:inkml="http://www.w3.org/2003/InkML">
+  <inkml:definitions>
+    <inkml:context xml:id="ctx0">
+      <inkml:inkSource xml:id="inkSrc0">
+        <inkml:traceFormat>
           <inkml:channel name="X" type="integer" min="-2.14748E9" max="2.14748E9" units="cm"/>
           <inkml:channel name="Y" type="integer" min="-2.14748E9" max="2.14748E9" units="cm"/>
           <inkml:channel name="F" type="integer" max="32767" units="dev"/>
@@ -166,7 +549,7 @@
 </inkml:ink>
 </file>
 
-<file path=ppt/ink/ink2.xml><?xml version="1.0" encoding="utf-8"?>
+<file path=ppt/ink/ink18.xml><?xml version="1.0" encoding="utf-8"?>
 <inkml:ink xmlns:inkml="http://www.w3.org/2003/InkML">
   <inkml:definitions>
     <inkml:context xml:id="ctx0">
@@ -197,7 +580,7 @@
 </inkml:ink>
 </file>
 
-<file path=ppt/ink/ink3.xml><?xml version="1.0" encoding="utf-8"?>
+<file path=ppt/ink/ink19.xml><?xml version="1.0" encoding="utf-8"?>
 <inkml:ink xmlns:inkml="http://www.w3.org/2003/InkML">
   <inkml:definitions>
     <inkml:context xml:id="ctx0">
@@ -228,7 +611,58 @@
 </inkml:ink>
 </file>
 
-<file path=ppt/ink/ink4.xml><?xml version="1.0" encoding="utf-8"?>
+<file path=ppt/ink/ink2.xml><?xml version="1.0" encoding="utf-8"?>
+<inkml:ink xmlns:inkml="http://www.w3.org/2003/InkML">
+  <inkml:definitions>
+    <inkml:context xml:id="ctx0">
+      <inkml:inkSource xml:id="inkSrc0">
+        <inkml:traceFormat>
+          <inkml:channel name="X" type="integer" min="-749" max="3091" units="cm"/>
+          <inkml:channel name="Y" type="integer" min="-1085" max="1664" units="cm"/>
+          <inkml:channel name="T" type="integer" max="2.14748E9" units="dev"/>
+        </inkml:traceFormat>
+        <inkml:channelProperties>
+          <inkml:channelProperty channel="X" name="resolution" value="121.13564" units="1/cm"/>
+          <inkml:channelProperty channel="Y" name="resolution" value="130.28436" units="1/cm"/>
+          <inkml:channelProperty channel="T" name="resolution" value="1" units="1/dev"/>
+        </inkml:channelProperties>
+      </inkml:inkSource>
+      <inkml:timestamp xml:id="ts0" timeString="2025-11-12T13:08:37.663"/>
+    </inkml:context>
+    <inkml:brush xml:id="br0">
+      <inkml:brushProperty name="width" value="0.05292" units="cm"/>
+      <inkml:brushProperty name="height" value="0.05292" units="cm"/>
+      <inkml:brushProperty name="color" value="#FF0000"/>
+    </inkml:brush>
+  </inkml:definitions>
+  <inkml:trace contextRef="#ctx0" brushRef="#br0">21943 5115 0,'0'18'78,"0"194"-62,0-177-1,0 0-15,0 18 16,0-18-16,0 18 16,0 18-1,0-36-15,0 71 16,0 0 0,0 105 30,0-105-30,0 0 0,0 0-1,0 0 1,0-18 0,0 0-1,0-35 1,0-18-16,0-17 15,0 88 1,0-36 0,0 1-1,0-18 1,0 0 0,0 0-1,-18 17 16,18-17-15,0-35 0,0-1-16,-53-140 250,36 88-235,-36-36 1,0-17 0,17 0-1,1 17 1,18 18-1,-19 0 1,19 0 0,-1 36-1,18-18 1,-18 35 0,18 17 124,36 18-124,-1 36-1,0 0 1,-17-36 0,17 53-1,-17-70-15,17 35 16,-35-1 0,18-34-1,-18 17 16,17 1-15,1-1 0,0 0-1,-1 0 1,1-35 0,-18 18-1,18-18 95,-1 0 30,54-70-124,52-36-1,36 18 1,-53-1 0,-36 36-1,-17 18 1,-35 0 0,17 0-1,0-18 16,1 35-15,-19 0 0</inkml:trace>
+  <inkml:trace contextRef="#ctx0" brushRef="#br0" timeOffset="3498.21">21872 7267 0,'18'0'125,"35"-17"-110,17-1 1,1-17 0,35 17-1,-53-17 1,17-1-1,-17 1 1,-35 18 0,17-1-1,0 18-15,-17-18 16,17-17 0,18 17-1,-18-17 16,1 17-15,17-17 0,0 0-1,-18 0 1,-18-1 0,1 19-1,-18-1-15,0 0 16,0 1-1,-18-1 64,-17 18-48,18 0-16,-19 0 1,19 35 0,-36-17-1,35 0-15,-17-1 32,-1 19-17,1-19 1,18 19-1,-36-1 1,17 0 0,19-17-1,-19 17 1,1-17 0,18-1 15,-1-17-16,-17 18 1,17 0-16,0-18 16,-52 35-1,35-18 1,17-17 0,18 18-1,-18-18 1,1 0-1,-1 18 1,18-1 0,-18-17-1,18 18 1,-17 0 31,-1-18-32,18 17 95,-18-17-95,1 0 1,-54-35 0,54 17-16,-1 1 15,-35-36 1,35 18 0,-70-54 30,71 54-30,-1 17 0,18 1-1,0-1 17,-18 18-17,1-35-15,-1 0 31,-17-18-15,35 17 0,-18 19-1,18-1 1,-18 1 0,18-1-1,0 0 16,-17 18-15,-1-17 0,18-1 15,0 36 94,88 105-94,-70-70-15,17 0-1,-17-35-15,-18 17 16,35-35-16,-35 35 16,35 0-1,-35-17 1,18 17 0,0 1-1,17-1 1,0 0-1,-17 0 1,0 1 0,-1-36 15,-17 17 47,18-34 47,211-124-94,36-1-15,-107 90 15,-87 16 0,-53 19-15,35-1 0,-18-17-1,-17 35-15,-1 0 32</inkml:trace>
+  <inkml:trace contextRef="#ctx0" brushRef="#br0" timeOffset="15669.79">9313 7638 0,'18'0'63,"17"0"-48,18-18 1,-18 18 0,1 0-1,-19-18 16,1 18-15,0 0 0,-1 0 15,1 0-15</inkml:trace>
+  <inkml:trace contextRef="#ctx0" brushRef="#br0" timeOffset="17047.08">6862 8326 0,'35'0'63,"18"0"-48,70 0 1,36 0 0,0 0-1,-89 0 16,-52 0-15,0 0 0,-1 0 140</inkml:trace>
+  <inkml:trace contextRef="#ctx0" brushRef="#br0" timeOffset="17967.4">4798 9243 0,'17'0'110,"1"0"-95,17 0 1,36 0 0,17 0-1,-70 0 1</inkml:trace>
+  <inkml:trace contextRef="#ctx0" brushRef="#br0" timeOffset="19686.75">7726 9225 0,'17'0'141,"1"0"-95,0 0-30,-1-17 0,19 17-1,-1 0 1,0 0 0,71-18-1,-35 18 16,-36 0-31,0-18 16,0 18-16,1 0 16,17 0-1,-18-17 1,0 17 0,-17 0-1,-1 0 32</inkml:trace>
+  <inkml:trace contextRef="#ctx0" brushRef="#br0" timeOffset="20670.3">4551 9790 0,'0'17'109,"17"-17"-77,36 0-1,-35 0-16</inkml:trace>
+  <inkml:trace contextRef="#ctx0" brushRef="#br0" timeOffset="22195.05">8572 9807 0,'18'0'156,"0"0"-140,35 0-1,-36 0 1,19 0 0,17 0-1,-1 0 1,19 0 0,-18 0-1,-18-17-15,36 17 31,-54 0-31,19 0 16,34 0 0,-52-18-16,88 18 15,17-18 1,-35 18 0,-52 0-1,-19 0 1,36 0-1,35 0 1,1 0 0,16 0-1,-34 0 1,17 0 0,36 0 15,-71 0-31,70 0 15,-35 0 1,-52 0 0,-19 0-1</inkml:trace>
+  <inkml:trace contextRef="#ctx0" brushRef="#br0" timeOffset="27294.49">4145 10883 0,'18'0'141,"35"0"-126,17 0-15,54-17 16,-36 17 0,-53-18-1</inkml:trace>
+  <inkml:trace contextRef="#ctx0" brushRef="#br0" timeOffset="27686.1">5627 10848 0</inkml:trace>
+  <inkml:trace contextRef="#ctx0" brushRef="#br0" timeOffset="29821.95">8643 10777 0,'0'18'93,"18"-18"-77,-1 0 31,1 0 15,0 18 173,-1-18-220,1 0 32,0 0 0,-18 17-31,17-17 249,1 0-218,-18 18-15</inkml:trace>
+  <inkml:trace contextRef="#ctx0" brushRef="#br0" timeOffset="31615.22">4004 11553 0,'18'0'31,"-1"-17"-15,19 17-1,17 0 1,-18 0 0,0-18 15,-17 18-16,-1 0 1,1 0 0</inkml:trace>
+  <inkml:trace contextRef="#ctx0" brushRef="#br0" timeOffset="32252.98">7056 11571 0</inkml:trace>
+  <inkml:trace contextRef="#ctx0" brushRef="#br0" timeOffset="34246.44">8855 11642 0,'17'0'188,"72"0"-173,-19 0 16,-17 0-15,-18 0 0,1 0-1,-19 0 235,1 0-234,0 0 15,-1 0-15,18 0-1,1 0 1,-1 0 0,-17 0-1,-1 0 1,1 0 0,0 0 15,-1 0-16,1 0 1</inkml:trace>
+  <inkml:trace contextRef="#ctx0" brushRef="#br0" timeOffset="35077.68">3775 12365 0,'17'0'125,"142"0"-93,-35 0-1,-54 0-16,-35 0 1,1 0 0</inkml:trace>
+  <inkml:trace contextRef="#ctx0" brushRef="#br0" timeOffset="40221.23">14005 16069 0,'-17'0'47,"17"-18"-16,0-35-15,0 36-1,0-36 1,0-35 0,0 0-1,17-1 1,-17 1 0,18-18-1,-18-52 1,18 34-1,-1 18 1,-17 18 0,0 53-16,18-1 15,-18-87 1,17 35 0,1 17 15,0-17-16,-18 18 1,35-1 0,-17 0-1,-1-17 1,1 18 0,-18-1-1,18 53-15,-18-17 16,0-18-1,0 18-15,17-36 16,1 19 0,-18-19-1,0 36 1,18-18 0,-18 17-1,17 1 16,-17 0-15,0 17 0,0 1-1,0-19 1,18 36 0,-18-17-16,0 87 406,0-34-391,-35 16 1,17 1 0,0-35-1,18 0 63,-17-1-62,17 1-16,0 0 31,-18-1-15,0-17 0,18 18 155,-17 17-155,-1-35 0,18 18-1,-18-1 1,18 1 0,0-36 155,0-52-155,18 35 0,-18-1-1,18 1 1,-1 0 0,1-1-1,0 19 16,-18-1-15,0 1 0,17 17-1,-17-18 1,18 18 62,0 0-62,-1 18-1,1 34 1,17 1 0,-17 0 15,-1-35-31,1 17 15,0 1 1,-1-19 0,-17 1-1,18-18 1</inkml:trace>
+  <inkml:trace contextRef="#ctx0" brushRef="#br0" timeOffset="42702.23">17163 9596 0,'17'0'156,"1"0"-109,35 0-16,-18 0 0,-17 0-15,-1 0 0,1 0-1,0 0 1,-1 0 0,1 0-1,0 0 1,-1 0-1,1 0 1,-1 0 0,1 0-1,17 0 1,1 0 0,-1 0-1,0 0 16,-17 0 16</inkml:trace>
+  <inkml:trace contextRef="#ctx0" brushRef="#br0" timeOffset="43828.08">21678 12224 0,'18'0'93,"35"0"-77,17-18 0,1 18-1,-18 0-15,17 0 16,19-18 0,-54 18-16,0 0 15,-35-17 1,18 17-1,-1 0 17,1 0-17</inkml:trace>
+  <inkml:trace contextRef="#ctx0" brushRef="#br0" timeOffset="71936.32">28857 17216 0,'35'0'172,"18"0"-157,36-18 1,16 0-1,19 18 1,-36 0 0,-53 0-1,-17 0 63,0 0-46,-18-17 171</inkml:trace>
+  <inkml:trace contextRef="#ctx0" brushRef="#br0" timeOffset="74030.66">28751 7743 0,'18'0'250,"0"18"-203,-1-18-16,1 0 485,105 0-485,124 18-15,36-1-1,-19 1 1,-70-18 0,-123 0-1,-36 0 1,-17 0 0,-1 0 15,1 0-16,17-18-15,0 18 16,1 0 0,-19 0 15</inkml:trace>
+  <inkml:trace contextRef="#ctx0" brushRef="#br0" timeOffset="100787.76">28346 7796 0,'17'0'94,"19"0"-78,122 0-1,54 0 1,123 36 0,-88-19 15,-123-17-16,-89 0 1</inkml:trace>
+  <inkml:trace contextRef="#ctx0" brushRef="#br0" timeOffset="115830.62">28857 7726 0,'35'0'141,"1"0"-126,34 0 1,19 0-1,34 0 1,-17 0 0,-53 0-1</inkml:trace>
+  <inkml:trace contextRef="#ctx0" brushRef="#br0" timeOffset="120454.42">11165 2222 0,'36'0'109,"299"-17"-77,-212 17-17,36 0 1,-71 0 0,-70 0-16,-18 88 156,-18 0-141,-35 124 1,36-89 0,-19 54-1,19-54-15,-1 89 16,18-36 0,0 18-1,0 36 1,0 17-1,0-36 1,18-70 0,-1-35-1,-17 0 1,18-18 0,-18-17-1,18-18-15,-1 70 31,-17-52-15,0-36 0,0 18-1,0-18 1,0-17 0,0-1-1,18 1 1,-89 17 93,-458 18-78,247-35-15,106 17 0,123-17-1</inkml:trace>
+  <inkml:trace contextRef="#ctx0" brushRef="#br0" timeOffset="146686.23">3246 7567 0,'17'0'109,"-17"18"-93,0-1-16,18-17 16,-1 0 15,1 0 16,0 0-32,-1 0 17,1 18-17,0-18 17,-1 0-17,1 0 1,0 0-1,-1 0 17,1 0-17,-1 0 17,1 0 30</inkml:trace>
+</inkml:ink>
+</file>
+
+<file path=ppt/ink/ink20.xml><?xml version="1.0" encoding="utf-8"?>
 <inkml:ink xmlns:inkml="http://www.w3.org/2003/InkML">
   <inkml:definitions>
     <inkml:context xml:id="ctx0">
@@ -259,7 +693,7 @@
 </inkml:ink>
 </file>
 
-<file path=ppt/ink/ink5.xml><?xml version="1.0" encoding="utf-8"?>
+<file path=ppt/ink/ink21.xml><?xml version="1.0" encoding="utf-8"?>
 <inkml:ink xmlns:inkml="http://www.w3.org/2003/InkML">
   <inkml:definitions>
     <inkml:context xml:id="ctx0">
@@ -287,6 +721,303 @@
     </inkml:brush>
   </inkml:definitions>
   <inkml:trace contextRef="#ctx0" brushRef="#br0">22 6 2304 0 0,'0'0'224'0'0,"-13"0"-224"0"0,5-5 0 0 0</inkml:trace>
+</inkml:ink>
+</file>
+
+<file path=ppt/ink/ink3.xml><?xml version="1.0" encoding="utf-8"?>
+<inkml:ink xmlns:inkml="http://www.w3.org/2003/InkML">
+  <inkml:definitions>
+    <inkml:context xml:id="ctx0">
+      <inkml:inkSource xml:id="inkSrc0">
+        <inkml:traceFormat>
+          <inkml:channel name="X" type="integer" min="-749" max="3091" units="cm"/>
+          <inkml:channel name="Y" type="integer" min="-1085" max="1664" units="cm"/>
+          <inkml:channel name="T" type="integer" max="2.14748E9" units="dev"/>
+        </inkml:traceFormat>
+        <inkml:channelProperties>
+          <inkml:channelProperty channel="X" name="resolution" value="121.13564" units="1/cm"/>
+          <inkml:channelProperty channel="Y" name="resolution" value="130.28436" units="1/cm"/>
+          <inkml:channelProperty channel="T" name="resolution" value="1" units="1/dev"/>
+        </inkml:channelProperties>
+      </inkml:inkSource>
+      <inkml:timestamp xml:id="ts0" timeString="2025-11-12T13:11:15.157"/>
+    </inkml:context>
+    <inkml:brush xml:id="br0">
+      <inkml:brushProperty name="width" value="0.05292" units="cm"/>
+      <inkml:brushProperty name="height" value="0.05292" units="cm"/>
+      <inkml:brushProperty name="color" value="#FF0000"/>
+    </inkml:brush>
+  </inkml:definitions>
+  <inkml:trace contextRef="#ctx0" brushRef="#br0">6350 8220 0,'88'0'203,"18"0"-187,18 0-1,-54 0 1,-35 0 0,1 0-1,-1 0 1,18 0 0,-18 0-1,0 0-15,124-18 31,-53 18-15,-18-18 0,-17 18-1,-54 0 1,1 0 0,0 0-1,52 0 1,36-17-1,0 17 1,-18 0 0,-70 0-16,-1 0 15,1 0 1,53 0 0,34 0-1,1 0 16,-35 0-15,-18 0 0,-36 0-1,1 0 110</inkml:trace>
+  <inkml:trace contextRef="#ctx0" brushRef="#br0" timeOffset="2466.54">7743 9190 0,'18'0'78,"0"0"-47,-1 0 0,19 0-15,-19 0 0,107 0-1,-1 0 1,18-18 0,-35 18-1,-53-17 1,-35 17-1,-1 0 17</inkml:trace>
+  <inkml:trace contextRef="#ctx0" brushRef="#br0" timeOffset="4383.18">16316 10283 0,'18'0'172,"-1"0"-156,89 0-1,35 0 1,71 0 0,17 0-1,18-17 1,-141 17 0,-71 0 15,-17 0 0</inkml:trace>
+  <inkml:trace contextRef="#ctx0" brushRef="#br0" timeOffset="5174.55">18644 10213 0,'18'0'47,"17"0"-31,36 0-1,-18-18 1,-18 1 0,-17 17-1,-1 0-15,1 0 63</inkml:trace>
+  <inkml:trace contextRef="#ctx0" brushRef="#br0" timeOffset="7742.47">7885 11377 0,'17'0'47,"107"0"-16,-54 0-15,142 0-1,17 0 1,53-18 0,36 18-1,-177 0-15,-35 0 16,123 0 0,-158 0-1,17 0-15,141 0 31,-105 0-15,-1 18 0,18-18-1,36 0 1,-19 0 0,1 18-1,-88-18 1,-54 0-1</inkml:trace>
+</inkml:ink>
+</file>
+
+<file path=ppt/ink/ink4.xml><?xml version="1.0" encoding="utf-8"?>
+<inkml:ink xmlns:inkml="http://www.w3.org/2003/InkML">
+  <inkml:definitions>
+    <inkml:context xml:id="ctx0">
+      <inkml:inkSource xml:id="inkSrc0">
+        <inkml:traceFormat>
+          <inkml:channel name="X" type="integer" min="-749" max="3091" units="cm"/>
+          <inkml:channel name="Y" type="integer" min="-1085" max="1664" units="cm"/>
+          <inkml:channel name="T" type="integer" max="2.14748E9" units="dev"/>
+        </inkml:traceFormat>
+        <inkml:channelProperties>
+          <inkml:channelProperty channel="X" name="resolution" value="121.13564" units="1/cm"/>
+          <inkml:channelProperty channel="Y" name="resolution" value="130.28436" units="1/cm"/>
+          <inkml:channelProperty channel="T" name="resolution" value="1" units="1/dev"/>
+        </inkml:channelProperties>
+      </inkml:inkSource>
+      <inkml:timestamp xml:id="ts0" timeString="2025-11-12T13:11:41.284"/>
+    </inkml:context>
+    <inkml:brush xml:id="br0">
+      <inkml:brushProperty name="width" value="0.05292" units="cm"/>
+      <inkml:brushProperty name="height" value="0.05292" units="cm"/>
+      <inkml:brushProperty name="color" value="#FF0000"/>
+    </inkml:brush>
+  </inkml:definitions>
+  <inkml:trace contextRef="#ctx0" brushRef="#br0">14446 5592 0,'18'0'63,"17"0"-32,36 0 0,-18-18-15,176 18-1,88 0 1,-17 0 0,-53 0-1,-176 0-15,-36 0 16,-17 0 281,-1 0-141,89 0-140,106 0-1,-18 0 1,0 0-1,-71 0 1,-70 0 0,-35 0 265,17 0-250,1 0 0,-1 0-15,-18 0 0,1 0-1,0 0 17,-1 0-17,1 0 16,0 0 110</inkml:trace>
+  <inkml:trace contextRef="#ctx0" brushRef="#br0" timeOffset="7016.26">23918 5539 0,'53'0'125,"476"0"-94,195 0 0,-178 0 0,-510 0-15</inkml:trace>
+  <inkml:trace contextRef="#ctx0" brushRef="#br0" timeOffset="11756.27">22578 6597 0,'17'0'93,"19"0"-61,34 0-1,-34 18-16,34-18 1,-17 0 0,18 0-1,-1 0 1,-52 0 0,-1 0-16,1 0 31,0 0-31</inkml:trace>
+  <inkml:trace contextRef="#ctx0" brushRef="#br0" timeOffset="14409.56">6491 12841 0,'18'0'47,"-18"-18"15,17-123-30,19-88-1,-36 176-16,17 0-15,1-17 16,-18-54 0,18 54-16,-1-36 15,19 71 1,-19-18 0,-17 17-1,0 19 1,18 17-1,-18-18 79,70-35-78</inkml:trace>
+  <inkml:trace contextRef="#ctx0" brushRef="#br0" timeOffset="17674.23">21643 7514 0,'0'18'79,"0"17"-64,0-17 1,0-1-1,0 1 1,0 17 0,0 1-1,0-1 1,0 0 0,0 0 15,18-35-31,-18 18 15,35-18 282,35 0-281,1 0 0,-36 0-1,36 0 1,-54 0-1,19 0 1,-19 0 0,1 0-16,0 0 15,-1 0 1,1 0 0,35 0 15,0 0-16,17 0 1,1 0 0,17 0-1,0 0 1,-17 0 0,-1 0-1,-34 0 1,-19 0-1,19 0 1,-1 0 0,18 0-1,0 0 1,0 0 0,-36 0 15,18 0-16,-17 0 1,88 0 0,-53 0-16,0 18 15,0-18-15,-18 0 16,0 0-16,1 17 16,16-17-1,1 0 1,0 0-1,-35 0 1,0 0 0,-1 0-1,1 0 1,35 0 0,-18 0-1,-35-17 282,0-36-281,0 17-1,0-34 1,-18 35 0,18-1-1,0 19 1,0-1-1</inkml:trace>
+  <inkml:trace contextRef="#ctx0" brushRef="#br0" timeOffset="22275.77">27323 7867 0,'17'0'156,"142"0"-125,282 0-15,-123-18 31,-266 18-32,-34 0 1,0 0 15,-1 0-15,89 0 0,18 0-1,-71 0-15,35 18 16,70-18-1,-69 0-15,-1 0 16,-53 18 0,0-18-1,-17 0 1313</inkml:trace>
+  <inkml:trace contextRef="#ctx0" brushRef="#br0" timeOffset="23719.99">18732 8625 0,'18'0'78,"17"0"-47,-17-17-15,17 17-16,1 0 16,122-18-1,1 0 1,-18 1 0,-17-1-1,-71 18 1,-36 0-1</inkml:trace>
+  <inkml:trace contextRef="#ctx0" brushRef="#br0" timeOffset="24539.62">23654 8678 0,'17'0'125,"54"0"-94,-18-17-15,-36 17 0,19 0-1,-36-18 1,17 18 0</inkml:trace>
+  <inkml:trace contextRef="#ctx0" brushRef="#br0" timeOffset="31753.24">1658 9507 0,'18'0'47,"-18"-70"47,0-1-78,0 1-1,17-1 1,1 54-16,-18-1 16,0-70-1,18 35 1,-18 17-1,0 1 1,0 18 0,0-1-1,0-17 1,0 17 0,-18 53 171,0-17-156,-35 17 1,53-17-17,-17-1 16,-1-17-15,18 18 0,-17-18 15,17 18 141,17-18-141,1 0 0,-1-18-15,19 0 0,-36 1-1,17 17-15,-17-18 16,0 1-1,18 17 1,-18-18 0,18 18 77,-1 0-61,1 18-1,0-18-15,-1 35-1,1-35 1,-18 17-1,17 1 1,-17 17 0,18-35-1,-18 18 1,0 0 140,0-1-140,-18 1-1,1 0 32,-1-18-31,-17 0 0,0 0 15,17 0-31,0 0 15,1 0 79,-1-18-63,0 18-15,1 0 15,17-18-15,-18 18 31,18-17-32,-17 17 1,34 0 187,18 0-172,-17-18 1,0 18-17,-1 0-15,1 0 16,0 0 0,-1 0-1,1 0 48,17 0-32,-17 0 0,-1 0 0,1 0 1,0 0 140,-1 0 15</inkml:trace>
+  <inkml:trace contextRef="#ctx0" brushRef="#br0" timeOffset="44539.45">20108 9737 0,'18'0'62,"0"0"-46,-1 0-16,19 0 16,69 0-1,36 0 1,1 0 0,-19 0-1,-88 0 1,36 0-1,-53 0 17,-1 0 30,18 0-31</inkml:trace>
+  <inkml:trace contextRef="#ctx0" brushRef="#br0" timeOffset="45259.41">24218 9913 0,'18'0'172,"123"0"-156,-70-18-1,-1 18-15,36-17 31,-71 17-15</inkml:trace>
+  <inkml:trace contextRef="#ctx0" brushRef="#br0" timeOffset="46873.14">16316 10460 0,'71'0'125,"34"0"-110,89-35 16,-88 35-15,-35 0 0,-18 0-1,-36 0 1,1 0 0,0 0-1,-1 0 16,-17-18-15,18 18 0</inkml:trace>
+  <inkml:trace contextRef="#ctx0" brushRef="#br0" timeOffset="60208.29">25135 11465 0,'36'0'109,"122"0"-93,142 18-1,-141-18 1,-53 18 0,-71-18 15</inkml:trace>
+  <inkml:trace contextRef="#ctx0" brushRef="#br0" timeOffset="61156.47">29598 11624 0,'18'0'93,"158"0"-61,-88 0-1,-52 0 0</inkml:trace>
+  <inkml:trace contextRef="#ctx0" brushRef="#br0" timeOffset="62406.38">17374 12224 0,'18'0'94,"0"0"-78,17 0-1,0 0 1,36-18 0,-18 18-1,-18 0 1,0 0-1,-17 0 79</inkml:trace>
+  <inkml:trace contextRef="#ctx0" brushRef="#br0" timeOffset="64809.44">20443 11942 0,'0'17'94,"0"36"-79,0 0-15,0 0 16,0 35 0,-17-35-16,-1 35 15,18 0 1,0-17 0,-17 0-1,17-19 1,0-16-1,-18 17 1,18-18 0,0 0-1,-18-35 48,18 18-48,-17-18 1,-1-71 0,0 18-1,-35-17 1,18-1 0,18 36-1,34 35 79,18 53-63,-17-35-31,17-1 31,-17-17 16,17-17-31,1-36 0,34-18-1,-35 53-15,-17-17 16,0 35-16,-1-18 15,19-17 1</inkml:trace>
+  <inkml:trace contextRef="#ctx0" brushRef="#br0" timeOffset="68673.41">17268 15099 0,'18'0'62,"88"0"-31,0 0-15,35 0 0,18 0-1,-1 0 1,-52 0 0,-53 0-1,-35 0 1,-1 0-1</inkml:trace>
+  <inkml:trace contextRef="#ctx0" brushRef="#br0" timeOffset="75206.13">24448 15293 0,'105'-18'78,"213"-35"-63,-18 0 1,-89 18 0,-52 18-1,-141 17 16</inkml:trace>
+  <inkml:trace contextRef="#ctx0" brushRef="#br0" timeOffset="83145.84">18627 16863 0,'17'0'125,"19"0"-109,387 0-1,88 0 1,36 0 0,-176 35-1,-195-35 1,-158 0 0</inkml:trace>
+  <inkml:trace contextRef="#ctx0" brushRef="#br0" timeOffset="84240.16">21872 16828 0,'36'0'141,"69"0"-126,266 0 16,-301 0-31,-17 0 16,-18 0 0</inkml:trace>
+</inkml:ink>
+</file>
+
+<file path=ppt/ink/ink5.xml><?xml version="1.0" encoding="utf-8"?>
+<inkml:ink xmlns:inkml="http://www.w3.org/2003/InkML">
+  <inkml:definitions>
+    <inkml:context xml:id="ctx0">
+      <inkml:inkSource xml:id="inkSrc0">
+        <inkml:traceFormat>
+          <inkml:channel name="X" type="integer" min="-749" max="3091" units="cm"/>
+          <inkml:channel name="Y" type="integer" min="-1085" max="1664" units="cm"/>
+          <inkml:channel name="T" type="integer" max="2.14748E9" units="dev"/>
+        </inkml:traceFormat>
+        <inkml:channelProperties>
+          <inkml:channelProperty channel="X" name="resolution" value="121.13564" units="1/cm"/>
+          <inkml:channelProperty channel="Y" name="resolution" value="130.28436" units="1/cm"/>
+          <inkml:channelProperty channel="T" name="resolution" value="1" units="1/dev"/>
+        </inkml:channelProperties>
+      </inkml:inkSource>
+      <inkml:timestamp xml:id="ts0" timeString="2025-11-12T13:13:49.581"/>
+    </inkml:context>
+    <inkml:brush xml:id="br0">
+      <inkml:brushProperty name="width" value="0.05292" units="cm"/>
+      <inkml:brushProperty name="height" value="0.05292" units="cm"/>
+      <inkml:brushProperty name="color" value="#FF0000"/>
+    </inkml:brush>
+  </inkml:definitions>
+  <inkml:trace contextRef="#ctx0" brushRef="#br0">25982 4992 0,'18'0'94,"70"0"-63,282 17 1,-193-17-1,-160 0-31,1 0 31</inkml:trace>
+  <inkml:trace contextRef="#ctx0" brushRef="#br0" timeOffset="961.16">20002 4992 0,'36'0'93,"70"-18"-77,105 1 0,54-1-1,-71 0 1,-71 1 0</inkml:trace>
+  <inkml:trace contextRef="#ctx0" brushRef="#br0" timeOffset="1819.21">18821 4780 0,'17'0'78,"19"0"-62,281 0 0,-17 0-1,106 0 1,35-18 15,-124 18-15,-176 0-1,-123 0-15</inkml:trace>
+  <inkml:trace contextRef="#ctx0" brushRef="#br0" timeOffset="4960.14">14711 5980 0,'17'0'78,"54"0"-62,70 0 0,124 0-1,52 0 16,18 0-15,-176 0-16,-35 0 16,-1 0-16,1 0 15,-36 0-15,-18 17 16,18-17-16,-17 0 16,123 18-1,-88-18 1,-18 0-1,36 0 1,-36 0 0,-53 0-1</inkml:trace>
+  <inkml:trace contextRef="#ctx0" brushRef="#br0" timeOffset="9546.09">20302 6050 0,'-17'0'110,"-1"35"-95,-17 36 1,-18 0 0,35-36-16,-17 18 15,0 0 1,17-18-1,0 18 1,-17-18 0,0 18-1,17 0 1,-17 0 0,17-18-1,1 0 16,17-17 48,0-71 139,0 18-202,-18-71 0,0 53-1,18 18 1,0-18-1,0 0 1,-17 35 0,17 71 124,0-17-124,0-1-16,17 18 16,1 0-1,-18-18-15,18 0 16,-18-17-1,0 0 1,0 17 0,17-35-1,-17 17 48,18-17 140,70-52-187,36-1 15,-1-18-16,-88 53-15,-17 1 16,17-1 0,-52 18 281,-19 0-282,19-18-15,-19 18 16,19-17-16,-1 17 15,-52-18 1,34 18 0,19-17-16,-1 17 15,-53 0 1,36 0 0,0-18-1,-18 18 16,18-18-15,17 18 0,0 0 15,36 18 250,0 0-250,-1-1-15,-17 18 0,18 1-1,0-19 1,-18 19 0,17-19-1,-17 1 16,0 0-15,18-1 0,0-17 202,-1 0-186,36-53-17,0 36 1,-35-1 0,-1-17-1,1 35 1,0 0 15,-1 0 0,-17 17-15,-17-17 93,-19 0-93,19-17 0,-1 17-1,0 0-15,18-18 16,-17 18-1</inkml:trace>
+  <inkml:trace contextRef="#ctx0" brushRef="#br0" timeOffset="16080.02">9402 10248 0,'0'-53'125,"17"-17"-110,-17 34-15,18 1 16,-18-53 0,0 53-16,0-36 15,0 53 1,0-34-1,0 34 1,17 0 0,-17-17-1,0 17 1,18-17 0,-18 17 77,0 1-77,0-1 0,0 1 15,-18 17 125,18 17-140,-17 1 15,-1-18-15,1 17 15,-1 1 0,0-18 0,18 18-15,0-54 171,36 1-171,-19 35 0,-17-35-1,18 35 1,-18-18 0,17 18 15,1 0 0,0 0-15,-1 0 15,-17 18-15,18-18-16,0 18 15,-1-1 48</inkml:trace>
+  <inkml:trace contextRef="#ctx0" brushRef="#br0" timeOffset="17931.77">12735 10231 0,'18'0'47,"-18"-18"-31,0-17 0,0-36-1,0 18 16,0 0-15,0 36-16,0-1 16,0-53-1,0 18 1,0 1 0,0 16-1,0 19 1,0-1-1,0 0 1,-18 18 187,-35 18-172,53 0-15,-17-18 0,-1 0-1,0 17 1,1-17 0,-1 18 30,53-36 111,1-17-142,-19 0 1,19 35 0,-19 0 30,-17-18-30,18 18 15,17 0 1,-17 35-17,-1-35 1,1 18 15</inkml:trace>
+  <inkml:trace contextRef="#ctx0" brushRef="#br0" timeOffset="21970.78">10989 8361 0,'18'0'203,"-1"-18"-187,-17 1-16,0-1 15,18 0 16,-18-17-15,18 17 0,-18 1-1,0-1 17,17 0-1,-17 1-16,0-1 17,18 18-17,-18-17-15,0-1 32,17 0-17,-17 1 1,18-1 15,-18 0-15,0 1-1,18-19 1,-1 19 0,-17-1 46,18 1-46,-18-1-1,0-17 1,18 35 0,-18-18-1,0 0 16,17 18 32,-17 18 171,-17 70-202,-1-70-32,-17 52 31,35-52-16,-18 0 1,18-1 0,0 1-1,0 0 1,-18 17 0,1-18-1,-1 19-15,1-1 31,-1-17 1,0-1-1,18 1-15,0 0 140,-17-18-141,17 17 1,0 1 0,-18-18 15</inkml:trace>
+  <inkml:trace contextRef="#ctx0" brushRef="#br0" timeOffset="46567.9">10107 6209 0,'18'0'78,"17"0"-47,-17 0-15,70 0-1,-18 0-15,124 0 16,-17 0 0,-71 0-1,-36 0 1,-35 0 0,1 0-1,87 0 32,-70 0-31,35-18-1,142 18 1,-160 0 0,124 0-1,-106 0 1,1 0-1,-1 0 1,0 18 0,18-18-1,17 0 1,36 0 0,70 0-1,-17 18 16,-18-18-15,-106 0-16,18 0 16,106 17-1,-54-17 1,37 18 0,16-1-1,36 19 1,-53-19-1,53 36 1,-18-17 0,1-1-1,-54-18 1,-17 1 0,-53 0-1,0-1-15,282 54 31,-89-53-15,-16-1 0,-36 19-1,-89-19 1,1 18 0,-35-17-1,17 0 1,-18-1-1,-70 1-15,18-18 16,-18 0-16,17 0 16,-17 0-16,18 18 15,17-18-15,141 17 16,0 1 0,-52 0-1,34-1 16,36 18-15,-53-17 0,-17 0-1,-71-18 1,17 17 0,-70-17-16,35 18 15,-17-18-15,35 0 16,-36 18-16,36-18 15,141 17 1,-106 1 0,-53 0-1,18-18 1,53 35 0,-36 0-1,54 0 16,-36 1-15,-35-1 0,-18 0-1,0-17 1,-70-18-16,17 17 16,0-17-16,1 18 15,34 35 1,-17-35-1,-18 17 1,1-17 0,-19-1-1,1 19 1,-1 16 0,19 1-1,-19 0 16,1-17-31,0-1 16,-18-18-16,0 19 16,17 52-1,1-17 1,-18-19 0,0 19-1,0 35 1,0-18-1,0 35 1,-35-34 0,17-1-1,-35-35 1,35-36 0,1 1-1,-18 0 1,-1 17-16,-52 36 15,0-19 1,-36 1 0,19 0-1,-54 18 1,0-36 0,-35 36-1,-53-18 1,-53 17-1,36-35 1,140-17-16,36-18 16,-88 35-1,70-35-15,-18 18 16,-87 0 0,-19-1 15,1 19-16,-18-1 1,71 0 0,-18 0-1,-36-17 1,-52 0 0,-35 17-1,17 35 1,123-34-16,-34-19 15,-1 1-15,-229 0 16,-106-18 0,71 0-1,194 0 1,70 0 0,18 0-1,35-36 16,36 36-15,-1-17 0,36 17-1,35-18-15,18 18 16,0 0-16,-1-18 16,-122 1-1,69-18 1,-16 17-1,16 18 1,-34-35 0,17 17-1,-70 0 1,-36 1 0,18-19-1,35 1 16,53 18-15,54-1-16,16 18 16,-122-18-1,34 1 1,-17 17 0,0-18-1,35 0 1,-35 1-1,-35 17 1,52-18 0,-35 0-1,53 1 1,1 17 0,69-18-1,-17 18-15,-88 0 31,0-17-15,18 17 0,-1 0-1,18 0 1,54 0 0,-19 0-1,-35 0 1,-17 0-1,-1 0 1,18 0 0,71 17-16,17-17 15,-87 0 1,16 18 0,-34-1-1,17 1 16,0 17-15,0-35 0,1 36-1,-37-19 1,1 1 0,-17-18-1,34 0 1,71 0-16,0 0 15,-88 0 1,71 0 0,-1-35-1,36-1 1,-53 1 0,-1-35-1,19 17 16,17 0-15,-18-18 0,54 36-16,-19 17 15,-16-70 1,-1 0 0,35 70-16,-17-70 15,17 17 1,0 1-1,1-18 1,17 17 0,0 1-1,35-36 1,0 18 0,36-18-1,-18 35 16,-36 36-31,36-18 16,-17 35-16,-1-17 16,71-53-1,0 17 1,17 1 0,-35 17-1,53-35 1,1 35-1,-1-18 1,17-17 0,-17 17-1,-88 54 1,0-19 0,0 19-1,-35-1 1,52-35-1,36 0 1,0 0 0,-35 18-1,-18 18 1,-18-1 0,35 0-1,1-17 1,35-18-1,-18 35 1,-17-34-16,-19 52 16,37-53-1,-54 35-15,71-35 16,17 18 0,18-18-1,0-18 32,-88 54-31,18-19-1,-18 1 1,0 0 0,0 17-1,-36-17 1,1 35-1</inkml:trace>
+  <inkml:trace contextRef="#ctx0" brushRef="#br0" timeOffset="69993.59">22137 11571 0,'159'0'93,"334"0"-77,-87 0 0,-124 0-1,-158 0 1</inkml:trace>
+  <inkml:trace contextRef="#ctx0" brushRef="#br0" timeOffset="74511.88">15275 13000 0,'-17'0'16,"70"-35"93,476-18-78,159 17 1,-424 19-1,-246 17 0</inkml:trace>
+  <inkml:trace contextRef="#ctx0" brushRef="#br0" timeOffset="80543.34">21220 12753 0,'35'0'63,"18"0"-48,123 0 1,-52 0 0,17 18-1,0-18 16,0 0-15,-18 0 0,-34 0-1,-19 0 1,-17 0 0,53 0-1,-36 0-15,-17 0 16,71 0-1,-54 0-15,36 0 16,18 0 0,-1 0-1,18 17 1,-17-17 0,-36 0-1,0 0 16,-35 0-15,0 0 0,18 0-1,-19 0 1,37 0 0,-72 0-16,19 0 15,17 0 1,52 0-1,36 0 1,18 0 0,-18 0-1,-17 0 1,-18 0 0,-18 0-1,-18 0 16,-52 0-31,0 0 16,35 0 0,-18 0-16,53 0 15,0 0 1,0-17 0,-17 17-1,-36 0 1,1 0-1,34 0 1,1 0 0,-18 0-1,70 0 1,-70 0-16,-18-18 16,1 18-16,16 0 31,72 0-16,-18-18 1,-71 18 0,-17 0-1</inkml:trace>
+  <inkml:trace contextRef="#ctx0" brushRef="#br0" timeOffset="82160.92">4339 13635 0,'53'0'125,"0"0"-109,0 0-16,17 0 16,283 17-1,-159-17 1,-35 18-1,-71-18 1,-70 18 0</inkml:trace>
+  <inkml:trace contextRef="#ctx0" brushRef="#br0" timeOffset="104069.81">11589 7832 0,'-36'0'234,"1"0"-218,18 0-1,-1 0 1,0 0-16,1 0 31,-1 0 47,0 0 1,1 17-48,17 1-16,-18 0 1,0-1 15,1 1-15,17 17 0,-18-17 15,18 17-16,0-17 17,0-1-17,0 1 17,0 0-17,0-1 1,0 1 15,0 0-15,0-1-1,18 18 1,-18-17 0,0 0 15,17 17-16,1-17 1,-18-1-16,18 1 31,-1 0-15,-17-1 15,18-17-15,0 0 78,17-17-32,-17-1-31,-18 0-15,17-17 0,1 17 46,-1 1-46,-17-19 15,0 19 16,-17 17 109,-1 0-140,-17 0-1,17 0 1,1 0 0,34 0 187,1-18-188,0 18 1,17 0 0,0 0-1,0-17 16,-17 17-31,0 0 16,-1-18 0,1 18-16,0 0 15,-1 0 1,1 0 0,0 0-1</inkml:trace>
+  <inkml:trace contextRef="#ctx0" brushRef="#br0" timeOffset="130017.18">4974 17251 0,'18'0'203,"88"0"-171,-89 0-17,36 0 1,18 0 0,-36 0-1,-17 0 345,140-18-329,-122 18-16,17 0 1,-36 0-16,1 0 16</inkml:trace>
+  <inkml:trace contextRef="#ctx0" brushRef="#br0" timeOffset="130647.83">7779 17286 0,'123'0'93,"89"0"-77,405 0 0,-317 0-1,-212 0 1,-70 0 0</inkml:trace>
+  <inkml:trace contextRef="#ctx0" brushRef="#br0" timeOffset="132970.1">10654 17233 0,'18'0'297,"-1"0"-282,18-17 1,-17 17-1,0 0 1,52-36 250,-34 19-251,-1-1 1,0 0 0,-17 18-1,-71 0 173,-229 89-173,141-54 17,176-35 77,-18-18-93,1 1 155,35-1-139,-35 18-1,-1 0 47,1 0 94</inkml:trace>
+  <inkml:trace contextRef="#ctx0" brushRef="#br0" timeOffset="155959.92">24853 18397 0,'0'-35'109,"0"0"-93,0 0-1,0-1 1,0-17 0,0 0-1,0 36 1,0-36-1,0 35-15,0-52 16,0 34 0,0 1-1,0 0 1,0-18 0,0 0 15,0 18-31,0-18 31,0 35-15,0 1-1,0-1 1,0 0 0,0 1-16,-17 17 265,17 17-249,-18-17-16,0 0 15,18 18 1,-17 0 0,-1-18-1,18 17 17,-18-17-1,18 18-31,-17-18 15,-1 35 1,0-17 0,1-1-1,-1 1 1,18 0 0,18-71 202,-1 35-202,1-35 0,17 0-1,-17 36 1,-18-1-1,0 0-15,18 1 16,-1 17 15,-17-18-15,18 0 0,0 18 62,-1 0-63,1 0 32,-1 18-31,1 0 15,17 35-15,-17-36-1,17 19 1,-35-1 0,18-35 15,0 17 0,-1 1 16,1 0-16,-36-18 219,18 17-234,-17-17-1,-1 0 17,-17 0-17,17 0 1,0 0 0,-17 0-1,0 18 16,-18-18-15,35 0 0,-17 0-1,17 0 1,1 0 0,-19 0-1,19 0 1,17-35 343,70-89-328,-52 107-15,0-1 0,-18 0-16,17 18 15,1 0 95,0 36-79,-18-19-31,0 1 47,0 0 31,0 17-62,17 0-1,-17-17 1,0-36 124,0-17-124,0 17 0,18 18 15,-1 0 0,1 0-15,0 0-1,-1 0 173,1 18-172,-18 17-1,18 18 1,-18-18-1,0-17 1,-18-18 47,0 0-32,1 0 0,-1 0 0,0 0-15,18-18 0,-17 1-1,17-1 32,-18 18-31,1 0 249,-19 0-233,-52 0-1,70 0-16,1 0 1,17-18 93,35-17-77,18 0-32,35 17 31,-53 1-31,71-1 31,-53 0 0,-35 18 16,-18 18 0,0 0-16,-18-18 32,1 0-47,-1 0-1,0 0 16,1 0 16,-1 0-31</inkml:trace>
+  <inkml:trace contextRef="#ctx0" brushRef="#br0" timeOffset="165643.88">10583 18309 0,'18'0'109,"0"0"-93,70 0 15,35-17-15,-17 17-1,18-18 1,-36 18 0,0 0-1,18 0 1,17 0-1,-17 0 1,18 0 0,-71 0-16,-1 0 15,72 0 1,-230 0 375,-88-18-376,-71 1 1,36-1-1,211 18 1,1 0 0,-1 0 62,-35 0-63,-17-18 1,17 18 0,18 0-16,17 0 15,71-17 95,88-1-95,53 18 1,71 0 0,-160 18-1,-16-18-15,-1 17 31,-88 1 1,-35-18-17,-36 0 1,-17 0 0,-71 0-1,-35 0 1,70 0-1,54 0 1,-1 0 156,36 0-156,0 0-16,17 0 15</inkml:trace>
+  <inkml:trace contextRef="#ctx0" brushRef="#br0" timeOffset="172223.98">27146 16792 0,'88'0'188,"54"0"-157,-107 0-15,35-17-1,1 17 1,-36 0 0,-17 0-1,-1-18 1,1 18-16,0 0 15,70 0 1,-17 0 0,-19 0-1,-16 0 1,-19 0 0,19 0-1,17 0 16,-18 0-15,-18 0 0</inkml:trace>
+  <inkml:trace contextRef="#ctx0" brushRef="#br0" timeOffset="173688.95">27446 17480 0,'0'-18'78,"106"1"-47,17-18 0,89 35 0,-106 0-15,-18-18 0,-35 18-1,-35 0 1,-1 0 0,19 0-1,-19 0-15,36 0 16,-18-18-16,18 18 15,53 0 1,-88 0 0</inkml:trace>
+</inkml:ink>
+</file>
+
+<file path=ppt/ink/ink6.xml><?xml version="1.0" encoding="utf-8"?>
+<inkml:ink xmlns:inkml="http://www.w3.org/2003/InkML">
+  <inkml:definitions>
+    <inkml:context xml:id="ctx0">
+      <inkml:inkSource xml:id="inkSrc0">
+        <inkml:traceFormat>
+          <inkml:channel name="X" type="integer" min="-749" max="3091" units="cm"/>
+          <inkml:channel name="Y" type="integer" min="-1085" max="1664" units="cm"/>
+          <inkml:channel name="T" type="integer" max="2.14748E9" units="dev"/>
+        </inkml:traceFormat>
+        <inkml:channelProperties>
+          <inkml:channelProperty channel="X" name="resolution" value="121.13564" units="1/cm"/>
+          <inkml:channelProperty channel="Y" name="resolution" value="130.28436" units="1/cm"/>
+          <inkml:channelProperty channel="T" name="resolution" value="1" units="1/dev"/>
+        </inkml:channelProperties>
+      </inkml:inkSource>
+      <inkml:timestamp xml:id="ts0" timeString="2025-11-12T13:17:04.701"/>
+    </inkml:context>
+    <inkml:brush xml:id="br0">
+      <inkml:brushProperty name="width" value="0.05292" units="cm"/>
+      <inkml:brushProperty name="height" value="0.05292" units="cm"/>
+      <inkml:brushProperty name="color" value="#FF0000"/>
+    </inkml:brush>
+  </inkml:definitions>
+  <inkml:trace contextRef="#ctx0" brushRef="#br0">10142 7285 0,'18'0'250,"0"0"-234,35 0 0,35 0-1,-18 0 1,-17 0 0,-35 0-1,17 0 1,-17 0-16,17 0 15,-17 0-15,52 0 16,36 0 0,53 0-1,-36 0 1,36 0 0,35 0-1,-88 0 16,-36 0-15,1 0 0,-36 0-1,36 0 1,35 0 0,-71 0-16,0 0 15,53 0 1,-17 0-1,-36 0 1,1 0 0,-19 0-1,1 0 251</inkml:trace>
+  <inkml:trace contextRef="#ctx0" brushRef="#br0" timeOffset="5197.14">27287 11571 0,'-17'0'78,"17"-53"-46,0 0-17,0 0 1,0-35-1,0 0 1,17-36 0,-17 72-16,0-1 15,0 0-15,18-35 16,-18-18 0,0-176 30,0 193-30,0 1 0,0 0-1,0 70-15,0 1 16,0-19 0,0 1-1,0 17-15,-18 18 281,-52 106-265,-36-18 0,35-35-1,36-17 1,18-36 0,52 0 124,88-124-124,-17 36-1,18 0 1,-36 53 0,-53 17-1,0 18 48,-17 0-48,35 35 1,0 18 0,0 0-1,-18-18 1,-17-17 0</inkml:trace>
+  <inkml:trace contextRef="#ctx0" brushRef="#br0" timeOffset="8573.76">21061 2064 0,'0'70'125,"0"1"-109,0 35 0,0-53-1,-18 17 1,18-17 0,0-35-16,0-1 15,-17-17 1,17 18-1,0-36 220,-18-52-204,-35-18 0,53 52 1,18 36 155,-18 36-156,17-36 1,1 35-1,0-35 0,-18 18 0,17-18 16,-17-18 156,0 0-156,18 1 109,-1-1-124,-17 0-17,18 18-15,0 0 32,-1 0 46,1 0 0,-18-17-63,0 52 204,-35 18-188,17-35-15,0 17 0,18-18-1,-17-17 1,-1 0 0,18 18-1,-17-18 188,-1-18-187,0-17 0,1 35 15</inkml:trace>
+  <inkml:trace contextRef="#ctx0" brushRef="#br0" timeOffset="10440.98">23230 2064 0,'0'17'125,"0"89"-94,-17-53-31,-1 88 31,1-70-15,17-18 0,0 0-1,0-36 1,-18 1-16,18 0 16,0-1 15,0 1-16,-53-53 220,18-36-220,17 36 1,0-1 0,18 19 15,18 17 110,0 0-110,-18 17-16,70-17 1,1 0 0,-36 0-16,-17 18 15,35-18 1,-53 18 78,-18-1-79,-35 1 1,-17 0 0,52-1-16,-17-17 15,-18 0 1,35 0-1</inkml:trace>
+  <inkml:trace contextRef="#ctx0" brushRef="#br0" timeOffset="15888.17">25806 1923 0,'17'0'141,"-17"17"-126,0 54 1,0-1 0,0-34-1,-17 17 1,17-36 0,0 36-1,0 0 1,0-18-1,0 18 1,0 0 0,-18 18-1,18-36 1,0 18 0,-18-18 15,18-17-16,0-1 1,0 1 15,-35-36 204,35 1-220,-17-18 1,17-1 0,-18 19-1,0-1 1,18 0-1,0 1 17,0-1-17,-17 0 17,17 1-1,0-1 16,17 18 234,1 0-265,0 0 46,-18 18-46,17-18-1,-17 17 1,18-17 31,-1 0-16,1 0-15,0 0 15,-1 0-15,19 0 15,-19 0-16,1 18 1,17-18 0,-17 0-16,-1 0 15,1 0 1,0 0 15,-1 0 32,1 0 15,-36 0 187,1 18-249,-19 17 0,19-17-1,-1-18 1,18 17 0,-17-17 30,17 18-30,-18 0 0,0-18 15,18 17 16,-17-17-32,17 18 1,-18-18 0,-17 0-1,17 17 1,0 1 0,18-71 171,18 0-156,-18 18 1,0 17 202,18 18-156,-36 0-15,-35 18-48,0-18-15,-53 0 16,-17-35-1,88 17-15,-18 0 16,35 1 0,36 17 93,88 0-78,-54 17 1,-34-17-17,0 18 1,-1-18-1,-17 18 1</inkml:trace>
+  <inkml:trace contextRef="#ctx0" brushRef="#br0" timeOffset="23822.14">30815 1376 0,'0'17'94,"0"19"-79,0-19-15,0 1 16,0 0-16,0 17 16,0 36-1,-17-19 1,17 19 0,-18 0-1,0-1 1,18 1-1,-17-36 1,17-17 0,-18-18-16,18 17 15,0 1 1,0 17 0,0-17-16,0-1 15,0 19 16,-18-36 219,1 0-218,-1-18-17,0 0 17,18 1-17,0-1 1,-17 0-1,17 1-15,-18-1 16,0 1 0,18-1-1,0 0 17,0 1-1,-17 17-16,34 0 204,1 0-188,0 0 1,-1 0-1,1 0-15,0 17-1,-1-17 1,1 0 15,0 18 0,-1-18 1,1 18-1,0-18-16,-1 0 1,18 0 0,-17 0-1,17 0 1,-17 0 0,0 0-1,-1 0 1,1 0-16,-18 17 47,18-17-32,-36 18 188,0-18-187,1 17 0,17 1-1,-18-18 1,18 18 0,-18-18-1,1 17 16,-1-17-15,18 18 0,-18-18-16,18 18 15,-17-18 17,-1 17-17,1-17 110,17 18-94</inkml:trace>
+  <inkml:trace contextRef="#ctx0" brushRef="#br0" timeOffset="25679.97">28910 7373 0,'106'-18'141,"35"1"-125,-53-1-16,-17 0 15,35 1 1,-71 17-16,-17 0 16</inkml:trace>
+  <inkml:trace contextRef="#ctx0" brushRef="#br0" timeOffset="40950.8">8273 13282 0,'0'35'94,"0"-17"-63,17 17 16,-17-17-31,0 0 0,0-1-1,0 1 1,0-1-1,18 1 17,0-18 140,17 0-157,212 35 1,35-35-1,-70 18 1,-106-18 0,-71 0-16,-18 0 15,1 0 48,53 0-32,17 0-15,0 0-1,-17 0 1,-36 0 0,0 0-16,-17 0 31,17 0-16,-17 0-15,35 0 16,-1 0 0,1 0-1,18 0 1,-18 0 0,-18 0 15,-17-18-16,17 18 1,-17 0 0,-1 0-1,1 0 1,0 0 0,-18-17-16,0-1 171,17 0-155,-17-17-16,36 18 16,-1-54-1,-35 53 1,17 1 0</inkml:trace>
+  <inkml:trace contextRef="#ctx0" brushRef="#br0" timeOffset="45208.07">13053 13423 0,'17'0'78,"1"0"-62,0 0 0,-1 0-1,1 0-15,17 0 16,1 0 0,16 0-16,54 0 15,-35 0 1,35-17-1,-18-1 1,-18 18 0,1-18-1,-36 18 1,1 0 0,-19-17-1,1 17 1,-18-18 62,0 0-62</inkml:trace>
+  <inkml:trace contextRef="#ctx0" brushRef="#br0" timeOffset="48523.6">29475 1376 0,'0'17'78,"0"54"-63,0 53 1,0-1 0,0 0-1,0-52 1,0-36-16,0 1 16,17 140-1,1-35 1,-18 35-1,18-52 1,-18-54 0,0-34-1,0-19 1,17 1 0,-52-53 171,-18-36-171,0-17-1,0 0 1,18 53-16,0-36 16,-1 36-1,19 17-15,-1 0 31,18 1 1,18 34 77,-1-17-93,1 18-16,0 17 15,52 36 1,-17-18 0,-18-36-1,-17-17 16,-18 36-15,18-19 15,-1-17-15,-17 18 0,18-18-1,0 18 16,-18 17-15,0-53 125,0 1-126,0-1-15,0-17 16,17-18 0,1 35-16,-18-17 15,17 0 1,-17 17-1,18 0 1,-18 1 0,18-1-1,-18 0 1,0 1 0,17 17 30,-17-18 1,0 0-15,18 18-17,-18-17 1,0-1-1,0-17 17,0 17-17,18 18 48,-18 36 93,-18 16-140,0 19-1,-17 0 1,35-36 0,-18 0-1,18 0 16,-17 1-15,17-1 0,-18-17-1,18 17 1</inkml:trace>
+  <inkml:trace contextRef="#ctx0" brushRef="#br0" timeOffset="70540.2">7761 14870 0,'0'-18'63,"71"18"-48,52-18 1,-17 18 0,-18 0-1,-53 0 16</inkml:trace>
+  <inkml:trace contextRef="#ctx0" brushRef="#br0" timeOffset="71881.13">14270 14905 0,'70'0'109,"1"0"-93,88 0-1,70 0 1,-106 0-16,36 17 15,194-17 1,-229 0 0,-89 0-1,-18 0 1,1 0 140,0 0-140,17 0-1,0 0 1,1 0 0</inkml:trace>
+  <inkml:trace contextRef="#ctx0" brushRef="#br0" timeOffset="77056.92">11007 15681 0,'0'0'0,"-18"0"16,-70 0 0,35-18-16,-71 1 15,-52-1 1,-18 0 0,-18-34-1,1-1 1,-1 17-1,-35 1 1,-88 0 0,-18 17-1,18 0 1,53 18 0,-36 0-1,212 0 1,-88 0-1,106 0 1,35 18 0,18 0-1,0-1 1</inkml:trace>
+  <inkml:trace contextRef="#ctx0" brushRef="#br0" timeOffset="85224.88">15081 15540 0,'36'-18'156,"-1"18"-140,53-17 0,-17 17-1,-19 0 1,1 0 0,-17 0-1,-19 0 1,19 0-1,52-18 1,18 18 0,-18 0-1,-53 0 1,-17 0 656,105 0-641,54 0-15,-36 0-1,35 18 1,-52-1 0,-36-17-1,-71 0 1,1 0-1,0 0 1,-1 0 78,1 0-79,0 0 1,-1 0 0</inkml:trace>
+</inkml:ink>
+</file>
+
+<file path=ppt/ink/ink7.xml><?xml version="1.0" encoding="utf-8"?>
+<inkml:ink xmlns:inkml="http://www.w3.org/2003/InkML">
+  <inkml:definitions>
+    <inkml:context xml:id="ctx0">
+      <inkml:inkSource xml:id="inkSrc0">
+        <inkml:traceFormat>
+          <inkml:channel name="X" type="integer" min="-749" max="3091" units="cm"/>
+          <inkml:channel name="Y" type="integer" min="-1085" max="1664" units="cm"/>
+          <inkml:channel name="T" type="integer" max="2.14748E9" units="dev"/>
+        </inkml:traceFormat>
+        <inkml:channelProperties>
+          <inkml:channelProperty channel="X" name="resolution" value="121.13564" units="1/cm"/>
+          <inkml:channelProperty channel="Y" name="resolution" value="130.28436" units="1/cm"/>
+          <inkml:channelProperty channel="T" name="resolution" value="1" units="1/dev"/>
+        </inkml:channelProperties>
+      </inkml:inkSource>
+      <inkml:timestamp xml:id="ts0" timeString="2025-11-12T13:19:08.165"/>
+    </inkml:context>
+    <inkml:brush xml:id="br0">
+      <inkml:brushProperty name="width" value="0.05292" units="cm"/>
+      <inkml:brushProperty name="height" value="0.05292" units="cm"/>
+      <inkml:brushProperty name="color" value="#FF0000"/>
+    </inkml:brush>
+  </inkml:definitions>
+  <inkml:trace contextRef="#ctx0" brushRef="#br0">12065 7497 0,'35'0'110,"89"0"-95,-36 0-15,35 0 16,142 0 0,-142 0-16,-34 0 15,122 0 1,-122 0 0,-37 17-1,1-17 16,-35 0-15,0 0 0,-1 0 15,1 0 31</inkml:trace>
+  <inkml:trace contextRef="#ctx0" brushRef="#br0" timeOffset="2776.02">19967 8378 0,'35'0'109,"54"-17"-93,-19 17-1,107-18 1,17 1 0,-18 17-1,-88 0 1,-70 0-1</inkml:trace>
+  <inkml:trace contextRef="#ctx0" brushRef="#br0" timeOffset="7175.94">22013 9613 0,'18'0'62,"105"0"-31,142-17 1,-230-1-1</inkml:trace>
+  <inkml:trace contextRef="#ctx0" brushRef="#br0" timeOffset="26464.71">19826 11483 0</inkml:trace>
+  <inkml:trace contextRef="#ctx0" brushRef="#br0" timeOffset="29384.22">19808 11483 0,'18'0'297,"0"0"-266,-1 0-15,1 0 46,0 0-15,-1 0 16,1 0-32,17 0 0,0 0 1,-17 0-17,0 0 1,17 0-1,-17 0 1,-1 0 0,1 0-16,0 0 15,-1 0 1,19 0 0,-19 0-1,1 0 126,17 0-1,-35-18-124,35 18 0,1 0-1,-19 0-15,19 0 32,-1-17-17,-18 17 1,1 0-1,0 0 1,17 0 0,0 0-1,-17 0 1,0-18 0,17 18-1,-17 0 16,52-18-15,-35 18-16,1 0 16,-1 0-16,18 0 15,-18 0 1,-17-17 0,17 17-1,-17 0 1,17-18-1,-17 18 1,-1 0 0,1 0-1,-1 0 1,1 0 0,0 0-16,-1 0 15,1 0-15,17 0 31,1 0-15,-19 0 0,1 0-1,-1 0 1,1 0 0,0 0-1</inkml:trace>
+  <inkml:trace contextRef="#ctx0" brushRef="#br0" timeOffset="39799.74">20302 13317 0,'18'0'140,"0"0"-124,-1 0-16,54-17 31,-1-1-15,1 18 0,-18 0-1,17-18 1,-34 18-1,-19 0 1,19 0 0,-19-17-1,1 17 1,0 0-16,-1 0 31,1 0 0,-1 0-15,19 0 0,-19 0-1,19 0 1,-19 0 31</inkml:trace>
+  <inkml:trace contextRef="#ctx0" brushRef="#br0" timeOffset="41308.93">21696 13317 0,'17'0'141,"1"0"-125,0 0-1,-1 0 48,1 0 15,0 0-16</inkml:trace>
+  <inkml:trace contextRef="#ctx0" brushRef="#br0" timeOffset="42092.06">20073 13882 0,'18'0'31,"17"0"-15,0 0-1,1-18 1,-1 1 0,-18 17-1,-17-18 1,18 18 0,0 0-1</inkml:trace>
+  <inkml:trace contextRef="#ctx0" brushRef="#br0" timeOffset="43007.84">21960 13811 0,'18'0'110,"0"0"-95,17 0 1,-17-17 0,35-1-1,-18 0 16,18 18-15,0-17 0,35-1-1,0 0 1,0-17 0,0 35-1,-52-18 1,-19 1-16</inkml:trace>
+  <inkml:trace contextRef="#ctx0" brushRef="#br0" timeOffset="55182">11007 14482 0,'17'0'94,"36"0"-63,18 0 0,-18 0-15,0 0 0,17 0-1,1 0 1,17 0 0,-18 0-1,-17 0 1,-17 0-1,17 0 1,-36 0-16,36 0 16,-35 0-16,35 0 15,0 0 1,-36 0 0,1 0 15,0 0 78,87 0-78,-34 17 1,-36-17-17</inkml:trace>
+  <inkml:trace contextRef="#ctx0" brushRef="#br0" timeOffset="65935.02">9137 15169 0,'18'0'125,"123"-17"-110,176-18 1,107-1 0,-195 1-16,18-18 15,229-18 1,-423 71 0</inkml:trace>
+  <inkml:trace contextRef="#ctx0" brushRef="#br0" timeOffset="69375.97">21819 9137 0,'18'0'79,"0"0"-33,-1-18 1,19-17-15,-1 0-1,-18 17-31,-17 0 31,18 1-15,0 17-1,-1-18-15,1-17 32,17 17-17,-17 18 1,0 0 46,-18-17-46,17 17 0,1-18 46,-1 18-31,-34 0 110,-36 18-125,18-1-1,-1 1 1,-87 17-1,70-17 1,18-1 0,-1-17-1,54 0 173,70 0-157,-52-17-15,16-1-1,1 18 1,0-17 0,-35-1-1,35 0 1,-36 18-16,1 0 15,17-17 1,-35-1 0,0 53 93,0-17-93,0 35-1,0-36 1,0 1-16,0 0 16,0-1 15,0 1 31,-17-18 95</inkml:trace>
+</inkml:ink>
+</file>
+
+<file path=ppt/ink/ink8.xml><?xml version="1.0" encoding="utf-8"?>
+<inkml:ink xmlns:inkml="http://www.w3.org/2003/InkML">
+  <inkml:definitions>
+    <inkml:context xml:id="ctx0">
+      <inkml:inkSource xml:id="inkSrc0">
+        <inkml:traceFormat>
+          <inkml:channel name="X" type="integer" min="-749" max="3091" units="cm"/>
+          <inkml:channel name="Y" type="integer" min="-1085" max="1664" units="cm"/>
+          <inkml:channel name="T" type="integer" max="2.14748E9" units="dev"/>
+        </inkml:traceFormat>
+        <inkml:channelProperties>
+          <inkml:channelProperty channel="X" name="resolution" value="121.13564" units="1/cm"/>
+          <inkml:channelProperty channel="Y" name="resolution" value="130.28436" units="1/cm"/>
+          <inkml:channelProperty channel="T" name="resolution" value="1" units="1/dev"/>
+        </inkml:channelProperties>
+      </inkml:inkSource>
+      <inkml:timestamp xml:id="ts0" timeString="2025-11-12T13:22:23.834"/>
+    </inkml:context>
+    <inkml:brush xml:id="br0">
+      <inkml:brushProperty name="width" value="0.05292" units="cm"/>
+      <inkml:brushProperty name="height" value="0.05292" units="cm"/>
+      <inkml:brushProperty name="color" value="#FF0000"/>
+    </inkml:brush>
+  </inkml:definitions>
+  <inkml:trace contextRef="#ctx0" brushRef="#br0">3898 9842 0,'18'0'62,"-1"0"17,1 0-64,35 0 1,53 0-1,0 0 1,52 0 0,-69 0-1,-54 0 1,-17 0 0,-1 0 62,1 0-47</inkml:trace>
+  <inkml:trace contextRef="#ctx0" brushRef="#br0" timeOffset="1608.02">3739 9842 0,'18'0'296,"35"0"-264,18-52-17,-1 16 17,-35 19-17,18-1 1,-17 0 15,-19 18-15,-17-17-1,-53 70 157,-17-18-141,-1 0-15,36 0 0,-18-17-1,35 0 1,1-18 62,17 17-62,-18-17-1,0 18 1,1-18 15,34 0 63,1 18-78,53-1-1,17 1 1,-35 0-1,-36-18 1</inkml:trace>
+  <inkml:trace contextRef="#ctx0" brushRef="#br0" timeOffset="3273.57">3881 10601 0,'17'0'125,"89"0"-109,18 0 0,17-35-1,-18 17 1,-35 0 0,-35 18-1,-18-17 1,-17 17-1,0 0 1,-36 0 125,-35 0-126,-106 0 1,1 17 0,87-17-16,18 0 15,0 0-15,18 0 16,17 0-1</inkml:trace>
+  <inkml:trace contextRef="#ctx0" brushRef="#br0" timeOffset="4596.04">3881 10601 0,'17'0'110,"1"-18"-79,17-17-16,-17 0 1,17 17 0,-17 1-1,-1-19 1,1 19 0,17-1-1,-35 0 1,18-17-1,-18 88 110,-35-18-109,-1 36 0,1-54-1,-18 36 1,35-35 0,1 0-1,17-1 1,0 1 31,17 0 78,1-1-110,17 1-15,1-18 32,-19 17-17,1-17 16</inkml:trace>
+  <inkml:trace contextRef="#ctx0" brushRef="#br0" timeOffset="8739.31">3775 11412 0,'17'0'125,"54"0"-94,70 0 0,-88 0 0</inkml:trace>
+  <inkml:trace contextRef="#ctx0" brushRef="#br0" timeOffset="10234.99">3810 11430 0,'0'-18'62,"88"-70"-30,-53 35-1,-35 71 78,-88 176-78,71-141 1</inkml:trace>
+  <inkml:trace contextRef="#ctx0" brushRef="#br0" timeOffset="11050.4">3810 12347 0,'18'0'78,"35"0"-63,88-35 1,35 0 0,-52 17-1,-72 18 1</inkml:trace>
+  <inkml:trace contextRef="#ctx0" brushRef="#br0" timeOffset="12173.01">3845 12365 0,'0'-35'62,"0"-18"-31,18 35-31,0 0 16,17-17 0,-18 17-16,19-17 15,-19 18 1,1-1 0,0 18-1,-36 35 79,-17 18-78,35-18-1,-36-17-15,1 35 31,35-35 94,0-1-93,35 18-1,-17-35 0,0 0 0,-1 0-15,19 0 0,-19 18-1</inkml:trace>
+  <inkml:trace contextRef="#ctx0" brushRef="#br0" timeOffset="13406.04">4198 13018 0,'71'-18'204,"70"0"-189,-53 1-15,35-19 16,107 19-1,-160-1-15,18 0 16,-17 1 0</inkml:trace>
+  <inkml:trace contextRef="#ctx0" brushRef="#br0" timeOffset="14523.03">4163 13035 0,'17'0'31,"1"-17"16,17-19-32,18 1 1,-17 17 0,16-17-1,-16 0 16,-1 35-15,-35-18 0,18 18-16,-36 0 109</inkml:trace>
+  <inkml:trace contextRef="#ctx0" brushRef="#br0" timeOffset="15018.56">4163 13035 0,'0'18'94,"17"-18"-79,19 17 1,70 1 0,-36-18-1,-17 18 1,-18-18 0</inkml:trace>
+  <inkml:trace contextRef="#ctx0" brushRef="#br0" timeOffset="17569.86">3845 13723 0,'71'0'140,"211"-18"-108,-53 1-17,-17-1 1,-89-17-1,-105 35 1</inkml:trace>
+  <inkml:trace contextRef="#ctx0" brushRef="#br0" timeOffset="18456.09">3863 13741 0,'88'-36'31,"-35"19"-15,71-54 0,-1 18-1,-17 18 1,-89 35-1,-17-18-15,-35 18 94,-106 53-78,18-35 15,-1 17-15,89-17-16,0-18 15,17 17-15</inkml:trace>
+  <inkml:trace contextRef="#ctx0" brushRef="#br0" timeOffset="18739.28">3863 13652 0,'35'36'31,"0"-1"-15,-17-35-16,0 35 16,35 1-1,-18-36 1,-35 17 0</inkml:trace>
+  <inkml:trace contextRef="#ctx0" brushRef="#br0" timeOffset="20490.34">4921 14411 0,'0'-35'63,"36"-18"-32,-1 53-31,53-35 31,-53-1-15,-17 19 0,0 17-1,-18-18 17</inkml:trace>
+  <inkml:trace contextRef="#ctx0" brushRef="#br0" timeOffset="21506.35">4780 14376 0,'18'0'141,"52"0"-110,71-18 0,1-17-15,-72 17 15,-17 1 0,0-1-15,-35 0 0,17 18-1,-35-17 79</inkml:trace>
+  <inkml:trace contextRef="#ctx0" brushRef="#br0" timeOffset="22875.1">4833 14376 0,'71'-53'78,"-1"0"-47,-52 35-15,-18 36 78,-53 17-79,35-17-15,1-1 16,-36 1 0,35 0-1,18-1 110,-18-17-109,18 18 125,89 17-110,-72-17 0,1-18 172</inkml:trace>
+  <inkml:trace contextRef="#ctx0" brushRef="#br0" timeOffset="25890.09">4445 15134 0,'35'0'313,"159"-53"-282,-70 36 0,-107 17-15,1 0 109,53-18-94,-54 0-15,71 1 0,-52-1-1,-1 0 1,-17 18-1</inkml:trace>
+  <inkml:trace contextRef="#ctx0" brushRef="#br0" timeOffset="28423.17">4427 15187 0,'0'-35'125,"0"17"-109,18 1 0,0-1-1,-1 0 1,1 1 0,-18-1 46,18 0 63,-18 1-109,0-1-1,17 18 1,1 0-16,-36 35 203,1-17-187,17 0-1,-18-1 95,18 1-95,-18 0-15,1-18 16,17 17 0,17 1 140,1-18-141,0 0 32,-1 0 0,-17 17-16,18-17 16,-1 0-15,1 18 14,0-18-14,-1 0-1,1 18 0,0-1 0</inkml:trace>
+  <inkml:trace contextRef="#ctx0" brushRef="#br0" timeOffset="31789.12">4727 17304 0,'35'-18'63,"89"-70"-32,88 35 0,-1-18 0,-175 71-15,34-35 0,-52 35-16,-1 0 15,-34 0 95,-54 0-110</inkml:trace>
+  <inkml:trace contextRef="#ctx0" brushRef="#br0" timeOffset="32412.05">4727 17233 0,'35'-35'78,"54"-53"-47,-54 70-31,-35 0 16,0 36 77</inkml:trace>
+  <inkml:trace contextRef="#ctx0" brushRef="#br0" timeOffset="32756.34">4868 17304 0,'18'0'31,"-18"17"-15,18-17-1,17 18 1,18 17 0,53 1-1,-18-1 1,-53-18-1</inkml:trace>
+  <inkml:trace contextRef="#ctx0" brushRef="#br0" timeOffset="36290.6">4392 15857 0,'35'-17'110,"-35"-1"-95,53-17 16,18 17-15,-18-17 0,-18 35-1,-17 0 1,-1-18 15,1 18-15,0 0-16,17-17 15,0-1 1,-17 18 15</inkml:trace>
+  <inkml:trace contextRef="#ctx0" brushRef="#br0" timeOffset="37506.08">4392 15893 0,'0'-18'94,"35"-35"-63,-35 35-31,18 1 16,0-18 0,-1 17-1,1 18 110,-18 35-93,0 53-1,0-35 0</inkml:trace>
+  <inkml:trace contextRef="#ctx0" brushRef="#br0" timeOffset="39867.21">4533 15928 0,'18'-18'31,"-1"18"1,19-17-1,-36-1 234,-18-17-202,18-36-16,-18 54-16,18-1 0,0 71 110,0 0-125,0-71 93,-17-52-78,17 52 0,0 0 48,0 1-64,0-1 16,0 0 1,0 1-1,0-1-15,0 36 171,0 35-171,-18-18-1,18 0 1,-17-17 0,17-1 15,-18 1-31,18 0 31,-18-18-31,18 17 16,0 19-1,-17-36 1,17 17 46</inkml:trace>
+  <inkml:trace contextRef="#ctx0" brushRef="#br0" timeOffset="44865.37">2064 8414 0,'-18'0'141,"-35"0"-125,-211-53-1,-1 18 1,36-1-1,141 36 1,88-17 0,0 70 281,0-1-282,0 54 16,0 35-15,0-88 0,0 0-1,0-35 1,0 17 0,0 36-1,0 35 1,-18 17-1,0 53 1,1-34 0,-1 34-1,18-106-15,0 89 16,0-53 0,-18 35-1,1 106 32,17-159-31,0 18-1,0-18 1,0 1 0,0-1-1,0-35-15,0 0 16,0 17-16,0 1 15,0 229 1,0-89 0,0-70-1,17 0 1,-17 36 0,0 17-1,0 17 16,0 19-15,0-19 0,0-16-1,0 16 1,0-105-16,0-18 16,0 18-16,0 17 15,-17 213 1,-1-142-1,0-53 1,1 18 0,-1-36-1,0 18 1,18-17 0,-17 17-1,-1-18 16,18-88-31,0 18 16,-17 36 0,17-54-16,0 71 15,-18 0 1,18-36 0,0 1-1,0-1 1,0 1-1,0-18 1,0 35 0,0 0-1,18 0 1,-1-35-16,1 0 16,-18 0-16,17 0 15,19 106 16,-36-54-15,17 1 0,19 18-1,-19-18 1,-17-1 0,18-16-1,0-19 1,-1 1-1,-17-18-15,18-36 16,-18 19-16,18-19 16,-18 18-16,0-17 31,17-18 31,-17 18-46,0-1 0,0 1 15,18 0-15,-18-1-1,0 1 1,0 0-1,17-18 204,36 0-203,124 0-1,70 0 1,17 0 0,-87 17-1,-124-17 1,-36 0 0</inkml:trace>
+</inkml:ink>
+</file>
+
+<file path=ppt/ink/ink9.xml><?xml version="1.0" encoding="utf-8"?>
+<inkml:ink xmlns:inkml="http://www.w3.org/2003/InkML">
+  <inkml:definitions>
+    <inkml:context xml:id="ctx0">
+      <inkml:inkSource xml:id="inkSrc0">
+        <inkml:traceFormat>
+          <inkml:channel name="X" type="integer" min="-749" max="3091" units="cm"/>
+          <inkml:channel name="Y" type="integer" min="-1085" max="1664" units="cm"/>
+          <inkml:channel name="T" type="integer" max="2.14748E9" units="dev"/>
+        </inkml:traceFormat>
+        <inkml:channelProperties>
+          <inkml:channelProperty channel="X" name="resolution" value="121.13564" units="1/cm"/>
+          <inkml:channelProperty channel="Y" name="resolution" value="130.28436" units="1/cm"/>
+          <inkml:channelProperty channel="T" name="resolution" value="1" units="1/dev"/>
+        </inkml:channelProperties>
+      </inkml:inkSource>
+      <inkml:timestamp xml:id="ts0" timeString="2025-11-12T13:23:41.693"/>
+    </inkml:context>
+    <inkml:brush xml:id="br0">
+      <inkml:brushProperty name="width" value="0.05292" units="cm"/>
+      <inkml:brushProperty name="height" value="0.05292" units="cm"/>
+      <inkml:brushProperty name="color" value="#FF0000"/>
+    </inkml:brush>
+  </inkml:definitions>
+  <inkml:trace contextRef="#ctx0" brushRef="#br0">8326 7990 0,'35'0'171,"88"0"-155,-52 0-16,-1 0 16,142 0-1,-106 0-15,35 0 16,-70 0 0,-54 0-1,-34-17 548,17-1-532,-18 18-15,0 0 77,-70-35-61,70 35-1,36 0 344,53 35-360,-1 0 1,-17-35 0,-35 18-1,-1 0 1,-17-1 156,-17-17-141,-1 18-15,1-18-1,-1 18 1,0-1 0,-17 1 62,0 0-63,17-18 1,0 17 0</inkml:trace>
+  <inkml:trace contextRef="#ctx0" brushRef="#br0" timeOffset="3518.63">8520 8908 0,'88'0'156,"141"0"-140,-88 0 0,0 17-16,124-17 31,-177 0-31,-35 0 15,0 0 1,-71 0 422,-88-35-423,71 0 16,-35-18-15,-1 18 0,36 17-16,17 18 15,-17 0 1,17 0 0,36 0 140,0 0-125,17 18-15,0-18-16,18 17 15,18 1 1,-19 17 0,-34-35-1,-18 18 1,-18 35 203,-17-18-204,18 0 1,17-17 203,0 17-204,0-17 1,0-1-1,0 1 17,0 0 171,-36 17-188,19-35 17,17 18-17,-18-18 1,0 0 0,1 0 374,17-36-374,0 1-1,0 0 1,0-1 0,0 19-1,0-1-15,17-17 16,-17 0 0,0 17-1,18-17 16,-18-1-15,18 19 0,-18-1-1,0 1 1,17 17 93</inkml:trace>
+  <inkml:trace contextRef="#ctx0" brushRef="#br0" timeOffset="8738.71">8749 10566 0,'-18'0'15,"1"0"1,87-71 109,54 18-109,17-35-1,18 17 1,-107 36 0,1 0-1,-17 17 16,-19 1-15,1-1 0,0 18-1,-36 0 329,-70 0-328,52 0-1,1 0 1,53-18 218,35 1-218,-18 17 0,-17 0-1,-18 35 266,0 0-265,-18-17 0,18 17-16,0-17 15,0-1-15,0 1 16,-18-18-16</inkml:trace>
+  <inkml:trace contextRef="#ctx0" brushRef="#br0" timeOffset="16302.48">8079 11377 0,'17'0'204,"265"-70"-173,-193 52-16,69-17 1,-122 17 0,-19 18-1,-17-18 17,18 1-17,17-1 1,1 0-1,-19 1 1,18-1 0,-17 0-16,0 1 15,17-1 1,-35 1 46,-18 17 392,-52 0-439,-18 0 1,35 0 15,17 0-31,1 0 16,17 0-1,1 0 1,70 0 109,88-18-109,-53 0-16,-35 18 15,106-17 16,-124 17-15,-35 70 78,0-52-79,-18 35 1,1-18 0,17-17 31</inkml:trace>
+  <inkml:trace contextRef="#ctx0" brushRef="#br0" timeOffset="20725.03">14728 10037 0,'0'17'94,"-52"18"-78,-1 1-1,17-19 1,1 1 0,17 0-1,1-1 16,-36 19-15,18-1 0,-18-18-1,17 19 1,19-19 0,-1-17-1,1 0 188,17-35-171,0-35-1,17 34-16,-17 19 1,18 17 140,-18 17-124,0 36-17,0-35 1,0 35-16,0-36 31,0 1 16,53-18 703,-36 0-734,1 0-1,-18-18 1,18 18 46,-18-17 485,0-1-531,-36-17-1,36 17 1</inkml:trace>
+  <inkml:trace contextRef="#ctx0" brushRef="#br0" timeOffset="29658.13">8273 12771 0,'0'-18'78,"247"-88"-47,35 0 0,-194 71 0,-70 17-15,17 1 0,0-19-1,-17 19 1,17-1 0,0-17-1,1 17 1,-1 1-1,-17-1-15,-1 0 16,36 1 0,0-19-1,-18 1 1,1 17 0,-19 1 15,19-1-16,-1 1 1,-70 17 218,-18 0-202,-53 0-17,71 0 1,-1 0 0,36-18 124,53 0-109,-18 1-15,-17 17 0,0 0-1,-1 0 1,1 17 0,0 1-1,-18 0 1,17-1-1,-17 1 1,0-1 0,18-17-16,-18 18 31,0 0-15,0-1 155,0 1-155,0 17 0,0-17-1</inkml:trace>
+  <inkml:trace contextRef="#ctx0" brushRef="#br0" timeOffset="34671.58">6773 14393 0,'0'0'0,"71"-17"31,35 17-15,-36 0-16,54-18 15,-18-17 1,-36 17-1,-17-17 1,18 17 0,-1-17-1,1 0 1,52-36 0,-35 36-1,-17 0 16,0-1-15,-1 1 0,-35 0-16,18-1 15,35 1 1,-35-18 0,0 18-1,18 0 1,17-1-1,35-17 1,-17-17 0,-17 52-1,-19-17 1,-35 17-16,-17 18 16,0-17 15,-1 17-31,19-18 15,16-17 1,-34 35 0,0-18-1,-1 18 1,36-35 0,0 0-1,35 17 1,-17-17-1,35-1 1,-71 36-16,0-17 16,1 17-1,-107 0 376,36 0-375,0 0-1,-1 0 1,19 0 15,-1 0 94,-35 0-94,0 0 1,36 0-1,-1 0 0,0 0 0,18 17 47,18-17 110,123-17-157,-18-18 0,-70 35-15,-17 0 0,-19 0 62,-17 70 16,-17-17-79,-1-18 16,18-17-15,-18 17 0,18-17-1,0-1-15</inkml:trace>
+  <inkml:trace contextRef="#ctx0" brushRef="#br0" timeOffset="50327.84">23918 10125 0,'-35'35'109,"0"0"-93,17-35-16,-35 36 15,18-1 1,17 0-16,-17-35 16,35 18-1,-18-18-15,1 17 31,-1 1-15,0 0 0,18-1-1,-17 1 1,-1 0 0,-35-1-1,18 19 1,-18-1-1,35-18 1,1-17 281,17-52-266,17 34-31,1-53 31,0 36-15,-1 0 0,-17 17-1,18 0 1,0 18 78,-18 36-47,-18 17-16,18-18-16,-35 0 1,35-17-16,0 0 16,-18 17-1,18-18 79,0 1-78,18-36 187,35 1-188,0-1 1,-18 1 0,-18-1-16,1 18 15</inkml:trace>
+  <inkml:trace contextRef="#ctx0" brushRef="#br0" timeOffset="53951.74">8978 14852 0,'35'-18'140,"54"-17"-124,-1 17 0,0 18-1,0-35 1,-35 35 0,18-18-1,-1 1 1,1-1-1,-36 1 1,-17 17 0,17 0-1,-17-18-15,17 18 16,-17-18 0,-18 1 171,17 17-171,-52-18 31,-71 0-16,53 18-16,-17-17 1,17 17 0,17 0-1,19 0 1,52-18 46,141 18-30,-34 0-1,-90 0 0,-52 18-31,36-1 31,-36 1-15,0 17-16,0-17 16,-18 35-1,0-53 1,18 17 0</inkml:trace>
+  <inkml:trace contextRef="#ctx0" brushRef="#br0" timeOffset="56944.2">9296 16863 0,'0'0'0,"106"0"16,-36 0-1,-17 0 1,0-18 0,-35 1-1,34 17-15,37-53 16,-54 35 15,18 0-15,0-17-1,-18 35 1,-17-18 0,17 18-1,-35-17 1,18 17-1,-1-18 1,19 0 0,-36 1 156,-159-54-141,106 71-16,0-17-15,0 17 16,18 0 0,17-18-1,0 18 48,1 0-32,17 18-15,35-18 62,18 17-63,0-17 1,35 0 0,-35 36-1,-18-36 1,-35 17 0,18-17 30,-18 18-30,18-18 0,-1 17-1,1-17 1,-18 18 109,0 17-109,-18-17-1,1 53 16,17-54-15,0 1 0,-18 0 15,18-1-15,0 1-1,-18-1 1,18 1-1,0 0 1,0-36 218,0 0-218,0-17 0,0 18-1,0-19 1,0 19 0,0-1 30,0-17-30,0 17 0,0 0 15,0 1-15,-17-19-1,17 19 1,0-1-1,0 1 1,0-1 62,0 0-47,0 1 1</inkml:trace>
 </inkml:ink>
 </file>
 
@@ -372,7 +1103,7 @@
           <a:p>
             <a:fld id="{E8D4F193-0B1A-45D5-B227-EC4FDC03B008}" type="datetimeFigureOut">
               <a:rPr lang="en-IE" smtClean="0"/>
-              <a:t>13/11/2024</a:t>
+              <a:t>12/11/2025</a:t>
             </a:fld>
             <a:endParaRPr lang="en-IE"/>
           </a:p>
@@ -873,7 +1604,7 @@
           <a:p>
             <a:fld id="{31FABD58-09F1-4112-9FB1-2CAFF72B0B57}" type="datetimeFigureOut">
               <a:rPr lang="en-IE" smtClean="0"/>
-              <a:t>13/11/2024</a:t>
+              <a:t>12/11/2025</a:t>
             </a:fld>
             <a:endParaRPr lang="en-IE"/>
           </a:p>
@@ -1073,7 +1804,7 @@
           <a:p>
             <a:fld id="{31FABD58-09F1-4112-9FB1-2CAFF72B0B57}" type="datetimeFigureOut">
               <a:rPr lang="en-IE" smtClean="0"/>
-              <a:t>13/11/2024</a:t>
+              <a:t>12/11/2025</a:t>
             </a:fld>
             <a:endParaRPr lang="en-IE"/>
           </a:p>
@@ -1283,7 +2014,7 @@
           <a:p>
             <a:fld id="{31FABD58-09F1-4112-9FB1-2CAFF72B0B57}" type="datetimeFigureOut">
               <a:rPr lang="en-IE" smtClean="0"/>
-              <a:t>13/11/2024</a:t>
+              <a:t>12/11/2025</a:t>
             </a:fld>
             <a:endParaRPr lang="en-IE"/>
           </a:p>
@@ -1483,7 +2214,7 @@
           <a:p>
             <a:fld id="{31FABD58-09F1-4112-9FB1-2CAFF72B0B57}" type="datetimeFigureOut">
               <a:rPr lang="en-IE" smtClean="0"/>
-              <a:t>13/11/2024</a:t>
+              <a:t>12/11/2025</a:t>
             </a:fld>
             <a:endParaRPr lang="en-IE"/>
           </a:p>
@@ -1759,7 +2490,7 @@
           <a:p>
             <a:fld id="{31FABD58-09F1-4112-9FB1-2CAFF72B0B57}" type="datetimeFigureOut">
               <a:rPr lang="en-IE" smtClean="0"/>
-              <a:t>13/11/2024</a:t>
+              <a:t>12/11/2025</a:t>
             </a:fld>
             <a:endParaRPr lang="en-IE"/>
           </a:p>
@@ -2027,7 +2758,7 @@
           <a:p>
             <a:fld id="{31FABD58-09F1-4112-9FB1-2CAFF72B0B57}" type="datetimeFigureOut">
               <a:rPr lang="en-IE" smtClean="0"/>
-              <a:t>13/11/2024</a:t>
+              <a:t>12/11/2025</a:t>
             </a:fld>
             <a:endParaRPr lang="en-IE"/>
           </a:p>
@@ -2442,7 +3173,7 @@
           <a:p>
             <a:fld id="{31FABD58-09F1-4112-9FB1-2CAFF72B0B57}" type="datetimeFigureOut">
               <a:rPr lang="en-IE" smtClean="0"/>
-              <a:t>13/11/2024</a:t>
+              <a:t>12/11/2025</a:t>
             </a:fld>
             <a:endParaRPr lang="en-IE"/>
           </a:p>
@@ -2584,7 +3315,7 @@
           <a:p>
             <a:fld id="{31FABD58-09F1-4112-9FB1-2CAFF72B0B57}" type="datetimeFigureOut">
               <a:rPr lang="en-IE" smtClean="0"/>
-              <a:t>13/11/2024</a:t>
+              <a:t>12/11/2025</a:t>
             </a:fld>
             <a:endParaRPr lang="en-IE"/>
           </a:p>
@@ -2697,7 +3428,7 @@
           <a:p>
             <a:fld id="{31FABD58-09F1-4112-9FB1-2CAFF72B0B57}" type="datetimeFigureOut">
               <a:rPr lang="en-IE" smtClean="0"/>
-              <a:t>13/11/2024</a:t>
+              <a:t>12/11/2025</a:t>
             </a:fld>
             <a:endParaRPr lang="en-IE"/>
           </a:p>
@@ -3010,7 +3741,7 @@
           <a:p>
             <a:fld id="{31FABD58-09F1-4112-9FB1-2CAFF72B0B57}" type="datetimeFigureOut">
               <a:rPr lang="en-IE" smtClean="0"/>
-              <a:t>13/11/2024</a:t>
+              <a:t>12/11/2025</a:t>
             </a:fld>
             <a:endParaRPr lang="en-IE"/>
           </a:p>
@@ -3299,7 +4030,7 @@
           <a:p>
             <a:fld id="{31FABD58-09F1-4112-9FB1-2CAFF72B0B57}" type="datetimeFigureOut">
               <a:rPr lang="en-IE" smtClean="0"/>
-              <a:t>13/11/2024</a:t>
+              <a:t>12/11/2025</a:t>
             </a:fld>
             <a:endParaRPr lang="en-IE"/>
           </a:p>
@@ -3542,7 +4273,7 @@
           <a:p>
             <a:fld id="{31FABD58-09F1-4112-9FB1-2CAFF72B0B57}" type="datetimeFigureOut">
               <a:rPr lang="en-IE" smtClean="0"/>
-              <a:t>13/11/2024</a:t>
+              <a:t>12/11/2025</a:t>
             </a:fld>
             <a:endParaRPr lang="en-IE"/>
           </a:p>
@@ -4938,6 +5669,57 @@
           </a:prstGeom>
         </p:spPr>
       </p:pic>
+      <mc:AlternateContent xmlns:mc="http://schemas.openxmlformats.org/markup-compatibility/2006">
+        <mc:Choice xmlns:p14="http://schemas.microsoft.com/office/powerpoint/2010/main" Requires="p14">
+          <p:contentPart p14:bwMode="auto" r:id="rId3">
+            <p14:nvContentPartPr>
+              <p14:cNvPr id="4" name="Ink 3">
+                <a:extLst>
+                  <a:ext uri="{FF2B5EF4-FFF2-40B4-BE49-F238E27FC236}">
+                    <a16:creationId xmlns:a16="http://schemas.microsoft.com/office/drawing/2014/main" id="{4A67895E-EF67-1A00-6442-19554E8F96F2}"/>
+                  </a:ext>
+                </a:extLst>
+              </p14:cNvPr>
+              <p14:cNvContentPartPr/>
+              <p14:nvPr/>
+            </p14:nvContentPartPr>
+            <p14:xfrm>
+              <a:off x="317520" y="2978280"/>
+              <a:ext cx="1644840" cy="3365640"/>
+            </p14:xfrm>
+          </p:contentPart>
+        </mc:Choice>
+        <mc:Fallback>
+          <p:pic>
+            <p:nvPicPr>
+              <p:cNvPr id="4" name="Ink 3">
+                <a:extLst>
+                  <a:ext uri="{FF2B5EF4-FFF2-40B4-BE49-F238E27FC236}">
+                    <a16:creationId xmlns:a16="http://schemas.microsoft.com/office/drawing/2014/main" id="{4A67895E-EF67-1A00-6442-19554E8F96F2}"/>
+                  </a:ext>
+                </a:extLst>
+              </p:cNvPr>
+              <p:cNvPicPr/>
+              <p:nvPr/>
+            </p:nvPicPr>
+            <p:blipFill>
+              <a:blip r:embed="rId4"/>
+              <a:stretch>
+                <a:fillRect/>
+              </a:stretch>
+            </p:blipFill>
+            <p:spPr>
+              <a:xfrm>
+                <a:off x="308160" y="2968920"/>
+                <a:ext cx="1663560" cy="3384360"/>
+              </a:xfrm>
+              <a:prstGeom prst="rect">
+                <a:avLst/>
+              </a:prstGeom>
+            </p:spPr>
+          </p:pic>
+        </mc:Fallback>
+      </mc:AlternateContent>
     </p:spTree>
     <p:extLst>
       <p:ext uri="{BB962C8B-B14F-4D97-AF65-F5344CB8AC3E}">
@@ -5025,6 +5807,57 @@
           </a:xfrm>
         </p:spPr>
       </p:pic>
+      <mc:AlternateContent xmlns:mc="http://schemas.openxmlformats.org/markup-compatibility/2006">
+        <mc:Choice xmlns:p14="http://schemas.microsoft.com/office/powerpoint/2010/main" Requires="p14">
+          <p:contentPart p14:bwMode="auto" r:id="rId3">
+            <p14:nvContentPartPr>
+              <p14:cNvPr id="3" name="Ink 2">
+                <a:extLst>
+                  <a:ext uri="{FF2B5EF4-FFF2-40B4-BE49-F238E27FC236}">
+                    <a16:creationId xmlns:a16="http://schemas.microsoft.com/office/drawing/2014/main" id="{2BBA9D0F-F97C-CD68-B2F5-916A17CE0D44}"/>
+                  </a:ext>
+                </a:extLst>
+              </p14:cNvPr>
+              <p14:cNvContentPartPr/>
+              <p14:nvPr/>
+            </p14:nvContentPartPr>
+            <p14:xfrm>
+              <a:off x="2438280" y="2851200"/>
+              <a:ext cx="6172560" cy="3238920"/>
+            </p14:xfrm>
+          </p:contentPart>
+        </mc:Choice>
+        <mc:Fallback>
+          <p:pic>
+            <p:nvPicPr>
+              <p:cNvPr id="3" name="Ink 2">
+                <a:extLst>
+                  <a:ext uri="{FF2B5EF4-FFF2-40B4-BE49-F238E27FC236}">
+                    <a16:creationId xmlns:a16="http://schemas.microsoft.com/office/drawing/2014/main" id="{2BBA9D0F-F97C-CD68-B2F5-916A17CE0D44}"/>
+                  </a:ext>
+                </a:extLst>
+              </p:cNvPr>
+              <p:cNvPicPr/>
+              <p:nvPr/>
+            </p:nvPicPr>
+            <p:blipFill>
+              <a:blip r:embed="rId4"/>
+              <a:stretch>
+                <a:fillRect/>
+              </a:stretch>
+            </p:blipFill>
+            <p:spPr>
+              <a:xfrm>
+                <a:off x="2428920" y="2841840"/>
+                <a:ext cx="6191280" cy="3257640"/>
+              </a:xfrm>
+              <a:prstGeom prst="rect">
+                <a:avLst/>
+              </a:prstGeom>
+            </p:spPr>
+          </p:pic>
+        </mc:Fallback>
+      </mc:AlternateContent>
     </p:spTree>
     <p:extLst>
       <p:ext uri="{BB962C8B-B14F-4D97-AF65-F5344CB8AC3E}">
@@ -5136,6 +5969,57 @@
           </a:extLst>
         </p:spPr>
       </p:pic>
+      <mc:AlternateContent xmlns:mc="http://schemas.openxmlformats.org/markup-compatibility/2006">
+        <mc:Choice xmlns:p14="http://schemas.microsoft.com/office/powerpoint/2010/main" Requires="p14">
+          <p:contentPart p14:bwMode="auto" r:id="rId3">
+            <p14:nvContentPartPr>
+              <p14:cNvPr id="3" name="Ink 2">
+                <a:extLst>
+                  <a:ext uri="{FF2B5EF4-FFF2-40B4-BE49-F238E27FC236}">
+                    <a16:creationId xmlns:a16="http://schemas.microsoft.com/office/drawing/2014/main" id="{A4BECE9D-1F4A-FCD8-B00B-A98B099B9F00}"/>
+                  </a:ext>
+                </a:extLst>
+              </p14:cNvPr>
+              <p14:cNvContentPartPr/>
+              <p14:nvPr/>
+            </p14:nvContentPartPr>
+            <p14:xfrm>
+              <a:off x="1727280" y="1790640"/>
+              <a:ext cx="6293160" cy="3988080"/>
+            </p14:xfrm>
+          </p:contentPart>
+        </mc:Choice>
+        <mc:Fallback>
+          <p:pic>
+            <p:nvPicPr>
+              <p:cNvPr id="3" name="Ink 2">
+                <a:extLst>
+                  <a:ext uri="{FF2B5EF4-FFF2-40B4-BE49-F238E27FC236}">
+                    <a16:creationId xmlns:a16="http://schemas.microsoft.com/office/drawing/2014/main" id="{A4BECE9D-1F4A-FCD8-B00B-A98B099B9F00}"/>
+                  </a:ext>
+                </a:extLst>
+              </p:cNvPr>
+              <p:cNvPicPr/>
+              <p:nvPr/>
+            </p:nvPicPr>
+            <p:blipFill>
+              <a:blip r:embed="rId4"/>
+              <a:stretch>
+                <a:fillRect/>
+              </a:stretch>
+            </p:blipFill>
+            <p:spPr>
+              <a:xfrm>
+                <a:off x="1717920" y="1781280"/>
+                <a:ext cx="6311880" cy="4006800"/>
+              </a:xfrm>
+              <a:prstGeom prst="rect">
+                <a:avLst/>
+              </a:prstGeom>
+            </p:spPr>
+          </p:pic>
+        </mc:Fallback>
+      </mc:AlternateContent>
     </p:spTree>
     <p:extLst>
       <p:ext uri="{BB962C8B-B14F-4D97-AF65-F5344CB8AC3E}">
@@ -5286,6 +6170,57 @@
           </a:p>
         </p:txBody>
       </p:sp>
+      <mc:AlternateContent xmlns:mc="http://schemas.openxmlformats.org/markup-compatibility/2006">
+        <mc:Choice xmlns:p14="http://schemas.microsoft.com/office/powerpoint/2010/main" Requires="p14">
+          <p:contentPart p14:bwMode="auto" r:id="rId2">
+            <p14:nvContentPartPr>
+              <p14:cNvPr id="4" name="Ink 3">
+                <a:extLst>
+                  <a:ext uri="{FF2B5EF4-FFF2-40B4-BE49-F238E27FC236}">
+                    <a16:creationId xmlns:a16="http://schemas.microsoft.com/office/drawing/2014/main" id="{B202EEF4-FBF6-C318-FCD8-14EA70B06F2E}"/>
+                  </a:ext>
+                </a:extLst>
+              </p14:cNvPr>
+              <p14:cNvContentPartPr/>
+              <p14:nvPr/>
+            </p14:nvContentPartPr>
+            <p14:xfrm>
+              <a:off x="888840" y="2470320"/>
+              <a:ext cx="9760320" cy="3232440"/>
+            </p14:xfrm>
+          </p:contentPart>
+        </mc:Choice>
+        <mc:Fallback>
+          <p:pic>
+            <p:nvPicPr>
+              <p:cNvPr id="4" name="Ink 3">
+                <a:extLst>
+                  <a:ext uri="{FF2B5EF4-FFF2-40B4-BE49-F238E27FC236}">
+                    <a16:creationId xmlns:a16="http://schemas.microsoft.com/office/drawing/2014/main" id="{B202EEF4-FBF6-C318-FCD8-14EA70B06F2E}"/>
+                  </a:ext>
+                </a:extLst>
+              </p:cNvPr>
+              <p:cNvPicPr/>
+              <p:nvPr/>
+            </p:nvPicPr>
+            <p:blipFill>
+              <a:blip r:embed="rId3"/>
+              <a:stretch>
+                <a:fillRect/>
+              </a:stretch>
+            </p:blipFill>
+            <p:spPr>
+              <a:xfrm>
+                <a:off x="879480" y="2460960"/>
+                <a:ext cx="9779040" cy="3251160"/>
+              </a:xfrm>
+              <a:prstGeom prst="rect">
+                <a:avLst/>
+              </a:prstGeom>
+            </p:spPr>
+          </p:pic>
+        </mc:Fallback>
+      </mc:AlternateContent>
     </p:spTree>
     <p:extLst>
       <p:ext uri="{BB962C8B-B14F-4D97-AF65-F5344CB8AC3E}">
@@ -5396,6 +6331,57 @@
           </a:prstGeom>
         </p:spPr>
       </p:pic>
+      <mc:AlternateContent xmlns:mc="http://schemas.openxmlformats.org/markup-compatibility/2006">
+        <mc:Choice xmlns:p14="http://schemas.microsoft.com/office/powerpoint/2010/main" Requires="p14">
+          <p:contentPart p14:bwMode="auto" r:id="rId3">
+            <p14:nvContentPartPr>
+              <p14:cNvPr id="4" name="Ink 3">
+                <a:extLst>
+                  <a:ext uri="{FF2B5EF4-FFF2-40B4-BE49-F238E27FC236}">
+                    <a16:creationId xmlns:a16="http://schemas.microsoft.com/office/drawing/2014/main" id="{411ED06E-DB8C-720E-37B5-557C4F5E1CB0}"/>
+                  </a:ext>
+                </a:extLst>
+              </p14:cNvPr>
+              <p14:cNvContentPartPr/>
+              <p14:nvPr/>
+            </p14:nvContentPartPr>
+            <p14:xfrm>
+              <a:off x="3079800" y="2095560"/>
+              <a:ext cx="7404480" cy="3892680"/>
+            </p14:xfrm>
+          </p:contentPart>
+        </mc:Choice>
+        <mc:Fallback>
+          <p:pic>
+            <p:nvPicPr>
+              <p:cNvPr id="4" name="Ink 3">
+                <a:extLst>
+                  <a:ext uri="{FF2B5EF4-FFF2-40B4-BE49-F238E27FC236}">
+                    <a16:creationId xmlns:a16="http://schemas.microsoft.com/office/drawing/2014/main" id="{411ED06E-DB8C-720E-37B5-557C4F5E1CB0}"/>
+                  </a:ext>
+                </a:extLst>
+              </p:cNvPr>
+              <p:cNvPicPr/>
+              <p:nvPr/>
+            </p:nvPicPr>
+            <p:blipFill>
+              <a:blip r:embed="rId4"/>
+              <a:stretch>
+                <a:fillRect/>
+              </a:stretch>
+            </p:blipFill>
+            <p:spPr>
+              <a:xfrm>
+                <a:off x="3070440" y="2086200"/>
+                <a:ext cx="7423200" cy="3911400"/>
+              </a:xfrm>
+              <a:prstGeom prst="rect">
+                <a:avLst/>
+              </a:prstGeom>
+            </p:spPr>
+          </p:pic>
+        </mc:Fallback>
+      </mc:AlternateContent>
     </p:spTree>
     <p:extLst>
       <p:ext uri="{BB962C8B-B14F-4D97-AF65-F5344CB8AC3E}">
@@ -6150,6 +7136,57 @@
           </a:p>
         </p:txBody>
       </p:sp>
+      <mc:AlternateContent xmlns:mc="http://schemas.openxmlformats.org/markup-compatibility/2006">
+        <mc:Choice xmlns:p14="http://schemas.microsoft.com/office/powerpoint/2010/main" Requires="p14">
+          <p:contentPart p14:bwMode="auto" r:id="rId3">
+            <p14:nvContentPartPr>
+              <p14:cNvPr id="4" name="Ink 3">
+                <a:extLst>
+                  <a:ext uri="{FF2B5EF4-FFF2-40B4-BE49-F238E27FC236}">
+                    <a16:creationId xmlns:a16="http://schemas.microsoft.com/office/drawing/2014/main" id="{6B3CED8B-DEFF-AD17-B308-DF95F76589D7}"/>
+                  </a:ext>
+                </a:extLst>
+              </p14:cNvPr>
+              <p14:cNvContentPartPr/>
+              <p14:nvPr/>
+            </p14:nvContentPartPr>
+            <p14:xfrm>
+              <a:off x="2317680" y="2755800"/>
+              <a:ext cx="8020440" cy="2889720"/>
+            </p14:xfrm>
+          </p:contentPart>
+        </mc:Choice>
+        <mc:Fallback>
+          <p:pic>
+            <p:nvPicPr>
+              <p:cNvPr id="4" name="Ink 3">
+                <a:extLst>
+                  <a:ext uri="{FF2B5EF4-FFF2-40B4-BE49-F238E27FC236}">
+                    <a16:creationId xmlns:a16="http://schemas.microsoft.com/office/drawing/2014/main" id="{6B3CED8B-DEFF-AD17-B308-DF95F76589D7}"/>
+                  </a:ext>
+                </a:extLst>
+              </p:cNvPr>
+              <p:cNvPicPr/>
+              <p:nvPr/>
+            </p:nvPicPr>
+            <p:blipFill>
+              <a:blip r:embed="rId4"/>
+              <a:stretch>
+                <a:fillRect/>
+              </a:stretch>
+            </p:blipFill>
+            <p:spPr>
+              <a:xfrm>
+                <a:off x="2308320" y="2746440"/>
+                <a:ext cx="8039160" cy="2908440"/>
+              </a:xfrm>
+              <a:prstGeom prst="rect">
+                <a:avLst/>
+              </a:prstGeom>
+            </p:spPr>
+          </p:pic>
+        </mc:Fallback>
+      </mc:AlternateContent>
     </p:spTree>
     <p:extLst>
       <p:ext uri="{BB962C8B-B14F-4D97-AF65-F5344CB8AC3E}">
@@ -6359,6 +7396,57 @@
           </a:p>
         </p:txBody>
       </p:sp>
+      <mc:AlternateContent xmlns:mc="http://schemas.openxmlformats.org/markup-compatibility/2006">
+        <mc:Choice xmlns:p14="http://schemas.microsoft.com/office/powerpoint/2010/main" Requires="p14">
+          <p:contentPart p14:bwMode="auto" r:id="rId3">
+            <p14:nvContentPartPr>
+              <p14:cNvPr id="5" name="Ink 4">
+                <a:extLst>
+                  <a:ext uri="{FF2B5EF4-FFF2-40B4-BE49-F238E27FC236}">
+                    <a16:creationId xmlns:a16="http://schemas.microsoft.com/office/drawing/2014/main" id="{E235B6A0-1396-8EE2-32CF-0D19E15EB705}"/>
+                  </a:ext>
+                </a:extLst>
+              </p14:cNvPr>
+              <p14:cNvContentPartPr/>
+              <p14:nvPr/>
+            </p14:nvContentPartPr>
+            <p14:xfrm>
+              <a:off x="1542960" y="3263760"/>
+              <a:ext cx="9214200" cy="2400840"/>
+            </p14:xfrm>
+          </p:contentPart>
+        </mc:Choice>
+        <mc:Fallback>
+          <p:pic>
+            <p:nvPicPr>
+              <p:cNvPr id="5" name="Ink 4">
+                <a:extLst>
+                  <a:ext uri="{FF2B5EF4-FFF2-40B4-BE49-F238E27FC236}">
+                    <a16:creationId xmlns:a16="http://schemas.microsoft.com/office/drawing/2014/main" id="{E235B6A0-1396-8EE2-32CF-0D19E15EB705}"/>
+                  </a:ext>
+                </a:extLst>
+              </p:cNvPr>
+              <p:cNvPicPr/>
+              <p:nvPr/>
+            </p:nvPicPr>
+            <p:blipFill>
+              <a:blip r:embed="rId4"/>
+              <a:stretch>
+                <a:fillRect/>
+              </a:stretch>
+            </p:blipFill>
+            <p:spPr>
+              <a:xfrm>
+                <a:off x="1533600" y="3254400"/>
+                <a:ext cx="9232920" cy="2419560"/>
+              </a:xfrm>
+              <a:prstGeom prst="rect">
+                <a:avLst/>
+              </a:prstGeom>
+            </p:spPr>
+          </p:pic>
+        </mc:Fallback>
+      </mc:AlternateContent>
     </p:spTree>
     <p:extLst>
       <p:ext uri="{BB962C8B-B14F-4D97-AF65-F5344CB8AC3E}">
@@ -6449,6 +7537,57 @@
           </a:prstGeom>
         </p:spPr>
       </p:pic>
+      <mc:AlternateContent xmlns:mc="http://schemas.openxmlformats.org/markup-compatibility/2006">
+        <mc:Choice xmlns:p14="http://schemas.microsoft.com/office/powerpoint/2010/main" Requires="p14">
+          <p:contentPart p14:bwMode="auto" r:id="rId3">
+            <p14:nvContentPartPr>
+              <p14:cNvPr id="3" name="Ink 2">
+                <a:extLst>
+                  <a:ext uri="{FF2B5EF4-FFF2-40B4-BE49-F238E27FC236}">
+                    <a16:creationId xmlns:a16="http://schemas.microsoft.com/office/drawing/2014/main" id="{4C51B4AB-0B91-7849-1014-4B673B7890C8}"/>
+                  </a:ext>
+                </a:extLst>
+              </p14:cNvPr>
+              <p14:cNvContentPartPr/>
+              <p14:nvPr/>
+            </p14:nvContentPartPr>
+            <p14:xfrm>
+              <a:off x="984240" y="2178000"/>
+              <a:ext cx="7677360" cy="2921400"/>
+            </p14:xfrm>
+          </p:contentPart>
+        </mc:Choice>
+        <mc:Fallback>
+          <p:pic>
+            <p:nvPicPr>
+              <p:cNvPr id="3" name="Ink 2">
+                <a:extLst>
+                  <a:ext uri="{FF2B5EF4-FFF2-40B4-BE49-F238E27FC236}">
+                    <a16:creationId xmlns:a16="http://schemas.microsoft.com/office/drawing/2014/main" id="{4C51B4AB-0B91-7849-1014-4B673B7890C8}"/>
+                  </a:ext>
+                </a:extLst>
+              </p:cNvPr>
+              <p:cNvPicPr/>
+              <p:nvPr/>
+            </p:nvPicPr>
+            <p:blipFill>
+              <a:blip r:embed="rId4"/>
+              <a:stretch>
+                <a:fillRect/>
+              </a:stretch>
+            </p:blipFill>
+            <p:spPr>
+              <a:xfrm>
+                <a:off x="974880" y="2168640"/>
+                <a:ext cx="7696080" cy="2940120"/>
+              </a:xfrm>
+              <a:prstGeom prst="rect">
+                <a:avLst/>
+              </a:prstGeom>
+            </p:spPr>
+          </p:pic>
+        </mc:Fallback>
+      </mc:AlternateContent>
     </p:spTree>
     <p:extLst>
       <p:ext uri="{BB962C8B-B14F-4D97-AF65-F5344CB8AC3E}">
@@ -6722,6 +7861,57 @@
           </a:extLst>
         </p:spPr>
       </p:pic>
+      <mc:AlternateContent xmlns:mc="http://schemas.openxmlformats.org/markup-compatibility/2006">
+        <mc:Choice xmlns:p14="http://schemas.microsoft.com/office/powerpoint/2010/main" Requires="p14">
+          <p:contentPart p14:bwMode="auto" r:id="rId4">
+            <p14:nvContentPartPr>
+              <p14:cNvPr id="5" name="Ink 4">
+                <a:extLst>
+                  <a:ext uri="{FF2B5EF4-FFF2-40B4-BE49-F238E27FC236}">
+                    <a16:creationId xmlns:a16="http://schemas.microsoft.com/office/drawing/2014/main" id="{CE7C2F8E-47A8-C1F0-F0A8-25349130EDF0}"/>
+                  </a:ext>
+                </a:extLst>
+              </p14:cNvPr>
+              <p14:cNvContentPartPr/>
+              <p14:nvPr/>
+            </p14:nvContentPartPr>
+            <p14:xfrm>
+              <a:off x="2787480" y="641520"/>
+              <a:ext cx="8598600" cy="3264120"/>
+            </p14:xfrm>
+          </p:contentPart>
+        </mc:Choice>
+        <mc:Fallback>
+          <p:pic>
+            <p:nvPicPr>
+              <p:cNvPr id="5" name="Ink 4">
+                <a:extLst>
+                  <a:ext uri="{FF2B5EF4-FFF2-40B4-BE49-F238E27FC236}">
+                    <a16:creationId xmlns:a16="http://schemas.microsoft.com/office/drawing/2014/main" id="{CE7C2F8E-47A8-C1F0-F0A8-25349130EDF0}"/>
+                  </a:ext>
+                </a:extLst>
+              </p:cNvPr>
+              <p:cNvPicPr/>
+              <p:nvPr/>
+            </p:nvPicPr>
+            <p:blipFill>
+              <a:blip r:embed="rId5"/>
+              <a:stretch>
+                <a:fillRect/>
+              </a:stretch>
+            </p:blipFill>
+            <p:spPr>
+              <a:xfrm>
+                <a:off x="2778120" y="632160"/>
+                <a:ext cx="8617320" cy="3282840"/>
+              </a:xfrm>
+              <a:prstGeom prst="rect">
+                <a:avLst/>
+              </a:prstGeom>
+            </p:spPr>
+          </p:pic>
+        </mc:Fallback>
+      </mc:AlternateContent>
     </p:spTree>
     <p:extLst>
       <p:ext uri="{BB962C8B-B14F-4D97-AF65-F5344CB8AC3E}">
@@ -7499,6 +8689,57 @@
           </a:p>
         </p:txBody>
       </p:sp>
+      <mc:AlternateContent xmlns:mc="http://schemas.openxmlformats.org/markup-compatibility/2006">
+        <mc:Choice xmlns:p14="http://schemas.microsoft.com/office/powerpoint/2010/main" Requires="p14">
+          <p:contentPart p14:bwMode="auto" r:id="rId2">
+            <p14:nvContentPartPr>
+              <p14:cNvPr id="13" name="Ink 12">
+                <a:extLst>
+                  <a:ext uri="{FF2B5EF4-FFF2-40B4-BE49-F238E27FC236}">
+                    <a16:creationId xmlns:a16="http://schemas.microsoft.com/office/drawing/2014/main" id="{D3581685-C4E3-B1F5-A663-E38F2C431EEE}"/>
+                  </a:ext>
+                </a:extLst>
+              </p14:cNvPr>
+              <p14:cNvContentPartPr/>
+              <p14:nvPr/>
+            </p14:nvContentPartPr>
+            <p14:xfrm>
+              <a:off x="1035000" y="787320"/>
+              <a:ext cx="10700280" cy="5042160"/>
+            </p14:xfrm>
+          </p:contentPart>
+        </mc:Choice>
+        <mc:Fallback>
+          <p:pic>
+            <p:nvPicPr>
+              <p:cNvPr id="13" name="Ink 12">
+                <a:extLst>
+                  <a:ext uri="{FF2B5EF4-FFF2-40B4-BE49-F238E27FC236}">
+                    <a16:creationId xmlns:a16="http://schemas.microsoft.com/office/drawing/2014/main" id="{D3581685-C4E3-B1F5-A663-E38F2C431EEE}"/>
+                  </a:ext>
+                </a:extLst>
+              </p:cNvPr>
+              <p:cNvPicPr/>
+              <p:nvPr/>
+            </p:nvPicPr>
+            <p:blipFill>
+              <a:blip r:embed="rId3"/>
+              <a:stretch>
+                <a:fillRect/>
+              </a:stretch>
+            </p:blipFill>
+            <p:spPr>
+              <a:xfrm>
+                <a:off x="1025640" y="777960"/>
+                <a:ext cx="10719000" cy="5060880"/>
+              </a:xfrm>
+              <a:prstGeom prst="rect">
+                <a:avLst/>
+              </a:prstGeom>
+            </p:spPr>
+          </p:pic>
+        </mc:Fallback>
+      </mc:AlternateContent>
     </p:spTree>
     <p:extLst>
       <p:ext uri="{BB962C8B-B14F-4D97-AF65-F5344CB8AC3E}">
@@ -10242,6 +11483,57 @@
           </a:p>
         </p:txBody>
       </p:sp>
+      <mc:AlternateContent xmlns:mc="http://schemas.openxmlformats.org/markup-compatibility/2006">
+        <mc:Choice xmlns:p14="http://schemas.microsoft.com/office/powerpoint/2010/main" Requires="p14">
+          <p:contentPart p14:bwMode="auto" r:id="rId3">
+            <p14:nvContentPartPr>
+              <p14:cNvPr id="4" name="Ink 3">
+                <a:extLst>
+                  <a:ext uri="{FF2B5EF4-FFF2-40B4-BE49-F238E27FC236}">
+                    <a16:creationId xmlns:a16="http://schemas.microsoft.com/office/drawing/2014/main" id="{961AC570-E787-91D5-63F6-224587E85124}"/>
+                  </a:ext>
+                </a:extLst>
+              </p14:cNvPr>
+              <p14:cNvContentPartPr/>
+              <p14:nvPr/>
+            </p14:nvContentPartPr>
+            <p14:xfrm>
+              <a:off x="1168560" y="793800"/>
+              <a:ext cx="9709200" cy="5404320"/>
+            </p14:xfrm>
+          </p:contentPart>
+        </mc:Choice>
+        <mc:Fallback>
+          <p:pic>
+            <p:nvPicPr>
+              <p:cNvPr id="4" name="Ink 3">
+                <a:extLst>
+                  <a:ext uri="{FF2B5EF4-FFF2-40B4-BE49-F238E27FC236}">
+                    <a16:creationId xmlns:a16="http://schemas.microsoft.com/office/drawing/2014/main" id="{961AC570-E787-91D5-63F6-224587E85124}"/>
+                  </a:ext>
+                </a:extLst>
+              </p:cNvPr>
+              <p:cNvPicPr/>
+              <p:nvPr/>
+            </p:nvPicPr>
+            <p:blipFill>
+              <a:blip r:embed="rId4"/>
+              <a:stretch>
+                <a:fillRect/>
+              </a:stretch>
+            </p:blipFill>
+            <p:spPr>
+              <a:xfrm>
+                <a:off x="1159200" y="784440"/>
+                <a:ext cx="9727920" cy="5423040"/>
+              </a:xfrm>
+              <a:prstGeom prst="rect">
+                <a:avLst/>
+              </a:prstGeom>
+            </p:spPr>
+          </p:pic>
+        </mc:Fallback>
+      </mc:AlternateContent>
     </p:spTree>
     <p:extLst>
       <p:ext uri="{BB962C8B-B14F-4D97-AF65-F5344CB8AC3E}">
@@ -10514,6 +11806,57 @@
           </a:p>
         </p:txBody>
       </p:sp>
+      <mc:AlternateContent xmlns:mc="http://schemas.openxmlformats.org/markup-compatibility/2006">
+        <mc:Choice xmlns:p14="http://schemas.microsoft.com/office/powerpoint/2010/main" Requires="p14">
+          <p:contentPart p14:bwMode="auto" r:id="rId5">
+            <p14:nvContentPartPr>
+              <p14:cNvPr id="4" name="Ink 3">
+                <a:extLst>
+                  <a:ext uri="{FF2B5EF4-FFF2-40B4-BE49-F238E27FC236}">
+                    <a16:creationId xmlns:a16="http://schemas.microsoft.com/office/drawing/2014/main" id="{D3BC7F20-6CC0-2B4E-D0BB-5613DAEED509}"/>
+                  </a:ext>
+                </a:extLst>
+              </p14:cNvPr>
+              <p14:cNvContentPartPr/>
+              <p14:nvPr/>
+            </p14:nvContentPartPr>
+            <p14:xfrm>
+              <a:off x="2286000" y="2940120"/>
+              <a:ext cx="4521600" cy="1162440"/>
+            </p14:xfrm>
+          </p:contentPart>
+        </mc:Choice>
+        <mc:Fallback>
+          <p:pic>
+            <p:nvPicPr>
+              <p:cNvPr id="4" name="Ink 3">
+                <a:extLst>
+                  <a:ext uri="{FF2B5EF4-FFF2-40B4-BE49-F238E27FC236}">
+                    <a16:creationId xmlns:a16="http://schemas.microsoft.com/office/drawing/2014/main" id="{D3BC7F20-6CC0-2B4E-D0BB-5613DAEED509}"/>
+                  </a:ext>
+                </a:extLst>
+              </p:cNvPr>
+              <p:cNvPicPr/>
+              <p:nvPr/>
+            </p:nvPicPr>
+            <p:blipFill>
+              <a:blip r:embed="rId6"/>
+              <a:stretch>
+                <a:fillRect/>
+              </a:stretch>
+            </p:blipFill>
+            <p:spPr>
+              <a:xfrm>
+                <a:off x="2276640" y="2930760"/>
+                <a:ext cx="4540320" cy="1181160"/>
+              </a:xfrm>
+              <a:prstGeom prst="rect">
+                <a:avLst/>
+              </a:prstGeom>
+            </p:spPr>
+          </p:pic>
+        </mc:Fallback>
+      </mc:AlternateContent>
     </p:spTree>
     <p:extLst>
       <p:ext uri="{BB962C8B-B14F-4D97-AF65-F5344CB8AC3E}">
@@ -10740,6 +12083,57 @@
           </a:p>
         </p:txBody>
       </p:sp>
+      <mc:AlternateContent xmlns:mc="http://schemas.openxmlformats.org/markup-compatibility/2006">
+        <mc:Choice xmlns:p14="http://schemas.microsoft.com/office/powerpoint/2010/main" Requires="p14">
+          <p:contentPart p14:bwMode="auto" r:id="rId3">
+            <p14:nvContentPartPr>
+              <p14:cNvPr id="4" name="Ink 3">
+                <a:extLst>
+                  <a:ext uri="{FF2B5EF4-FFF2-40B4-BE49-F238E27FC236}">
+                    <a16:creationId xmlns:a16="http://schemas.microsoft.com/office/drawing/2014/main" id="{9C9A25E3-8B4D-8497-6D97-A40D08B8F0E3}"/>
+                  </a:ext>
+                </a:extLst>
+              </p14:cNvPr>
+              <p14:cNvContentPartPr/>
+              <p14:nvPr/>
+            </p14:nvContentPartPr>
+            <p14:xfrm>
+              <a:off x="571680" y="1994040"/>
+              <a:ext cx="10198440" cy="4089600"/>
+            </p14:xfrm>
+          </p:contentPart>
+        </mc:Choice>
+        <mc:Fallback>
+          <p:pic>
+            <p:nvPicPr>
+              <p:cNvPr id="4" name="Ink 3">
+                <a:extLst>
+                  <a:ext uri="{FF2B5EF4-FFF2-40B4-BE49-F238E27FC236}">
+                    <a16:creationId xmlns:a16="http://schemas.microsoft.com/office/drawing/2014/main" id="{9C9A25E3-8B4D-8497-6D97-A40D08B8F0E3}"/>
+                  </a:ext>
+                </a:extLst>
+              </p:cNvPr>
+              <p:cNvPicPr/>
+              <p:nvPr/>
+            </p:nvPicPr>
+            <p:blipFill>
+              <a:blip r:embed="rId4"/>
+              <a:stretch>
+                <a:fillRect/>
+              </a:stretch>
+            </p:blipFill>
+            <p:spPr>
+              <a:xfrm>
+                <a:off x="562320" y="1984680"/>
+                <a:ext cx="10217160" cy="4108320"/>
+              </a:xfrm>
+              <a:prstGeom prst="rect">
+                <a:avLst/>
+              </a:prstGeom>
+            </p:spPr>
+          </p:pic>
+        </mc:Fallback>
+      </mc:AlternateContent>
     </p:spTree>
     <p:extLst>
       <p:ext uri="{BB962C8B-B14F-4D97-AF65-F5344CB8AC3E}">
@@ -11041,6 +12435,57 @@
           </a:extLst>
         </p:spPr>
       </p:pic>
+      <mc:AlternateContent xmlns:mc="http://schemas.openxmlformats.org/markup-compatibility/2006">
+        <mc:Choice xmlns:p14="http://schemas.microsoft.com/office/powerpoint/2010/main" Requires="p14">
+          <p:contentPart p14:bwMode="auto" r:id="rId5">
+            <p14:nvContentPartPr>
+              <p14:cNvPr id="4" name="Ink 3">
+                <a:extLst>
+                  <a:ext uri="{FF2B5EF4-FFF2-40B4-BE49-F238E27FC236}">
+                    <a16:creationId xmlns:a16="http://schemas.microsoft.com/office/drawing/2014/main" id="{290AC264-4258-254B-E84A-2844D4A21FA6}"/>
+                  </a:ext>
+                </a:extLst>
+              </p14:cNvPr>
+              <p14:cNvContentPartPr/>
+              <p14:nvPr/>
+            </p14:nvContentPartPr>
+            <p14:xfrm>
+              <a:off x="1562040" y="1714320"/>
+              <a:ext cx="8693640" cy="4908960"/>
+            </p14:xfrm>
+          </p:contentPart>
+        </mc:Choice>
+        <mc:Fallback>
+          <p:pic>
+            <p:nvPicPr>
+              <p:cNvPr id="4" name="Ink 3">
+                <a:extLst>
+                  <a:ext uri="{FF2B5EF4-FFF2-40B4-BE49-F238E27FC236}">
+                    <a16:creationId xmlns:a16="http://schemas.microsoft.com/office/drawing/2014/main" id="{290AC264-4258-254B-E84A-2844D4A21FA6}"/>
+                  </a:ext>
+                </a:extLst>
+              </p:cNvPr>
+              <p:cNvPicPr/>
+              <p:nvPr/>
+            </p:nvPicPr>
+            <p:blipFill>
+              <a:blip r:embed="rId6"/>
+              <a:stretch>
+                <a:fillRect/>
+              </a:stretch>
+            </p:blipFill>
+            <p:spPr>
+              <a:xfrm>
+                <a:off x="1552680" y="1704960"/>
+                <a:ext cx="8712360" cy="4927680"/>
+              </a:xfrm>
+              <a:prstGeom prst="rect">
+                <a:avLst/>
+              </a:prstGeom>
+            </p:spPr>
+          </p:pic>
+        </mc:Fallback>
+      </mc:AlternateContent>
     </p:spTree>
     <p:extLst>
       <p:ext uri="{BB962C8B-B14F-4D97-AF65-F5344CB8AC3E}">
@@ -11286,6 +12731,57 @@
           </a:extLst>
         </p:spPr>
       </p:pic>
+      <mc:AlternateContent xmlns:mc="http://schemas.openxmlformats.org/markup-compatibility/2006">
+        <mc:Choice xmlns:p14="http://schemas.microsoft.com/office/powerpoint/2010/main" Requires="p14">
+          <p:contentPart p14:bwMode="auto" r:id="rId3">
+            <p14:nvContentPartPr>
+              <p14:cNvPr id="4" name="Ink 3">
+                <a:extLst>
+                  <a:ext uri="{FF2B5EF4-FFF2-40B4-BE49-F238E27FC236}">
+                    <a16:creationId xmlns:a16="http://schemas.microsoft.com/office/drawing/2014/main" id="{6A1DA138-A4E0-52C9-10A2-9077F0F4AD7A}"/>
+                  </a:ext>
+                </a:extLst>
+              </p14:cNvPr>
+              <p14:cNvContentPartPr/>
+              <p14:nvPr/>
+            </p14:nvContentPartPr>
+            <p14:xfrm>
+              <a:off x="2641680" y="495360"/>
+              <a:ext cx="8515800" cy="5150160"/>
+            </p14:xfrm>
+          </p:contentPart>
+        </mc:Choice>
+        <mc:Fallback>
+          <p:pic>
+            <p:nvPicPr>
+              <p:cNvPr id="4" name="Ink 3">
+                <a:extLst>
+                  <a:ext uri="{FF2B5EF4-FFF2-40B4-BE49-F238E27FC236}">
+                    <a16:creationId xmlns:a16="http://schemas.microsoft.com/office/drawing/2014/main" id="{6A1DA138-A4E0-52C9-10A2-9077F0F4AD7A}"/>
+                  </a:ext>
+                </a:extLst>
+              </p:cNvPr>
+              <p:cNvPicPr/>
+              <p:nvPr/>
+            </p:nvPicPr>
+            <p:blipFill>
+              <a:blip r:embed="rId4"/>
+              <a:stretch>
+                <a:fillRect/>
+              </a:stretch>
+            </p:blipFill>
+            <p:spPr>
+              <a:xfrm>
+                <a:off x="2632320" y="486000"/>
+                <a:ext cx="8534520" cy="5168880"/>
+              </a:xfrm>
+              <a:prstGeom prst="rect">
+                <a:avLst/>
+              </a:prstGeom>
+            </p:spPr>
+          </p:pic>
+        </mc:Fallback>
+      </mc:AlternateContent>
     </p:spTree>
     <p:extLst>
       <p:ext uri="{BB962C8B-B14F-4D97-AF65-F5344CB8AC3E}">
@@ -11506,6 +13002,57 @@
           </a:p>
         </p:txBody>
       </p:sp>
+      <mc:AlternateContent xmlns:mc="http://schemas.openxmlformats.org/markup-compatibility/2006">
+        <mc:Choice xmlns:p14="http://schemas.microsoft.com/office/powerpoint/2010/main" Requires="p14">
+          <p:contentPart p14:bwMode="auto" r:id="rId3">
+            <p14:nvContentPartPr>
+              <p14:cNvPr id="5" name="Ink 4">
+                <a:extLst>
+                  <a:ext uri="{FF2B5EF4-FFF2-40B4-BE49-F238E27FC236}">
+                    <a16:creationId xmlns:a16="http://schemas.microsoft.com/office/drawing/2014/main" id="{5AA31384-77E6-C9C7-8DF8-C4D0238CB6FD}"/>
+                  </a:ext>
+                </a:extLst>
+              </p14:cNvPr>
+              <p14:cNvContentPartPr/>
+              <p14:nvPr/>
+            </p14:nvContentPartPr>
+            <p14:xfrm>
+              <a:off x="3289320" y="2698920"/>
+              <a:ext cx="4864320" cy="2762280"/>
+            </p14:xfrm>
+          </p:contentPart>
+        </mc:Choice>
+        <mc:Fallback>
+          <p:pic>
+            <p:nvPicPr>
+              <p:cNvPr id="5" name="Ink 4">
+                <a:extLst>
+                  <a:ext uri="{FF2B5EF4-FFF2-40B4-BE49-F238E27FC236}">
+                    <a16:creationId xmlns:a16="http://schemas.microsoft.com/office/drawing/2014/main" id="{5AA31384-77E6-C9C7-8DF8-C4D0238CB6FD}"/>
+                  </a:ext>
+                </a:extLst>
+              </p:cNvPr>
+              <p:cNvPicPr/>
+              <p:nvPr/>
+            </p:nvPicPr>
+            <p:blipFill>
+              <a:blip r:embed="rId4"/>
+              <a:stretch>
+                <a:fillRect/>
+              </a:stretch>
+            </p:blipFill>
+            <p:spPr>
+              <a:xfrm>
+                <a:off x="3279960" y="2689560"/>
+                <a:ext cx="4883040" cy="2781000"/>
+              </a:xfrm>
+              <a:prstGeom prst="rect">
+                <a:avLst/>
+              </a:prstGeom>
+            </p:spPr>
+          </p:pic>
+        </mc:Fallback>
+      </mc:AlternateContent>
     </p:spTree>
     <p:extLst>
       <p:ext uri="{BB962C8B-B14F-4D97-AF65-F5344CB8AC3E}">

--- a/topic-09-week9/unit-2/talk-01/firebase.pptx
+++ b/topic-09-week9/unit-2/talk-01/firebase.pptx
@@ -165,7 +165,7 @@
   <inkml:trace contextRef="#ctx0" brushRef="#br0" timeOffset="48317.16">4216 11112 0,'35'0'156,"265"0"-124,106 0 15,-265 0-32,-124 0 16,1 0-15,0 0 0,-1 0-1,1-17 1,17 17 0,18 0-1,-18 0 1,-17 0-1,17 0 1,1 0 15,-1 0-15,0 0 0,18 0 15,35-18-16,36 18 1,34 0 0,-34-17-1,-54 17 1,-34 0 0,-1 0-16,0 0 15,53 0 1,71 0-1,35 0 1,-17 0 0,-124 0-1,-36 0 1,-17 17 46,18-17-30,-1 0 15,19 0-16,-19 0-16,1 0 1,0 0 15,-1 0-15,1 0 0,0 0 15,-1 0-16,1 0 17,-1 0-1,1 0 94</inkml:trace>
   <inkml:trace contextRef="#ctx0" brushRef="#br0" timeOffset="61816.36">32244 2187 0,'-18'71'125,"18"-18"-109,-17-18-16,-1 0 15,-35 89 1,35-54 0,-17-17-1,0 35 1,17-35 0,-17 18 15,17-18-16,-17-18 1,17 18 0,1-18-1,17-17 1,-18-18-16,18 18 47,0-1-16,-18 18-15,1-17-1,-18 35 1,17 18 0,0-19-1,18-34 1,0-71 203,0-17-204,0-36 16,0 71-15,0-1 0,0 89 156,18 71-141,-18-89-16,18-35 1,-1 0 203,1-18-204,17 1 1,-17-19 0,-1 36-1,-17-17 1</inkml:trace>
   <inkml:trace contextRef="#ctx0" brushRef="#br0" timeOffset="63102.23">31803 2981 0,'18'0'219,"-18"35"-204,17-17 1,1 17 0,-18-17-16,17-18 15,-17 17 1,0 1 0</inkml:trace>
-  <inkml:trace contextRef="#ctx0" brushRef="#br0" timeOffset="74478.24">21290 12083 0,'18'0'78,"17"0"-63,53 0-15,36 0 16,34 0-16,1 0 16,35-18-16,0 18 15,247-18 1,-194 18 0,-106-17 15,-70 17-16,-18 0 1,-36 0 0</inkml:trace>
+  <inkml:trace contextRef="#ctx0" brushRef="#br0" timeOffset="74478.23">21290 12083 0,'18'0'78,"17"0"-63,53 0-15,36 0 16,34 0-16,1 0 16,35-18-16,0 18 15,247-18 1,-194 18 0,-106-17 15,-70 17-16,-18 0 1,-36 0 0</inkml:trace>
   <inkml:trace contextRef="#ctx0" brushRef="#br0" timeOffset="81669.13">6262 13018 0,'53'0'203,"0"0"-187,158 0 0,72 0-1,-37 17 1,-34-17 0,-106 0-1,-71 0 1</inkml:trace>
   <inkml:trace contextRef="#ctx0" brushRef="#br0" timeOffset="83556.92">9596 13088 0,'17'0'266,"54"0"-250,-36 0-1,-17 0 1,17 0 0,-17 0 46,-1 0 47,1 0-93,17 0 0,-17 0-1,70-18 1,-17 18 0,34 0 15,-16 0-16,-37 0 1,-16 0 0,-1 0-1,0 0 1,1 0 0,-19 0-1,1-17 1,0 17-1,-1 0 1,1 0 0,35 0-1,17 0 1,-52 0 0,17 0-16,0 0 15,-17-18 1,17 18-16,-17 0 15,0 0 1,-1 0 0,1 0 171,123 0-156,-123 0-31,-1 0 16</inkml:trace>
   <inkml:trace contextRef="#ctx0" brushRef="#br0" timeOffset="84451.29">11359 13088 0,'36'0'125,"34"-18"-110,36 1 1,0-1 0,-71 18-16,-17 0 15,0 0 1</inkml:trace>
@@ -223,7 +223,7 @@
   <inkml:trace contextRef="#ctx0" brushRef="#br0" timeOffset="65943.14">13106 6703 0,'17'0'187</inkml:trace>
   <inkml:trace contextRef="#ctx0" brushRef="#br0" timeOffset="71212.3">13106 6562 0,'17'17'140,"19"107"-124,-1-1 0,35 18-1,-52-88-15,0-17 16,17 34 0,-35-52-1,18-1 32,-18 1-31,17 17-1,-17 1 1,0-19 0</inkml:trace>
   <inkml:trace contextRef="#ctx0" brushRef="#br0" timeOffset="72299.78">13176 7302 0,'0'-35'78,"18"-18"-62,52-53 0,-17 18-1,0 0 1,-17 53-1,-36 0 1,17 35 0,-17-18-16,0 0 62</inkml:trace>
-  <inkml:trace contextRef="#ctx0" brushRef="#br0" timeOffset="82772.74">8943 9507 0,'18'0'109,"158"-17"-93,124 17-1,17 0 1,-105 0 0,-124 0-1,-70 0 1,35 0 46,70 0-46,124 0 0,-53 17-1,53 1 1,-53-18 0,-123 18-1,-54-18 1,1 0 62,194 17-47,299 54 0,-158-18-15,-36-18 0,-193-17-1,-89-18 1</inkml:trace>
+  <inkml:trace contextRef="#ctx0" brushRef="#br0" timeOffset="82772.73">8943 9507 0,'18'0'109,"158"-17"-93,124 17-1,17 0 1,-105 0 0,-124 0-1,-70 0 1,35 0 46,70 0-46,124 0 0,-53 17-1,53 1 1,-53-18 0,-123 18-1,-54-18 1,1 0 62,194 17-47,299 54 0,-158-18-15,-36-18 0,-193-17-1,-89-18 1</inkml:trace>
   <inkml:trace contextRef="#ctx0" brushRef="#br0" timeOffset="117813.17">10954 12982 0,'35'-17'94,"230"-1"-63,-89 18-15,-70 0 0,-36 0-1,-52 0 1,0-18 0,17 18-1,-17 0-15,17 0 16,0-17-16,0 17 15,89 0 1,-89 0 0,36 0-1,-36 0 1,0 0 0,-17 0-1,0 0 1,-18-18 15,35 18 94,282-18-94,1 18 1,-248 0-17,-52 0 48,123 0-32,0 0 0,18 18-15,-88 0-1,-54-18 1,1 0 62,17 0-62,0-18 15,18 18-15,-35-18-1,17 18 1,-17 0 0,-1 0-1,19 0 1,-36-17-1,17 17 1,54 0 109,-18 0-109,88 0-1,35 17 1,-70 1 0,-53-18-1,-35 0-15,17 0 63,53 0-48,-17 0 1,-36 0 0,0 18-1,18-18 16,-17 0-15,-19 17 0,36-17 281,88-35-266,-106 35-16,-17 0 1,-71-18 250,18 1-251,-18-1-15,-18 0 16,54 18 0,17 36 93,53-1-78,-36-35-15,1 0-16,0 18 15,-1-18-15,1 0 16,-18 17 0,35-17-1,-35 18 1,18 0 0,-1-1 15,-17 1 0,0 0 16,0-1-31,-17-17-1,-1 18 1,1-1-1</inkml:trace>
   <inkml:trace contextRef="#ctx0" brushRef="#br0" timeOffset="120443.84">11289 13476 0,'0'0'0,"53"0"15,0 0 1,0 0-1,-18 0 1,0 0 0,-17 0-1,-1 0 1,19 0 62,-1 0-62,71-18-1,-18 1 1,0 17 0,-70 0-1,0 0 16,17 0-15,-18 0 0,19 0-1,-19 0-15,1 0 16,88 17 0,0 1 15,-106 17 63,0-17-79,-18 17 1,0-17-1,1-18-15,17 18 16,-18 17 0,0 0-1,1 0 1,-36 1 0,0-19-1,18 1 1,-18 0 15,-18-18-15,54 17-1,-1 1-15,-17-18 32,17 18-17,0-18 16,1 17-15,-1-17 0,1 0-1,-19 0 1,-34 0 0,-1 0-1,1 0 1,17 0 15,35 0-15,-17 0-16,-36 0 15,18 0 1,0 0 0,36 0-1,-1 0 48,-17 0-32,-18 0 0,-18 0 0,54 0 173</inkml:trace>
   <inkml:trace contextRef="#ctx0" brushRef="#br0" timeOffset="122584.29">11007 11642 0</inkml:trace>
@@ -231,7 +231,7 @@
   <inkml:trace contextRef="#ctx0" brushRef="#br0" timeOffset="130588.13">10795 14164 0,'-35'0'46,"-1"0"-30,1 18 15,0-18 1,17 0-1,1 0 0,-1 0-15,0 0-16,18 17 15,-35-17 1,17 0 0,1 0-1,-1 0 1,-17 0-1,17 0 1,1 18 0,-1-18-1,0 0 1,1 0 0,-19 0-1,1 0 16,0 0-15,17 0-16,1 0 16,-1 0-1,-17 0 1,-1 0 0,1 0-1,0 0 1,17 0-1,1 0 1,-1 0 0,0 0-1,1 0-15,-1 0 16,0 0-16,-17 0 16,-71-18-1,71 1 1,0 17-1,-106-18 1,88 0 0,17 1-1,1 17 1,-18 0 0,18 0-1,0-18 1,-1 18-1,19 0 1,-1 0 93,-105 0-77,17 0-1,-35 18-15,70-18-16,18 0 15,18 0-15,0 0 16,17 0-1,0 0 1,1 0 0,-1 0-1,-70 0 1,17 0 0,1 0-1,-1 0 32,54 0-31,-1 0 15,0 0-15,1 0-16,-1 0 15,-53 0 1,54 0-1,-1 0 32,1 0-31,-19 0 0,1 17-1,0-17 16,-1 0-15,19 0-16,17 18 16,-18-18-1,1 0 1,-1 0 0,-17 18-1,-18-18 1,35 17-1,0-17 1,1 0 0,-1 0-1,-35 0 1,0 18 0,36-18-16,-1 0 15,0 0 1,1 0-16,-1 0 47,0 0-32,1 0 1,-1 0 0,1 0-1,-1 0 95,-17 0-95,-18 0 1,17 0 15,19 0-15,-19 0-1,19 0 1,-1 0 0,-17 0-1,17 0 1,1 0-1,-19 0 1,1 0 0,17 0-1,1 0 1,-1 0 15,-17 0 0,17 0 16,1 0-31,-1 0 0,-70 0-1,53-18 1,-18 18-1,35 0 1,0 0 0,1 0 62,-1 0-47,0 0 0,-17 0-15,18 0 125,17-17 124,17 17-46,1-18-188,35-17 0,-36 17 1,1 18-17,0-18 17,-1 18-17,1-17 1,-18-1 15,18 18-15,-54 18 124,-17 17-124,36-35 0,17 18-1,-18-18 32,0 17 0,1 1-16,17 0 0,17-1 235,1 1-235,0-18-15,-1 18 0,1-1-1,0-17 16,-1 18-15,1-18 0,0 18-1,17-1 1,-53-34 343,18-19-343,0 1 0,0 17-1,0 1 1,-17-1-1,17 0 1,0 1 0,0-1-1,0 0 17,0 1-1,0-1-31,0 36 187,0 17-155,0 0-1,0-17-16,-18-18 64,0 0-64</inkml:trace>
   <inkml:trace contextRef="#ctx0" brushRef="#br0" timeOffset="137035.79">7655 15857 0,'36'-53'47,"16"18"-16,1-18-15,-35 53-1,53-70 16,-36 34-15,-17 19-16,-1-1 16,18-35-1,1 18 1,-1 0 0,0-1-1,-17 19 1,0-1-1,-1-17 1,1 17 0,-1 1-1,1-1 1,-18 0 0,0 1-1,18 17 16,-18-18 1,17 18-17,-17-18 1,18 1 0,0-1-1,-18 0 16,-18 18 48,-35 0-64,-53 0 32,106 18-31,-17-18-1,52 0 126,71-18-125,-71 1-1,-17-1 16,-18 36 16,0-1-31,0 1-16,0 0 16,0 17-16,0-17 15,0 17 1,0-17-1,0-1 1,17-17 218</inkml:trace>
   <inkml:trace contextRef="#ctx0" brushRef="#br0" timeOffset="151082.6">6456 10566 0,'-53'0'125,"18"0"-109,35 53 140,0 105-125,0-87 0,0-36-15,0-17 0,0-1-1,0 1 1,0 35 0,0-35-16,0 17 15,0-17 1,0 17-1,0-18 1,0 19 0,0-19-1,17 1 157,1-18-156,0 0-16,34 0 15,-16 18 1,-19-18 0</inkml:trace>
-  <inkml:trace contextRef="#ctx0" brushRef="#br0" timeOffset="154523.95">6914 14005 0,'-17'0'172,"-71"0"-156,35 0-16,0 0 15,0 0 1,35 0 0,1 0 62,-1 0-63,-53 0 1,-17 0 0,35 18-1,36-18 1,-1 0 15,-35 18-15,35-18-1,-17 0 1,35 17 125,0 1-126,0 17 1,0-17 0,0 17-1,0-17 1,0-1-1,0 1 1,0 0 0,0-1-1,0 19 1,-17 16 0,-1-52-1,18 36-15,0-19 31,0 1 16,70-18 110,54 0-142,176 0 16,-159-18-15,-106 18 0</inkml:trace>
+  <inkml:trace contextRef="#ctx0" brushRef="#br0" timeOffset="154523.94">6914 14005 0,'-17'0'172,"-71"0"-156,35 0-16,0 0 15,0 0 1,35 0 0,1 0 62,-1 0-63,-53 0 1,-17 0 0,35 18-1,36-18 1,-1 0 15,-35 18-15,35-18-1,-17 0 1,35 17 125,0 1-126,0 17 1,0-17 0,0 17-1,0-17 1,0-1-1,0 1 1,0 0 0,0-1-1,0 19 1,-17 16 0,-1-52-1,18 36-15,0-19 31,0 1 16,70-18 110,54 0-142,176 0 16,-159-18-15,-106 18 0</inkml:trace>
   <inkml:trace contextRef="#ctx0" brushRef="#br0" timeOffset="158347.99">6615 14658 0,'0'-18'78,"-18"18"-62,-17-17-1,-18 17 1,35 0 47,-17 0-48,17 0 16,1 0-15,-1 0 31,0 0-16,18 17 47,0 19-62,0-1 0,0 18-1,0 0 16,0 17-15,0-52-16,0-1 16,-17 72-1,-1-1 1,0-35 0,1 0-1,17-36 1,0 1-1,0 0 1,0-1 0,0 1 77,35-18-77,159 35 0,18-17-1,-1 17 1,-140-17 0,-53-18-1,-1 0 141</inkml:trace>
   <inkml:trace contextRef="#ctx0" brushRef="#br0" timeOffset="173051.93">17410 9596 0,'247'0'266,"-124"0"-250,71 0-1,-70 0 1,-72 0 0,-16 0 93,87 0-93,-70 0-1,159 0 16,-54 17-15,-122-17 0,-1 0-1,18 0 1,35 0 0,0 0-1,-17 0 1,-18 0-1,-36 0 1,1 0-16,17 0 31,1 0-15,17 0 0,0 0-1,35 0 16,0 0-15,-18 0 0,-34 0-1,-19 0 1,1 0 0,17 0-1,36 0 1,-18 0-16,0 0 15,105 0 1,-69 0 0,-1 0-1,-18 0 1,19 0 0,-54 0-1,-18 0 16,1 0-15,17 0 109,301 18-109,-142-1-1,0 1 1,-71 0 0,-35-1-1,-70-17 1,0 0-1,-1 0-15,1 0 16,17 0 0,0 0-1,-17 0 1</inkml:trace>
   <inkml:trace contextRef="#ctx0" brushRef="#br0" timeOffset="186269.8">8555 13635 0,'17'53'156,"19"35"-140,-19-53-16,19 36 15,-19-36 1,1 18 0,17-18-1,1 18 1,-1 0-1,0 18 1,-17-18 0,-1-36-1,1-17 1,-18 36-16,18-19 16,17 18-1,-35-17 1,35 17-1,18 54 1,-35-54 0,-1-35-1</inkml:trace>
@@ -282,9 +282,9 @@
   <inkml:trace contextRef="#ctx0" brushRef="#br0" timeOffset="20827.8">19861 10936 0,'18'0'125,"123"0"-110,-35 0-15,17 0 16,71 0 0,-88 0-16,71 18 15,-1-18 1,-70 0 0,0 0-1,-18 0 1,0 0-1,-17 0 1,17 0 0,0 17-1,18-17 1,-53 18 0,0-18-16,106 0 15,-107 0 1,90 0-1,-1 0 1,-53 0 0,0 0-1,18 0 1,-18 0 0,18 0-1,0 0 1,17 0-1,-52 0 1,-1 0 0,36 0-1,-35 0-15,35 0 16,176 0 0,-106 0-1,106-18 32,-158 18-31,-18 0-1,0 0 1,-1-35 0,1 35-1,-53 0-15,0 0 16,18-18-16,17 18 15,-18 0-15,142 0 16,-18 0 0,-71 0-1,1-17 1,-1 17 0,36 0-1,-71-18 1,1 18 15,-19 0-15,18-17-1,53-1 1,-17 0 0,-89 18-16,18-17 15,0 17 1,-35 0-1,17 0 1,18 0 0,35 0-1,-17 0 1,-1 0 0,-35 0-1,1 0-15,52 0 16,0 0 15,-17 0-31,-1 0 16,142 0-1,-106 0 1,17 0 0,-17 0-1,35 0 1,-35 0-1,-18 0 1,-17 0 0,-18-18-1,35 18 1,0 0 0,-53 0-16,1 0 15,-19-18-15,54 18 31,-36 0-15,18 0 0,17-17-1,19 17 1,-1 0 0,0 0-1,-17 0 1,-1-18-1,1 18 1,-18 0-16,-36 0 16,19 0-16,-1 0 15,18 0 1,-36 0 0</inkml:trace>
   <inkml:trace contextRef="#ctx0" brushRef="#br0" timeOffset="45957.52">12806 12083 0,'17'0'62,"1"0"-46,0 0 0,-1 0-1,1 0 1,35 0 0,-18 0-1,18-18-15,124 0 16,-107 18 15,-35 0-15,-17 0-1,0 0 204,17 0-203,18 0-1,0 0 1,17 0 0,18 0-1,-70 0-15,17 0 16,-17 0-1,0 0-15,-1 0 16</inkml:trace>
   <inkml:trace contextRef="#ctx0" brushRef="#br0" timeOffset="49033.06">11289 13141 0,'18'0'94,"599"0"-63,230 0 0,-477 0-15,-88 0 0,-88 0-1,-70-18 1,-36 18 0,-35 0-1,-36 0 1,213-17 124,70 17-124,35 0 0,-18 0-1,-105 0 1,-124 0 0,-53 0-1,1 0 1,-1 0-16,0 0 15,89-18 1,-36 0 0,-18 18-1,-17 0 1,0 0 0,-17 0-1,-1 0 1,0 0 15,-17 0-15,35 0-1,35 0 1,-71 0-16</inkml:trace>
-  <inkml:trace contextRef="#ctx0" brushRef="#br0" timeOffset="50092.22">21872 13053 0,'0'0'0,"106"0"16,-88 0 0</inkml:trace>
+  <inkml:trace contextRef="#ctx0" brushRef="#br0" timeOffset="50092.21">21872 13053 0,'0'0'0,"106"0"16,-88 0 0</inkml:trace>
   <inkml:trace contextRef="#ctx0" brushRef="#br0" timeOffset="51635">7338 13811 0,'17'0'46,"72"0"-30,-1 0 0,18 0-1,-36 0 1,-35 0 0,-17 0-1</inkml:trace>
-  <inkml:trace contextRef="#ctx0" brushRef="#br0" timeOffset="52816.19">13176 14058 0,'194'-35'78,"18"0"-62,35 35-1,176 0 1,-193 0-16,52 0 16,88 0-1,-141 0 16,-193 0-15</inkml:trace>
+  <inkml:trace contextRef="#ctx0" brushRef="#br0" timeOffset="52816.18">13176 14058 0,'194'-35'78,"18"0"-62,35 35-1,176 0 1,-193 0-16,52 0 16,88 0-1,-141 0 16,-193 0-15</inkml:trace>
   <inkml:trace contextRef="#ctx0" brushRef="#br0" timeOffset="55875.8">16104 11606 0,'18'0'110,"264"-70"-79,-176 52-31,0 1 15,70-19 1,-35 19 0,-105 17-1,-54-18 126</inkml:trace>
   <inkml:trace contextRef="#ctx0" brushRef="#br0" timeOffset="56700.63">16228 11501 0,'35'-53'156,"18"17"-140,-35 19-1</inkml:trace>
   <inkml:trace contextRef="#ctx0" brushRef="#br0" timeOffset="57050.02">16263 11501 0,'0'17'62,"18"-17"-30,-1 0-17,-17 18 1,18-1-16,17 1 31</inkml:trace>
@@ -292,7 +292,7 @@
   <inkml:trace contextRef="#ctx0" brushRef="#br0" timeOffset="75954.78">25912 15011 0,'70'17'125,"36"-17"-109,-53 0-16,0 0 16,17 0-1,1 0 1,-18 0 0,-18 0-1,36 0 32,-18 0-31,-18 0-1,-18 0 1,1 0 0</inkml:trace>
   <inkml:trace contextRef="#ctx0" brushRef="#br0" timeOffset="77563.98">5627 15822 0,'0'18'93,"35"-18"-77,71 0 0,-36 0-1,1 0 1,17 0 0,36 0-1,34 0 1,-69-18-1,16 18 1,-16 0-16,-1 0 16,18 0-16,105 0 15,-17 0 1,-17 0 0,-89 0-1,-53 0 1</inkml:trace>
   <inkml:trace contextRef="#ctx0" brushRef="#br0" timeOffset="83183.09">2575 15469 0,'18'0'47,"17"-17"-32,36-19-15,17 1 16,229-88 0,-70 70-1,-17 17 1,-36-16 0,-71-1-1,-35 17 1,-35 19 15,-35-1-15,17 0-1,-17 1-15,17 17 16,-17-18-16,-1-17 16,72 17-1,-72 1 1,19-1-1,-1 0 1,-18 1 0,1 17-1,-53 0 767,-71 0-767,-88 0 16,88 0-15,88 0 0,1 0 62,70 0 62,0 0-124,0 0-16,17 0 16,195 0-1,-107 0 1,-105 0 0,-35 0-1,-18 17 313,-88 71-296,-36 1-1,19-54-16,69 18 1,1-35 0,35-1-1,-18 18 32,-17-17-31,35 17-16,0-17 31,-18-18 110,36-53-94,35-70-32,0 52 1,-35 18-1,-1 18 1,-17 17 0,0 1-1,0-1 48,-17 106 156,-1-70-188,0-54 47,-17-16-62,17 16-1,1 19 1,-1 17-1,-35-18 1,-17 18 0,-1 0-1,53 0-15,1 0 16,-1 0 0,-17 18 124,-18-1-124,18 1-1,35 17 126,35 18-125,0-35-1,-17-18 32,88 0-31,35 0-1,0 0 1,-71 0 0,-87 0 62,-1 0-63,53-18 64,1 0-48,-89 18 109,0 0-124,-35 0 0,17 0-1,1 0 1,70-17 62,-18 17 31,-211 0-77,140 0-17,1 0 1,71 0 0,158 0 30,-18 0-30,-70 0 0,-53-18 15,-35 18 0,-18 0 0,141 0 32,0 0-32,-70 0-15,0 0 78</inkml:trace>
-  <inkml:trace contextRef="#ctx0" brushRef="#br0" timeOffset="99938.91">2469 13723 0,'36'0'62,"281"-88"-30,1 17-1,-36 18 0,-88 0 0,-194 36 63,88-18 47,124-18-126,-106 17 1,-106 19 109,-36-1-109,-122-35-1,69 18 1,-16 0 0,16 17-1,125 18 126,17 0-126,17 0 1,18 0 0,18 35-1,-35-17 1,-54-18 0,-17 35 109,-17 53-110,-36 1 1,0-19-1,18-35 1,35-17 0,0 0 234,-18 17-219,0 0 0,18-17 0</inkml:trace>
+  <inkml:trace contextRef="#ctx0" brushRef="#br0" timeOffset="99938.9">2469 13723 0,'36'0'62,"281"-88"-30,1 17-1,-36 18 0,-88 0 0,-194 36 63,88-18 47,124-18-126,-106 17 1,-106 19 109,-36-1-109,-122-35-1,69 18 1,-16 0 0,16 17-1,125 18 126,17 0-126,17 0 1,18 0 0,18 35-1,-35-17 1,-54-18 0,-17 35 109,-17 53-110,-36 1 1,0-19-1,18-35 1,35-17 0,0 0 234,-18 17-219,0 0 0,18-17 0</inkml:trace>
   <inkml:trace contextRef="#ctx0" brushRef="#br0" timeOffset="101107.06">3581 13194 0,'17'0'31,"1"18"32,0-18-48,17 17 1,0-17 0,0 18-1,54-1 1,-54 1 0,-17 0-1,-1-18 1,1 0 93</inkml:trace>
 </inkml:ink>
 </file>
@@ -326,12 +326,12 @@
   <inkml:trace contextRef="#ctx0" brushRef="#br0" timeOffset="3822.04">8555 7091 0,'88'0'141,"212"-18"-110,53 18-15,-300 0-1,70 0 1,-35 0 0,-17 18-1,88-18 16,-18 0-15,53 0 0,0 0-1,-53-18 1,0 18 0,-35 0-1,53-17 1,87 17-1,-104-18-15,16 18 16,-17-18-16,54 18 16,-37 0-16,19-17 15,317-1 1,-195-17 0,-34 17-1,-106 0 16,-142 18-15</inkml:trace>
   <inkml:trace contextRef="#ctx0" brushRef="#br0" timeOffset="5342.88">9031 9437 0,'35'0'171,"195"0"-155,140 0 0,106 0-1,-35-53 1,36 35 0,-178-17-1,-122 17 1,-89 18-1,-70-17 1,-1 17 0,-17-18-1,36 18-15,17 0 16,-36 0 0</inkml:trace>
   <inkml:trace contextRef="#ctx0" brushRef="#br0" timeOffset="7174.18">9666 12100 0,'35'0'94,"336"-17"-63,-283-1-15,194 0-1,71 18 1,-106-17 0,-194 17-1</inkml:trace>
-  <inkml:trace contextRef="#ctx0" brushRef="#br0" timeOffset="10382.87">10460 14111 0,'35'0'78,"71"0"-62,35-18 0,-17 18-1,-19 0 1,-52 0 0,-35 0 15,-18-17-16,35 17-15,-17 0 16,-1 0 0</inkml:trace>
+  <inkml:trace contextRef="#ctx0" brushRef="#br0" timeOffset="10382.86">10460 14111 0,'35'0'78,"71"0"-62,35-18 0,-17 18-1,-19 0 1,-52 0 0,-35 0 15,-18-17-16,35 17-15,-17 0 16,-1 0 0</inkml:trace>
   <inkml:trace contextRef="#ctx0" brushRef="#br0" timeOffset="13815.02">10389 16633 0,'0'-17'172,"36"-177"-141,-19 106-16,-17-1 1,18 19 0,-18-1-1,35-35 1,-17-35 0,17 18-1,-35 17 1,18 71-16,-18 0 15,0-36 1,0 18 0,0 18-1,0-18 1,0 35 0,0-52-1,0 34 16,0 19-15,0-36 0,0 18-1,0-54 1,0 72-16,0-1 16,0-35-1,0 18 1,0 0-1,0-1 1,0 1 0,-18 53 140,0-1-140,1 1-1,-36 17 1,18 0-1,17-17 1,0 0 0,-17-1-1,35 1 1,-18 0 0,18-1-16,-17-17 15,70-53 188,-18 0-187,0 18 0,-17 18-1,0-1 32,-1 18 203,54 35-203,-18 18-16,35 0-15,-18 0-1,-17-18 1,-17-35 0,-19 18-1,-17 0 1</inkml:trace>
   <inkml:trace contextRef="#ctx0" brushRef="#br0" timeOffset="18582.95">20179 7038 0,'18'0'172,"281"0"-156,72 0 15,-18 18-15,-177-18-16,71 0 15,-124 17 1,-87-17 0,17 0 62,105 0-63,19 0 1,-1 0 0,-88 0-16,-17 0 15,88 0 16,-54-17-15,1-1 0,-35 18-1,-18 0 1,0 0 0,-36-18-1,54 18 1,-36 0-16,0 0 15,1-17-15,-19 17 16,54 0 0,-53 0-1,-1 0-15,1 0 16,17 0 0,0 0-1,36 0 16,-36 0-15,18 0 0,-18 0-1,18 0 1,35 0 0,-70 0-16,17 0 15,18 0 1,-35 0-1,17 0 17,53 17-17,1-17 1,-36 0 0</inkml:trace>
   <inkml:trace contextRef="#ctx0" brushRef="#br0" timeOffset="19440.04">25329 6897 0,'36'0'109,"34"0"-93,54 0-16,-54 0 15,124 0 1,-70 0-1,-71 0-15,-18 0 16</inkml:trace>
   <inkml:trace contextRef="#ctx0" brushRef="#br0" timeOffset="20559.53">18274 8026 0,'18'0'79,"370"0"-48,-247 0-16,194-18 1,-18 0 0,-123 18-1,-70-17 1,-89 17 0</inkml:trace>
-  <inkml:trace contextRef="#ctx0" brushRef="#br0" timeOffset="21839.11">18256 5821 0,'265'0'62,"-36"17"-31,-52 1-15,-107 0-16,1-18 16,34 17-1,-52-17 1,36 18-1,34-18 1,53 0 0,-52 0-1,-54 0 1,-52 0 0,0 0 30</inkml:trace>
+  <inkml:trace contextRef="#ctx0" brushRef="#br0" timeOffset="21839.1">18256 5821 0,'265'0'62,"-36"17"-31,-52 1-15,-107 0-16,1-18 16,34 17-1,-52-17 1,36 18-1,34-18 1,53 0 0,-52 0-1,-54 0 1,-52 0 0,0 0 30</inkml:trace>
   <inkml:trace contextRef="#ctx0" brushRef="#br0" timeOffset="23294.98">18239 8996 0,'70'-18'62,"-17"18"-46,53-17-1,17 17 1,89 0 0,35 0-1,-71 0 1,89 0-1,-36 0 1,-35 17 0,-70-17-1,-54 18 1,-34-18 0</inkml:trace>
   <inkml:trace contextRef="#ctx0" brushRef="#br0" timeOffset="28566.95">18309 10054 0,'124'-17'110,"493"-19"-79,-123 1 0,-441 17-15</inkml:trace>
   <inkml:trace contextRef="#ctx0" brushRef="#br0" timeOffset="33215.68">28434 9260 0,'-18'0'63,"36"0"31,0-17-79,17 17 1,-18-18 0,36 18-1,-17 0 1,-1-17 15,-17 17-15,-1-18-1,18 18 1,18-18 0,0 18-1,-35 0 1,-53 0 359,-36 0-360,53 18 1,-52 0 0,17-18-1,35 0 1,18 17 140,-17 1-125,-1-18-15,0 17 0,-17 1-1,53-18 204,52-35-203,-34 35-16,87-53 15,-17 18 1,-53-1 0,-36 36 77,19 0-77,-19 0 0,54-17-1,-53-1 1,17 18-16,-17-18 31,-1 18-15,1 0 46,-18-17 16,-18 17-31,-123 17-16,88 1-15,-17 0 0,17-1-1,35 1 1,0-18 0,1 18-1,-1-18 1,-17 35-1,17-17-15,-35-1 16,36 1 0,-1-18 15,-17 17-15,17 1-1,0 0 16,-34-1-15,34 1 0,0-18-1,18-53 267,36 0-267,-19 0 1,1 0-1,-1 53 1,-17-17 0,0 70 171,0-18-171,-17 18-1,-1-18 1,18-17 0,0-1-1,0 19 1,-17-36 0,17 17 46,0 1 63,52-18-94,-16 18 1,-36-71 311,0 0-327,0 35 0,0 0 62,0-34-47,0 16 0</inkml:trace>
@@ -378,7 +378,7 @@
   <inkml:trace contextRef="#ctx0" brushRef="#br0" timeOffset="32616.98">14323 11271 0,'17'-17'110,"36"-19"-95,0-17 1,0 0 0,0 18-1,-35 35 1,-18-17-16,17 17 15,-34 35 79,-54 35-78,36-34-16,-18-1 31,35-17-15,1-18-16,17 17 15,0 1 17,-18 0-17,53 17 79,18 0-78,-17-35-1,-19 18 16</inkml:trace>
   <inkml:trace contextRef="#ctx0" brushRef="#br0" timeOffset="37194.96">12065 11553 0,'71'0'32,"34"-17"-17,36 17 1,-17-18 15,-18 18-15,17 0-1,-70-17 1</inkml:trace>
   <inkml:trace contextRef="#ctx0" brushRef="#br0" timeOffset="39762.93">9807 12912 0,'18'0'62,"17"0"-46,0 0 0,18 0-1,106 0 32,-71 0-31,0 0-1,-52 0 1,17 0 0,0 0-1,-18 0-15,18 0 16,-18 0-16,18 0 15,141 0 1,-88 0 0,0 0-1,35 0 1,-35 0 0,-18 0-1,-18 0 16,-17 0-15,0 0 0,0 0-1,0 0 1,-35 0-16,17 0 16,18 0-1,-18 0 1,36 0-1,35 0 1,17 0 0,0 0-1,19 0 1,-54 17 0,-18-17-1,1 0 16,52 0-15,-52 0-16,52 0 16,89 0-1,-88 0 1,-107 0 0,-52 0 93</inkml:trace>
-  <inkml:trace contextRef="#ctx0" brushRef="#br0" timeOffset="41352.26">10883 13617 0,'0'0'0,"35"0"31,71 0-15,0 0 0,0 0-1,0-17 16,-36 17-15,1 0 0,-1-18-1,1 18 1,0 0 0,-36 0-16,18 0 31,17 0-16,-52 0-15,17 0 16,18 0 0,-35 0-1</inkml:trace>
+  <inkml:trace contextRef="#ctx0" brushRef="#br0" timeOffset="41352.25">10883 13617 0,'0'0'0,"35"0"31,71 0-15,0 0 0,0 0-1,0-17 16,-36 17-15,1 0 0,-1-18-1,1 18 1,0 0 0,-36 0-16,18 0 31,17 0-16,-52 0-15,17 0 16,18 0 0,-35 0-1</inkml:trace>
   <inkml:trace contextRef="#ctx0" brushRef="#br0" timeOffset="43270.18">7179 14252 0,'0'18'140,"159"0"-108,-89-1-17,177-17 1,-123 0 0,-107 0-1,1 0-15,0 0 110,52 0-95,54 0 1,17 0-1,53 0 1,0 0 0,-71 0-1,-34 0 1,-54 0-16,0 0 16,36 0-1,-54 0-15,54 0 16,35 0 15,0-17-15,-54 17-1,1 0 1,-35 0 0,0 0-1,52 0 1,36 0-1,53-18 1,-36 18 0,-35 0-1,-52 0-15,17 0 16,-18 0 0,-17 0-1,-1 0 1,54 0 15,17 0-15,0 0-1,-70 0 1</inkml:trace>
   <inkml:trace contextRef="#ctx0" brushRef="#br0" timeOffset="44427.01">7355 14870 0,'18'0'93,"0"0"-77,70 0 0,88 17-1,-105-17-15,35 0 16,0 18-16,-54-18 15,19 0 1</inkml:trace>
   <inkml:trace contextRef="#ctx0" brushRef="#br0" timeOffset="46000.89">10566 15028 0,'35'0'172,"124"18"-157,-36 0 1,36-18 0,-36 0-1,-34 0 1,-36 0 0,-36 0-1</inkml:trace>
@@ -418,7 +418,7 @@
   <inkml:trace contextRef="#ctx0" brushRef="#br0">19438 9066 0,'18'0'109,"35"0"-93,88 0-1,53 0 1,17 0 0,-17 0-1,-88 0 1,-70 0-1,-19 18 17,1-18-17,-1 0 1,1 0 0,0 0-1,70 0 16,-17 0-15,17 0 0,35 0-1,1 0 1,-1 18 0,53-18-1,-17 0-15,-18 0 16,230 17-1,52-17 1,-35 0 0,-194 0-16,-35 0 15,247 0 1,-212 0 0,-71 0-1,71 0 32,-106 0-31,1 0-1,-1 0 1,18 0 0,-1 0-1,-34 0-15,0 0 16,-1 0-16,1 0 15,193 0 1,18 18 0,18-18-1,0 0 1,-18 0 0,-70 0-1,-18 0 16,-70 0-15,-54 0 0,-35 0-16,1 0 15,34 0 1,1 0 0,-54 0-16,54 0 15,17 0 1,36 0-1,-1 0 1,18 0 0,-17 0-1,34 0 1,54 0 0,-53 0-1,-18 0 16,-35 0-15,0 0 0,35 0-1,-71 0 1,18 0 0,18 0-1,-53 0 1,0 0-1,35 0 1,-35 0 0,18 0-1,-36 0-15,18 0 16,18 0 0,17 18-1,-53-18-15,18 0 31,-18 0-15,-17 0 578,-18 17-547,18-17 125,52 0-157,-35 0 1,1 0-1,-19-17 1</inkml:trace>
   <inkml:trace contextRef="#ctx0" brushRef="#br0" timeOffset="4583.79">4639 10513 0,'18'0'94,"17"0"-79,-17 0 1,34 0 0,37 0-1,34-18 1,18 1 0,-17-1-1,-18 18 1,-36 0 15,1 0-15,-54 0-1,1 0-15,0 0 16,-1 0 0,1 0-16,0 0 15,52 0 1,-17 0-1,0-18 1,17 1 0,-17 17-1,-17-18 1,-36 0 0</inkml:trace>
   <inkml:trace contextRef="#ctx0" brushRef="#br0" timeOffset="75399.66">12912 12753 0,'35'0'109,"159"0"-77,-88 0-32,176 0 15,36 18 1,-36-18 0,-35 17-1,-106-17 1,-35 0-1,35 0 1,-18 0 0,1 0-1,17 0 1,-35 0 0,-18 0-16,53 0 15,-70 0 1,52 0-1,-17 0 1,0 0 0,-1 0-1,-69 0 1,-1 0 0,18 0-1,35 0 1,-35 0-1,-18 0 1,-17 0-16,0 0 16,-1 0-16,54 0 31,-36 0-15,-17 0-1,-1 0 1,36 0 15,0 0-15,0 0-1</inkml:trace>
-  <inkml:trace contextRef="#ctx0" brushRef="#br0" timeOffset="79719.74">16651 13988 0,'18'0'47,"35"0"-32,53 0 1,-18 0 0,0 0-1,35 0 1,1 0 0,-18 0-1,-89 0 1,36 0-16,18 0 31,-1 0-15,1 0-1,17 0 1,-35 0 0,-18 0-1,1 0 1,-19 0-1,1 0 17,-1 0 374,54-18-390,-18 18-16,-18-18 15,-17 18 1,0 0 62</inkml:trace>
+  <inkml:trace contextRef="#ctx0" brushRef="#br0" timeOffset="79719.73">16651 13988 0,'18'0'47,"35"0"-32,53 0 1,-18 0 0,0 0-1,35 0 1,1 0 0,-18 0-1,-89 0 1,36 0-16,18 0 31,-1 0-15,1 0-1,17 0 1,-35 0 0,-18 0-1,1 0 1,-19 0-1,1 0 17,-1 0 374,54-18-390,-18 18-16,-18-18 15,-17 18 1,0 0 62</inkml:trace>
   <inkml:trace contextRef="#ctx0" brushRef="#br0" timeOffset="83501.89">23812 14235 0,'53'0'63,"124"0"-48,34 0 1,54 0-1,-106 0-15,105 0 16,1 0 0,-18 0-1,0 0 1,-35 0 0,-54 0-1,1 0 16,-36 0-15,1 0 0,17 0-1,-88 0-15,18-18 16,-19 18-16,19 0 16,176-18-1,-35 18 1,17 0-1,53 0 1,71 0 0,-18 0-1,0 0 1,-35 0 0,-53-17-1,-159-1 1,18 18-1,18-18 1,-54 18 0</inkml:trace>
   <inkml:trace contextRef="#ctx0" brushRef="#br0" timeOffset="92840.54">4286 15222 0,'0'18'109,"18"-18"-93,-18 18 0,18 52-1,-18-35-15,0 36 16,17-18 0,-17-18-1,0-17 1,0 0 15,106-18 172,300 0-172,-283 0-15,89 0 0,-142 0-16,-17 0 15,0 0-15,-17 0 16,34 0 0,-35 0-16,71 0 15,-18 0 1,36 0-1,52 17 1,18-17 0,53 18-1,35-1 1,1-17 0,-19 0-1,-52 0 1,-71 0 15,35 0-15,-123 0-16,53 0 15,35 0 1,71 0 0,17 0-1,-35 0 1,0 0-1,0 0 1,-88 18 0,-71-18-1,-35-18 126,18 1-125,-18-36-1,0 0 1,0 0-1,0 0 1,0 18-16,0 17 16,0 1-1,0-1 17</inkml:trace>
   <inkml:trace contextRef="#ctx0" brushRef="#br0" timeOffset="96624.67">11077 15222 0,'0'18'109,"0"0"-93,0-1-16,0 1 15,18 52 1,-18-52-16,0 17 15,17 36 1,-17-36 0,0 1-1,18-1 1,-18 0 0,0-17-1,0-1 1,18-17 187,-1 0-78,89 0-94,35 0-15,-17 0-1,17 0 1,-18-17 0,-34-1-1,-54 18 1,18 0-16,35-18 16,-17 18-1,-1 0-15,159-17 16,-87 17 15,-19 0-15,36 0-1,-18 0 1,0-18 0,35 1-1,54-1 1,-19 0-1,1 1 1,0-1 0,-89 18-16,1-18 15,193 18 1,-105 0 0,-1 0-1,178 0 32,-195 0-31,35 0-1,18 18 1,-88-18 0,17 0-1,-106 0-15,19 0 16,17 18-16,-36-18 15,159 35 1,-88-17 0,-17-18-1,-18 0 1,-18 17 0,-35-17-1,0 0 16,-36 0 173,-17 18 296,18-18-407,35 0-15,35-53-62,-70 35 0,17 1-1,-35-1 1,18 18 0,-1 0 46,1 0-31,0 18 1,-1-18-1,-17-18 78,0 0-93,0-17 15,0-36-15,0 54-16,0-54 15,0 1 1,0-1 0,0 18-1,0 18 1,0 17-1</inkml:trace>
@@ -466,7 +466,7 @@
   <inkml:trace contextRef="#ctx0" brushRef="#br0" timeOffset="59228.81">16616 11307 0,'17'0'125,"19"-18"-109,17 18-16,17-18 15,212 1 1,-52 17 0,-124-18-1,-71 18 1,0 0 0,-17 0-1,17 0 1,18 0 15,35 0-15,-35 0-1,-18 0 1,-17 18 0,0-18-16,17 0 15,18 0 1,-18 0-1,-17 0 1,17 0 0,-17 0-1,35 0 1,52 17 0,-16-17-1,-1 0 16,-53 0-31,-17 0 16,-1 18 0,19-18-1,52 0 1,-18 0 0,-17 0-1,0 0 1,0 0-1,0 0 1,0 0 0,0 0-1,-18 0 1,-17 0 0,-1 0-16,36 0 31,36 0 0,-1 0-15,0 0-1,-17 0 1,-19 0 0,-16 0-1,17 0 1,35 0-1,-53 0 1,0 0 0,18 0-1,-35 0-15,17 0 16,124-18 0,-36 18-1,-34 0 16,16 0-15,-16 0 0,34 0-1,36 0 1,-36 0 0,-17 0-1,-18 0 1,-35 0-16,-17 0 15,-1 0-15,35 0 16,-17 0 0,18 0-1,-18 0 1,17 0 0,19 0-1,-1 0 1,18-17 15,-1 17-15,1-18-1,-53 18-15,18 0 16,70 0 0,-88 0-16,88-18 15,-18 18 1,1 0-1,17 0 1,0-17 0,-18 17-1,-17 0 1,0-18 0,-18 18-1,-35 0 1,-17 0-1,-19 0 1,36-18-16,-18 18 16,89-17-1,-54 17 1,36 0 0,-18 0-1,-35 0 1,0-18-1,-17 18 1,-19 0 0,18 0-1</inkml:trace>
   <inkml:trace contextRef="#ctx0" brushRef="#br0" timeOffset="66855.92">9719 12541 0,'18'0'282,"-1"0"-251,1 0 0,0 0 0,-1 0 16,1 0-31,-1 0 0,1 0-1,0 0 1,35 0-1,-18 0-15,71 0 16,17 0 0,-17 0-1,-18 0 1,-52 0 0</inkml:trace>
   <inkml:trace contextRef="#ctx0" brushRef="#br0" timeOffset="67527.89">14799 12700 0,'18'0'16</inkml:trace>
-  <inkml:trace contextRef="#ctx0" brushRef="#br0" timeOffset="68528.21">14041 12700 0,'17'0'109,"71"0"-93,89-18 0,17 1-1,0-1 1,-71 0 0,-87 18-1,-19 0 1</inkml:trace>
+  <inkml:trace contextRef="#ctx0" brushRef="#br0" timeOffset="68528.2">14041 12700 0,'17'0'109,"71"0"-93,89-18 0,17 1-1,0-1 1,-71 0 0,-87 18-1,-19 0 1</inkml:trace>
   <inkml:trace contextRef="#ctx0" brushRef="#br0" timeOffset="73528.52">2734 12753 0,'18'0'109,"-1"0"-78,1-18 1,17 18-17,36 0 1,35-17 0,-1-1-1,-16 0 1,-54 18-1,0 0 1,-17 0 0,-1 0-1,1 0 1,-18-17 0,18 17-16,35-18 15,70 0 1,-17 1 15,35-1-15,-53 18-1,-52-17 1,-19 17 0,-17-18 343,-17 0-328,-1 18-15,0-17 15,1 17 0,17-18-15,-18 18-16,18-18 16,-35 18-1,17-17 1,0-1 15,1 18 0,-1 0-15,36 0 93,-1 0-77,1 0-17,-18 18 1,35-18-1,-35 17 1,18 1 0,35 0-1,0-1 1,-53 1-16,17-18 16,19 18-16,-36-1 15,35 1 1,-17 17 15,-18-17-15,0 17-1,0-17 1,-18-1 0,0 19-1,1-19 1,-1-17 15</inkml:trace>
   <inkml:trace contextRef="#ctx0" brushRef="#br0" timeOffset="83111.89">9507 13917 0,'18'0'234,"105"0"-218,36 0-1,-35 0 1,-54 0 0,-34 0-1,-19 0 63,36 0-62,-18 0-16,54 0 16,-19-18-1,1 18 1,-54 0-1,36-17 1,-17 17 0,-1 0-1,-18 0 1</inkml:trace>
   <inkml:trace contextRef="#ctx0" brushRef="#br0" timeOffset="83728.64">11624 14023 0,'18'0'31,"52"-18"-15,212 18 30,-52 0-30,-72 0 0,-52 0-1,-35-17 1</inkml:trace>
@@ -510,7 +510,7 @@
   <inkml:trace contextRef="#ctx0" brushRef="#br0" timeOffset="74815.69">18256 8378 0,'18'0'46,"35"-17"1,0-1-31,17 1 0,-17-1-1,0 18 1,-35 0-1,-18-18 1</inkml:trace>
   <inkml:trace contextRef="#ctx0" brushRef="#br0" timeOffset="77886.56">16245 9172 0,'71'0'125,"211"0"-93,-17 0-1,-124 0 0,-53 0 0,-70 0 1</inkml:trace>
   <inkml:trace contextRef="#ctx0" brushRef="#br0" timeOffset="79703.39">19597 8961 0,'17'0'62,"19"0"-46,87 0 0,36 17-1,-71-17-15,-17 0 16,17 18-16,-35-18 16,53 17-1,-18-17 1,-18 0-1,1 0 1,0 0 0,-19 0-1,1 0 1,-35 0 0,17 0-16,36 18 31,17-18-31,-35 0 31,-35 0-31,-1 0 16,18 18-1</inkml:trace>
-  <inkml:trace contextRef="#ctx0" brushRef="#br0" timeOffset="81308.96">7743 9984 0,'18'0'110,"70"0"-95,53 0 1,53 17 0,18 1-1,-88 0 1,-89-18-16</inkml:trace>
+  <inkml:trace contextRef="#ctx0" brushRef="#br0" timeOffset="81308.95">7743 9984 0,'18'0'110,"70"0"-95,53 0 1,53 17 0,18 1-1,-88 0 1,-89-18-16</inkml:trace>
   <inkml:trace contextRef="#ctx0" brushRef="#br0" timeOffset="82431.78">10425 10019 0,'88'0'94,"265"0"-63,352 0 0,-423 0-15,-35 0 0,-35 0-1,-18 0 1,0 18 0,0-18-1,35 17 1,1 1-1,-89-18 1,-88 0-16,-18 0 16,0 0-16,18 0 15,88 0 1,-53 0 0,18 0-1,53 0 32,-71 0-31,0-18-1,18 1 1,-35 17 0,-18 0-1,-18 0-15,0 0 16,-17 0-1,17 0-15</inkml:trace>
   <inkml:trace contextRef="#ctx0" brushRef="#br0" timeOffset="84520.63">8026 10848 0,'17'0'328,"1"0"-313,70 0 1,-17-18 0,-36 18-16,18 0 15</inkml:trace>
   <inkml:trace contextRef="#ctx0" brushRef="#br0" timeOffset="86302.84">10160 10848 0,'18'0'78,"17"0"-62,124-18 0,70 1-1,-141-1-15,36 18 16,70-18-1,-124 1-15,1 17 16</inkml:trace>
@@ -650,7 +650,7 @@
   <inkml:trace contextRef="#ctx0" brushRef="#br0" timeOffset="32252.98">7056 11571 0</inkml:trace>
   <inkml:trace contextRef="#ctx0" brushRef="#br0" timeOffset="34246.44">8855 11642 0,'17'0'188,"72"0"-173,-19 0 16,-17 0-15,-18 0 0,1 0-1,-19 0 235,1 0-234,0 0 15,-1 0-15,18 0-1,1 0 1,-1 0 0,-17 0-1,-1 0 1,1 0 0,0 0 15,-1 0-16,1 0 1</inkml:trace>
   <inkml:trace contextRef="#ctx0" brushRef="#br0" timeOffset="35077.68">3775 12365 0,'17'0'125,"142"0"-93,-35 0-1,-54 0-16,-35 0 1,1 0 0</inkml:trace>
-  <inkml:trace contextRef="#ctx0" brushRef="#br0" timeOffset="40221.23">14005 16069 0,'-17'0'47,"17"-18"-16,0-35-15,0 36-1,0-36 1,0-35 0,0 0-1,17-1 1,-17 1 0,18-18-1,-18-52 1,18 34-1,-1 18 1,-17 18 0,0 53-16,18-1 15,-18-87 1,17 35 0,1 17 15,0-17-16,-18 18 1,35-1 0,-17 0-1,-1-17 1,1 18 0,-18-1-1,18 53-15,-18-17 16,0-18-1,0 18-15,17-36 16,1 19 0,-18-19-1,0 36 1,18-18 0,-18 17-1,17 1 16,-17 0-15,0 17 0,0 1-1,0-19 1,18 36 0,-18-17-16,0 87 406,0-34-391,-35 16 1,17 1 0,0-35-1,18 0 63,-17-1-62,17 1-16,0 0 31,-18-1-15,0-17 0,18 18 155,-17 17-155,-1-35 0,18 18-1,-18-1 1,18 1 0,0-36 155,0-52-155,18 35 0,-18-1-1,18 1 1,-1 0 0,1-1-1,0 19 16,-18-1-15,0 1 0,17 17-1,-17-18 1,18 18 62,0 0-62,-1 18-1,1 34 1,17 1 0,-17 0 15,-1-35-31,1 17 15,0 1 1,-1-19 0,-17 1-1,18-18 1</inkml:trace>
+  <inkml:trace contextRef="#ctx0" brushRef="#br0" timeOffset="40221.22">14005 16069 0,'-17'0'47,"17"-18"-16,0-35-15,0 36-1,0-36 1,0-35 0,0 0-1,17-1 1,-17 1 0,18-18-1,-18-52 1,18 34-1,-1 18 1,-17 18 0,0 53-16,18-1 15,-18-87 1,17 35 0,1 17 15,0-17-16,-18 18 1,35-1 0,-17 0-1,-1-17 1,1 18 0,-18-1-1,18 53-15,-18-17 16,0-18-1,0 18-15,17-36 16,1 19 0,-18-19-1,0 36 1,18-18 0,-18 17-1,17 1 16,-17 0-15,0 17 0,0 1-1,0-19 1,18 36 0,-18-17-16,0 87 406,0-34-391,-35 16 1,17 1 0,0-35-1,18 0 63,-17-1-62,17 1-16,0 0 31,-18-1-15,0-17 0,18 18 155,-17 17-155,-1-35 0,18 18-1,-18-1 1,18 1 0,0-36 155,0-52-155,18 35 0,-18-1-1,18 1 1,-1 0 0,1-1-1,0 19 16,-18-1-15,0 1 0,17 17-1,-17-18 1,18 18 62,0 0-62,-1 18-1,1 34 1,17 1 0,-17 0 15,-1-35-31,1 17 15,0 1 1,-1-19 0,-17 1-1,18-18 1</inkml:trace>
   <inkml:trace contextRef="#ctx0" brushRef="#br0" timeOffset="42702.23">17163 9596 0,'17'0'156,"1"0"-109,35 0-16,-18 0 0,-17 0-15,-1 0 0,1 0-1,0 0 1,-1 0 0,1 0-1,0 0 1,-1 0-1,1 0 1,-1 0 0,1 0-1,17 0 1,1 0 0,-1 0-1,0 0 16,-17 0 16</inkml:trace>
   <inkml:trace contextRef="#ctx0" brushRef="#br0" timeOffset="43828.08">21678 12224 0,'18'0'93,"35"0"-77,17-18 0,1 18-1,-18 0-15,17 0 16,19-18 0,-54 18-16,0 0 15,-35-17 1,18 17-1,-1 0 17,1 0-17</inkml:trace>
   <inkml:trace contextRef="#ctx0" brushRef="#br0" timeOffset="71936.32">28857 17216 0,'35'0'172,"18"0"-157,36-18 1,16 0-1,19 18 1,-36 0 0,-53 0-1,-17 0 63,0 0-46,-18-17 171</inkml:trace>
@@ -752,7 +752,7 @@
   <inkml:trace contextRef="#ctx0" brushRef="#br0" timeOffset="2466.54">7743 9190 0,'18'0'78,"0"0"-47,-1 0 0,19 0-15,-19 0 0,107 0-1,-1 0 1,18-18 0,-35 18-1,-53-17 1,-35 17-1,-1 0 17</inkml:trace>
   <inkml:trace contextRef="#ctx0" brushRef="#br0" timeOffset="4383.18">16316 10283 0,'18'0'172,"-1"0"-156,89 0-1,35 0 1,71 0 0,17 0-1,18-17 1,-141 17 0,-71 0 15,-17 0 0</inkml:trace>
   <inkml:trace contextRef="#ctx0" brushRef="#br0" timeOffset="5174.55">18644 10213 0,'18'0'47,"17"0"-31,36 0-1,-18-18 1,-18 1 0,-17 17-1,-1 0-15,1 0 63</inkml:trace>
-  <inkml:trace contextRef="#ctx0" brushRef="#br0" timeOffset="7742.47">7885 11377 0,'17'0'47,"107"0"-16,-54 0-15,142 0-1,17 0 1,53-18 0,36 18-1,-177 0-15,-35 0 16,123 0 0,-158 0-1,17 0-15,141 0 31,-105 0-15,-1 18 0,18-18-1,36 0 1,-19 0 0,1 18-1,-88-18 1,-54 0-1</inkml:trace>
+  <inkml:trace contextRef="#ctx0" brushRef="#br0" timeOffset="7742.46">7885 11377 0,'17'0'47,"107"0"-16,-54 0-15,142 0-1,17 0 1,53-18 0,36 18-1,-177 0-15,-35 0 16,123 0 0,-158 0-1,17 0-15,141 0 31,-105 0-15,-1 18 0,18-18-1,36 0 1,-19 0 0,1 18-1,-88-18 1,-54 0-1</inkml:trace>
 </inkml:ink>
 </file>
 
@@ -792,11 +792,11 @@
   <inkml:trace contextRef="#ctx0" brushRef="#br0" timeOffset="44539.45">20108 9737 0,'18'0'62,"0"0"-46,-1 0-16,19 0 16,69 0-1,36 0 1,1 0 0,-19 0-1,-88 0 1,36 0-1,-53 0 17,-1 0 30,18 0-31</inkml:trace>
   <inkml:trace contextRef="#ctx0" brushRef="#br0" timeOffset="45259.41">24218 9913 0,'18'0'172,"123"0"-156,-70-18-1,-1 18-15,36-17 31,-71 17-15</inkml:trace>
   <inkml:trace contextRef="#ctx0" brushRef="#br0" timeOffset="46873.14">16316 10460 0,'71'0'125,"34"0"-110,89-35 16,-88 35-15,-35 0 0,-18 0-1,-36 0 1,1 0 0,0 0-1,-1 0 16,-17-18-15,18 18 0</inkml:trace>
-  <inkml:trace contextRef="#ctx0" brushRef="#br0" timeOffset="60208.29">25135 11465 0,'36'0'109,"122"0"-93,142 18-1,-141-18 1,-53 18 0,-71-18 15</inkml:trace>
+  <inkml:trace contextRef="#ctx0" brushRef="#br0" timeOffset="60208.28">25135 11465 0,'36'0'109,"122"0"-93,142 18-1,-141-18 1,-53 18 0,-71-18 15</inkml:trace>
   <inkml:trace contextRef="#ctx0" brushRef="#br0" timeOffset="61156.47">29598 11624 0,'18'0'93,"158"0"-61,-88 0-1,-52 0 0</inkml:trace>
   <inkml:trace contextRef="#ctx0" brushRef="#br0" timeOffset="62406.38">17374 12224 0,'18'0'94,"0"0"-78,17 0-1,0 0 1,36-18 0,-18 18-1,-18 0 1,0 0-1,-17 0 79</inkml:trace>
   <inkml:trace contextRef="#ctx0" brushRef="#br0" timeOffset="64809.44">20443 11942 0,'0'17'94,"0"36"-79,0 0-15,0 0 16,0 35 0,-17-35-16,-1 35 15,18 0 1,0-17 0,-17 0-1,17-19 1,0-16-1,-18 17 1,18-18 0,0 0-1,-18-35 48,18 18-48,-17-18 1,-1-71 0,0 18-1,-35-17 1,18-1 0,18 36-1,34 35 79,18 53-63,-17-35-31,17-1 31,-17-17 16,17-17-31,1-36 0,34-18-1,-35 53-15,-17-17 16,0 35-16,-1-18 15,19-17 1</inkml:trace>
-  <inkml:trace contextRef="#ctx0" brushRef="#br0" timeOffset="68673.41">17268 15099 0,'18'0'62,"88"0"-31,0 0-15,35 0 0,18 0-1,-1 0 1,-52 0 0,-53 0-1,-35 0 1,-1 0-1</inkml:trace>
+  <inkml:trace contextRef="#ctx0" brushRef="#br0" timeOffset="68673.4">17268 15099 0,'18'0'62,"88"0"-31,0 0-15,35 0 0,18 0-1,-1 0 1,-52 0 0,-53 0-1,-35 0 1,-1 0-1</inkml:trace>
   <inkml:trace contextRef="#ctx0" brushRef="#br0" timeOffset="75206.13">24448 15293 0,'105'-18'78,"213"-35"-63,-18 0 1,-89 18 0,-52 18-1,-141 17 16</inkml:trace>
   <inkml:trace contextRef="#ctx0" brushRef="#br0" timeOffset="83145.84">18627 16863 0,'17'0'125,"19"0"-109,387 0-1,88 0 1,36 0 0,-176 35-1,-195-35 1,-158 0 0</inkml:trace>
   <inkml:trace contextRef="#ctx0" brushRef="#br0" timeOffset="84240.16">21872 16828 0,'36'0'141,"69"0"-126,266 0 16,-301 0-31,-17 0 16,-18 0 0</inkml:trace>
@@ -844,8 +844,8 @@
   <inkml:trace contextRef="#ctx0" brushRef="#br0" timeOffset="130017.18">4974 17251 0,'18'0'203,"88"0"-171,-89 0-17,36 0 1,18 0 0,-36 0-1,-17 0 345,140-18-329,-122 18-16,17 0 1,-36 0-16,1 0 16</inkml:trace>
   <inkml:trace contextRef="#ctx0" brushRef="#br0" timeOffset="130647.83">7779 17286 0,'123'0'93,"89"0"-77,405 0 0,-317 0-1,-212 0 1,-70 0 0</inkml:trace>
   <inkml:trace contextRef="#ctx0" brushRef="#br0" timeOffset="132970.1">10654 17233 0,'18'0'297,"-1"0"-282,18-17 1,-17 17-1,0 0 1,52-36 250,-34 19-251,-1-1 1,0 0 0,-17 18-1,-71 0 173,-229 89-173,141-54 17,176-35 77,-18-18-93,1 1 155,35-1-139,-35 18-1,-1 0 47,1 0 94</inkml:trace>
-  <inkml:trace contextRef="#ctx0" brushRef="#br0" timeOffset="155959.92">24853 18397 0,'0'-35'109,"0"0"-93,0 0-1,0-1 1,0-17 0,0 0-1,0 36 1,0-36-1,0 35-15,0-52 16,0 34 0,0 1-1,0 0 1,0-18 0,0 0 15,0 18-31,0-18 31,0 35-15,0 1-1,0-1 1,0 0 0,0 1-16,-17 17 265,17 17-249,-18-17-16,0 0 15,18 18 1,-17 0 0,-1-18-1,18 17 17,-18-17-1,18 18-31,-17-18 15,-1 35 1,0-17 0,1-1-1,-1 1 1,18 0 0,18-71 202,-1 35-202,1-35 0,17 0-1,-17 36 1,-18-1-1,0 0-15,18 1 16,-1 17 15,-17-18-15,18 0 0,0 18 62,-1 0-63,1 0 32,-1 18-31,1 0 15,17 35-15,-17-36-1,17 19 1,-35-1 0,18-35 15,0 17 0,-1 1 16,1 0-16,-36-18 219,18 17-234,-17-17-1,-1 0 17,-17 0-17,17 0 1,0 0 0,-17 0-1,0 18 16,-18-18-15,35 0 0,-17 0-1,17 0 1,1 0 0,-19 0-1,19 0 1,17-35 343,70-89-328,-52 107-15,0-1 0,-18 0-16,17 18 15,1 0 95,0 36-79,-18-19-31,0 1 47,0 0 31,0 17-62,17 0-1,-17-17 1,0-36 124,0-17-124,0 17 0,18 18 15,-1 0 0,1 0-15,0 0-1,-1 0 173,1 18-172,-18 17-1,18 18 1,-18-18-1,0-17 1,-18-18 47,0 0-32,1 0 0,-1 0 0,0 0-15,18-18 0,-17 1-1,17-1 32,-18 18-31,1 0 249,-19 0-233,-52 0-1,70 0-16,1 0 1,17-18 93,35-17-77,18 0-32,35 17 31,-53 1-31,71-1 31,-53 0 0,-35 18 16,-18 18 0,0 0-16,-18-18 32,1 0-47,-1 0-1,0 0 16,1 0 16,-1 0-31</inkml:trace>
-  <inkml:trace contextRef="#ctx0" brushRef="#br0" timeOffset="165643.88">10583 18309 0,'18'0'109,"0"0"-93,70 0 15,35-17-15,-17 17-1,18-18 1,-36 18 0,0 0-1,18 0 1,17 0-1,-17 0 1,18 0 0,-71 0-16,-1 0 15,72 0 1,-230 0 375,-88-18-376,-71 1 1,36-1-1,211 18 1,1 0 0,-1 0 62,-35 0-63,-17-18 1,17 18 0,18 0-16,17 0 15,71-17 95,88-1-95,53 18 1,71 0 0,-160 18-1,-16-18-15,-1 17 31,-88 1 1,-35-18-17,-36 0 1,-17 0 0,-71 0-1,-35 0 1,70 0-1,54 0 1,-1 0 156,36 0-156,0 0-16,17 0 15</inkml:trace>
+  <inkml:trace contextRef="#ctx0" brushRef="#br0" timeOffset="155959.91">24853 18397 0,'0'-35'109,"0"0"-93,0 0-1,0-1 1,0-17 0,0 0-1,0 36 1,0-36-1,0 35-15,0-52 16,0 34 0,0 1-1,0 0 1,0-18 0,0 0 15,0 18-31,0-18 31,0 35-15,0 1-1,0-1 1,0 0 0,0 1-16,-17 17 265,17 17-249,-18-17-16,0 0 15,18 18 1,-17 0 0,-1-18-1,18 17 17,-18-17-1,18 18-31,-17-18 15,-1 35 1,0-17 0,1-1-1,-1 1 1,18 0 0,18-71 202,-1 35-202,1-35 0,17 0-1,-17 36 1,-18-1-1,0 0-15,18 1 16,-1 17 15,-17-18-15,18 0 0,0 18 62,-1 0-63,1 0 32,-1 18-31,1 0 15,17 35-15,-17-36-1,17 19 1,-35-1 0,18-35 15,0 17 0,-1 1 16,1 0-16,-36-18 219,18 17-234,-17-17-1,-1 0 17,-17 0-17,17 0 1,0 0 0,-17 0-1,0 18 16,-18-18-15,35 0 0,-17 0-1,17 0 1,1 0 0,-19 0-1,19 0 1,17-35 343,70-89-328,-52 107-15,0-1 0,-18 0-16,17 18 15,1 0 95,0 36-79,-18-19-31,0 1 47,0 0 31,0 17-62,17 0-1,-17-17 1,0-36 124,0-17-124,0 17 0,18 18 15,-1 0 0,1 0-15,0 0-1,-1 0 173,1 18-172,-18 17-1,18 18 1,-18-18-1,0-17 1,-18-18 47,0 0-32,1 0 0,-1 0 0,0 0-15,18-18 0,-17 1-1,17-1 32,-18 18-31,1 0 249,-19 0-233,-52 0-1,70 0-16,1 0 1,17-18 93,35-17-77,18 0-32,35 17 31,-53 1-31,71-1 31,-53 0 0,-35 18 16,-18 18 0,0 0-16,-18-18 32,1 0-47,-1 0-1,0 0 16,1 0 16,-1 0-31</inkml:trace>
+  <inkml:trace contextRef="#ctx0" brushRef="#br0" timeOffset="165643.87">10583 18309 0,'18'0'109,"0"0"-93,70 0 15,35-17-15,-17 17-1,18-18 1,-36 18 0,0 0-1,18 0 1,17 0-1,-17 0 1,18 0 0,-71 0-16,-1 0 15,72 0 1,-230 0 375,-88-18-376,-71 1 1,36-1-1,211 18 1,1 0 0,-1 0 62,-35 0-63,-17-18 1,17 18 0,18 0-16,17 0 15,71-17 95,88-1-95,53 18 1,71 0 0,-160 18-1,-16-18-15,-1 17 31,-88 1 1,-35-18-17,-36 0 1,-17 0 0,-71 0-1,-35 0 1,70 0-1,54 0 1,-1 0 156,36 0-156,0 0-16,17 0 15</inkml:trace>
   <inkml:trace contextRef="#ctx0" brushRef="#br0" timeOffset="172223.98">27146 16792 0,'88'0'188,"54"0"-157,-107 0-15,35-17-1,1 17 1,-36 0 0,-17 0-1,-1-18 1,1 18-16,0 0 15,70 0 1,-17 0 0,-19 0-1,-16 0 1,-19 0 0,19 0-1,17 0 16,-18 0-15,-18 0 0</inkml:trace>
   <inkml:trace contextRef="#ctx0" brushRef="#br0" timeOffset="173688.95">27446 17480 0,'0'-18'78,"106"1"-47,17-18 0,89 35 0,-106 0-15,-18-18 0,-35 18-1,-35 0 1,-1 0 0,19 0-1,-19 0-15,36 0 16,-18-18-16,18 18 15,53 0 1,-88 0 0</inkml:trace>
 </inkml:ink>
@@ -1013,7 +1013,7 @@
   <inkml:trace contextRef="#ctx0" brushRef="#br0" timeOffset="8738.71">8749 10566 0,'-18'0'15,"1"0"1,87-71 109,54 18-109,17-35-1,18 17 1,-107 36 0,1 0-1,-17 17 16,-19 1-15,1-1 0,0 18-1,-36 0 329,-70 0-328,52 0-1,1 0 1,53-18 218,35 1-218,-18 17 0,-17 0-1,-18 35 266,0 0-265,-18-17 0,18 17-16,0-17 15,0-1-15,0 1 16,-18-18-16</inkml:trace>
   <inkml:trace contextRef="#ctx0" brushRef="#br0" timeOffset="16302.48">8079 11377 0,'17'0'204,"265"-70"-173,-193 52-16,69-17 1,-122 17 0,-19 18-1,-17-18 17,18 1-17,17-1 1,1 0-1,-19 1 1,18-1 0,-17 0-16,0 1 15,17-1 1,-35 1 46,-18 17 392,-52 0-439,-18 0 1,35 0 15,17 0-31,1 0 16,17 0-1,1 0 1,70 0 109,88-18-109,-53 0-16,-35 18 15,106-17 16,-124 17-15,-35 70 78,0-52-79,-18 35 1,1-18 0,17-17 31</inkml:trace>
   <inkml:trace contextRef="#ctx0" brushRef="#br0" timeOffset="20725.03">14728 10037 0,'0'17'94,"-52"18"-78,-1 1-1,17-19 1,1 1 0,17 0-1,1-1 16,-36 19-15,18-1 0,-18-18-1,17 19 1,19-19 0,-1-17-1,1 0 188,17-35-171,0-35-1,17 34-16,-17 19 1,18 17 140,-18 17-124,0 36-17,0-35 1,0 35-16,0-36 31,0 1 16,53-18 703,-36 0-734,1 0-1,-18-18 1,18 18 46,-18-17 485,0-1-531,-36-17-1,36 17 1</inkml:trace>
-  <inkml:trace contextRef="#ctx0" brushRef="#br0" timeOffset="29658.13">8273 12771 0,'0'-18'78,"247"-88"-47,35 0 0,-194 71 0,-70 17-15,17 1 0,0-19-1,-17 19 1,17-1 0,0-17-1,1 17 1,-1 1-1,-17-1-15,-1 0 16,36 1 0,0-19-1,-18 1 1,1 17 0,-19 1 15,19-1-16,-1 1 1,-70 17 218,-18 0-202,-53 0-17,71 0 1,-1 0 0,36-18 124,53 0-109,-18 1-15,-17 17 0,0 0-1,-1 0 1,1 17 0,0 1-1,-18 0 1,17-1-1,-17 1 1,0-1 0,18-17-16,-18 18 31,0 0-15,0-1 155,0 1-155,0 17 0,0-17-1</inkml:trace>
+  <inkml:trace contextRef="#ctx0" brushRef="#br0" timeOffset="29658.12">8273 12771 0,'0'-18'78,"247"-88"-47,35 0 0,-194 71 0,-70 17-15,17 1 0,0-19-1,-17 19 1,17-1 0,0-17-1,1 17 1,-1 1-1,-17-1-15,-1 0 16,36 1 0,0-19-1,-18 1 1,1 17 0,-19 1 15,19-1-16,-1 1 1,-70 17 218,-18 0-202,-53 0-17,71 0 1,-1 0 0,36-18 124,53 0-109,-18 1-15,-17 17 0,0 0-1,-1 0 1,1 17 0,0 1-1,-18 0 1,17-1-1,-17 1 1,0-1 0,18-17-16,-18 18 31,0 0-15,0-1 155,0 1-155,0 17 0,0-17-1</inkml:trace>
   <inkml:trace contextRef="#ctx0" brushRef="#br0" timeOffset="34671.58">6773 14393 0,'0'0'0,"71"-17"31,35 17-15,-36 0-16,54-18 15,-18-17 1,-36 17-1,-17-17 1,18 17 0,-1-17-1,1 0 1,52-36 0,-35 36-1,-17 0 16,0-1-15,-1 1 0,-35 0-16,18-1 15,35 1 1,-35-18 0,0 18-1,18 0 1,17-1-1,35-17 1,-17-17 0,-17 52-1,-19-17 1,-35 17-16,-17 18 16,0-17 15,-1 17-31,19-18 15,16-17 1,-34 35 0,0-18-1,-1 18 1,36-35 0,0 0-1,35 17 1,-17-17-1,35-1 1,-71 36-16,0-17 16,1 17-1,-107 0 376,36 0-375,0 0-1,-1 0 1,19 0 15,-1 0 94,-35 0-94,0 0 1,36 0-1,-1 0 0,0 0 0,18 17 47,18-17 110,123-17-157,-18-18 0,-70 35-15,-17 0 0,-19 0 62,-17 70 16,-17-17-79,-1-18 16,18-17-15,-18 17 0,18-17-1,0-1-15</inkml:trace>
   <inkml:trace contextRef="#ctx0" brushRef="#br0" timeOffset="50327.84">23918 10125 0,'-35'35'109,"0"0"-93,17-35-16,-35 36 15,18-1 1,17 0-16,-17-35 16,35 18-1,-18-18-15,1 17 31,-1 1-15,0 0 0,18-1-1,-17 1 1,-1 0 0,-35-1-1,18 19 1,-18-1-1,35-18 1,1-17 281,17-52-266,17 34-31,1-53 31,0 36-15,-1 0 0,-17 17-1,18 0 1,0 18 78,-18 36-47,-18 17-16,18-18-16,-35 0 1,35-17-16,0 0 16,-18 17-1,18-18 79,0 1-78,18-36 187,35 1-188,0-1 1,-18 1 0,-18-1-16,1 18 15</inkml:trace>
   <inkml:trace contextRef="#ctx0" brushRef="#br0" timeOffset="53951.74">8978 14852 0,'35'-18'140,"54"-17"-124,-1 17 0,0 18-1,0-35 1,-35 35 0,18-18-1,-1 1 1,1-1-1,-36 1 1,-17 17 0,17 0-1,-17-18-15,17 18 16,-17-18 0,-18 1 171,17 17-171,-52-18 31,-71 0-16,53 18-16,-17-17 1,17 17 0,17 0-1,19 0 1,52-18 46,141 18-30,-34 0-1,-90 0 0,-52 18-31,36-1 31,-36 1-15,0 17-16,0-17 16,-18 35-1,0-53 1,18 17 0</inkml:trace>
@@ -1103,7 +1103,7 @@
           <a:p>
             <a:fld id="{E8D4F193-0B1A-45D5-B227-EC4FDC03B008}" type="datetimeFigureOut">
               <a:rPr lang="en-IE" smtClean="0"/>
-              <a:t>12/11/2025</a:t>
+              <a:t>20/04/2026</a:t>
             </a:fld>
             <a:endParaRPr lang="en-IE"/>
           </a:p>
@@ -1455,6 +1455,90 @@
 </p:notes>
 </file>
 
+<file path=ppt/notesSlides/notesSlide2.xml><?xml version="1.0" encoding="utf-8"?>
+<p:notes xmlns:a="http://schemas.openxmlformats.org/drawingml/2006/main" xmlns:r="http://schemas.openxmlformats.org/officeDocument/2006/relationships" xmlns:p="http://schemas.openxmlformats.org/presentationml/2006/main">
+  <p:cSld>
+    <p:spTree>
+      <p:nvGrpSpPr>
+        <p:cNvPr id="1" name=""/>
+        <p:cNvGrpSpPr/>
+        <p:nvPr/>
+      </p:nvGrpSpPr>
+      <p:grpSpPr>
+        <a:xfrm>
+          <a:off x="0" y="0"/>
+          <a:ext cx="0" cy="0"/>
+          <a:chOff x="0" y="0"/>
+          <a:chExt cx="0" cy="0"/>
+        </a:xfrm>
+      </p:grpSpPr>
+      <p:sp>
+        <p:nvSpPr>
+          <p:cNvPr id="2" name="Slide Image Placeholder 1"/>
+          <p:cNvSpPr>
+            <a:spLocks noGrp="1" noRot="1" noChangeAspect="1"/>
+          </p:cNvSpPr>
+          <p:nvPr>
+            <p:ph type="sldImg"/>
+          </p:nvPr>
+        </p:nvSpPr>
+        <p:spPr/>
+      </p:sp>
+      <p:sp>
+        <p:nvSpPr>
+          <p:cNvPr id="3" name="Notes Placeholder 2"/>
+          <p:cNvSpPr>
+            <a:spLocks noGrp="1"/>
+          </p:cNvSpPr>
+          <p:nvPr>
+            <p:ph type="body" idx="1"/>
+          </p:nvPr>
+        </p:nvSpPr>
+        <p:spPr/>
+        <p:txBody>
+          <a:bodyPr/>
+          <a:lstStyle/>
+          <a:p>
+            <a:endParaRPr lang="en-IE" dirty="0"/>
+          </a:p>
+        </p:txBody>
+      </p:sp>
+      <p:sp>
+        <p:nvSpPr>
+          <p:cNvPr id="4" name="Slide Number Placeholder 3"/>
+          <p:cNvSpPr>
+            <a:spLocks noGrp="1"/>
+          </p:cNvSpPr>
+          <p:nvPr>
+            <p:ph type="sldNum" sz="quarter" idx="5"/>
+          </p:nvPr>
+        </p:nvSpPr>
+        <p:spPr/>
+        <p:txBody>
+          <a:bodyPr/>
+          <a:lstStyle/>
+          <a:p>
+            <a:fld id="{6658DC8F-AF75-4556-8DF5-4C55FD00B975}" type="slidenum">
+              <a:rPr lang="en-IE" smtClean="0"/>
+              <a:t>20</a:t>
+            </a:fld>
+            <a:endParaRPr lang="en-IE"/>
+          </a:p>
+        </p:txBody>
+      </p:sp>
+    </p:spTree>
+    <p:extLst>
+      <p:ext uri="{BB962C8B-B14F-4D97-AF65-F5344CB8AC3E}">
+        <p14:creationId xmlns:p14="http://schemas.microsoft.com/office/powerpoint/2010/main" val="3787805858"/>
+      </p:ext>
+    </p:extLst>
+  </p:cSld>
+  <p:clrMapOvr>
+    <a:masterClrMapping/>
+  </p:clrMapOvr>
+</p:notes>
+</file>
+
 <file path=ppt/slideLayouts/slideLayout1.xml><?xml version="1.0" encoding="utf-8"?>
 <p:sldLayout xmlns:a="http://schemas.openxmlformats.org/drawingml/2006/main" xmlns:r="http://schemas.openxmlformats.org/officeDocument/2006/relationships" xmlns:p="http://schemas.openxmlformats.org/presentationml/2006/main" type="title" preserve="1">
   <p:cSld name="Title Slide">
@@ -1604,7 +1688,7 @@
           <a:p>
             <a:fld id="{31FABD58-09F1-4112-9FB1-2CAFF72B0B57}" type="datetimeFigureOut">
               <a:rPr lang="en-IE" smtClean="0"/>
-              <a:t>12/11/2025</a:t>
+              <a:t>20/04/2026</a:t>
             </a:fld>
             <a:endParaRPr lang="en-IE"/>
           </a:p>
@@ -1804,7 +1888,7 @@
           <a:p>
             <a:fld id="{31FABD58-09F1-4112-9FB1-2CAFF72B0B57}" type="datetimeFigureOut">
               <a:rPr lang="en-IE" smtClean="0"/>
-              <a:t>12/11/2025</a:t>
+              <a:t>20/04/2026</a:t>
             </a:fld>
             <a:endParaRPr lang="en-IE"/>
           </a:p>
@@ -2014,7 +2098,7 @@
           <a:p>
             <a:fld id="{31FABD58-09F1-4112-9FB1-2CAFF72B0B57}" type="datetimeFigureOut">
               <a:rPr lang="en-IE" smtClean="0"/>
-              <a:t>12/11/2025</a:t>
+              <a:t>20/04/2026</a:t>
             </a:fld>
             <a:endParaRPr lang="en-IE"/>
           </a:p>
@@ -2214,7 +2298,7 @@
           <a:p>
             <a:fld id="{31FABD58-09F1-4112-9FB1-2CAFF72B0B57}" type="datetimeFigureOut">
               <a:rPr lang="en-IE" smtClean="0"/>
-              <a:t>12/11/2025</a:t>
+              <a:t>20/04/2026</a:t>
             </a:fld>
             <a:endParaRPr lang="en-IE"/>
           </a:p>
@@ -2490,7 +2574,7 @@
           <a:p>
             <a:fld id="{31FABD58-09F1-4112-9FB1-2CAFF72B0B57}" type="datetimeFigureOut">
               <a:rPr lang="en-IE" smtClean="0"/>
-              <a:t>12/11/2025</a:t>
+              <a:t>20/04/2026</a:t>
             </a:fld>
             <a:endParaRPr lang="en-IE"/>
           </a:p>
@@ -2758,7 +2842,7 @@
           <a:p>
             <a:fld id="{31FABD58-09F1-4112-9FB1-2CAFF72B0B57}" type="datetimeFigureOut">
               <a:rPr lang="en-IE" smtClean="0"/>
-              <a:t>12/11/2025</a:t>
+              <a:t>20/04/2026</a:t>
             </a:fld>
             <a:endParaRPr lang="en-IE"/>
           </a:p>
@@ -3173,7 +3257,7 @@
           <a:p>
             <a:fld id="{31FABD58-09F1-4112-9FB1-2CAFF72B0B57}" type="datetimeFigureOut">
               <a:rPr lang="en-IE" smtClean="0"/>
-              <a:t>12/11/2025</a:t>
+              <a:t>20/04/2026</a:t>
             </a:fld>
             <a:endParaRPr lang="en-IE"/>
           </a:p>
@@ -3315,7 +3399,7 @@
           <a:p>
             <a:fld id="{31FABD58-09F1-4112-9FB1-2CAFF72B0B57}" type="datetimeFigureOut">
               <a:rPr lang="en-IE" smtClean="0"/>
-              <a:t>12/11/2025</a:t>
+              <a:t>20/04/2026</a:t>
             </a:fld>
             <a:endParaRPr lang="en-IE"/>
           </a:p>
@@ -3428,7 +3512,7 @@
           <a:p>
             <a:fld id="{31FABD58-09F1-4112-9FB1-2CAFF72B0B57}" type="datetimeFigureOut">
               <a:rPr lang="en-IE" smtClean="0"/>
-              <a:t>12/11/2025</a:t>
+              <a:t>20/04/2026</a:t>
             </a:fld>
             <a:endParaRPr lang="en-IE"/>
           </a:p>
@@ -3741,7 +3825,7 @@
           <a:p>
             <a:fld id="{31FABD58-09F1-4112-9FB1-2CAFF72B0B57}" type="datetimeFigureOut">
               <a:rPr lang="en-IE" smtClean="0"/>
-              <a:t>12/11/2025</a:t>
+              <a:t>20/04/2026</a:t>
             </a:fld>
             <a:endParaRPr lang="en-IE"/>
           </a:p>
@@ -4030,7 +4114,7 @@
           <a:p>
             <a:fld id="{31FABD58-09F1-4112-9FB1-2CAFF72B0B57}" type="datetimeFigureOut">
               <a:rPr lang="en-IE" smtClean="0"/>
-              <a:t>12/11/2025</a:t>
+              <a:t>20/04/2026</a:t>
             </a:fld>
             <a:endParaRPr lang="en-IE"/>
           </a:p>
@@ -4273,7 +4357,7 @@
           <a:p>
             <a:fld id="{31FABD58-09F1-4112-9FB1-2CAFF72B0B57}" type="datetimeFigureOut">
               <a:rPr lang="en-IE" smtClean="0"/>
-              <a:t>12/11/2025</a:t>
+              <a:t>20/04/2026</a:t>
             </a:fld>
             <a:endParaRPr lang="en-IE"/>
           </a:p>
@@ -5669,8 +5753,8 @@
           </a:prstGeom>
         </p:spPr>
       </p:pic>
-      <mc:AlternateContent xmlns:mc="http://schemas.openxmlformats.org/markup-compatibility/2006">
-        <mc:Choice xmlns:p14="http://schemas.microsoft.com/office/powerpoint/2010/main" Requires="p14">
+      <mc:AlternateContent xmlns:mc="http://schemas.openxmlformats.org/markup-compatibility/2006" xmlns:p14="http://schemas.microsoft.com/office/powerpoint/2010/main">
+        <mc:Choice Requires="p14">
           <p:contentPart p14:bwMode="auto" r:id="rId3">
             <p14:nvContentPartPr>
               <p14:cNvPr id="4" name="Ink 3">
@@ -5689,7 +5773,7 @@
             </p14:xfrm>
           </p:contentPart>
         </mc:Choice>
-        <mc:Fallback>
+        <mc:Fallback xmlns="">
           <p:pic>
             <p:nvPicPr>
               <p:cNvPr id="4" name="Ink 3">
@@ -5807,8 +5891,8 @@
           </a:xfrm>
         </p:spPr>
       </p:pic>
-      <mc:AlternateContent xmlns:mc="http://schemas.openxmlformats.org/markup-compatibility/2006">
-        <mc:Choice xmlns:p14="http://schemas.microsoft.com/office/powerpoint/2010/main" Requires="p14">
+      <mc:AlternateContent xmlns:mc="http://schemas.openxmlformats.org/markup-compatibility/2006" xmlns:p14="http://schemas.microsoft.com/office/powerpoint/2010/main">
+        <mc:Choice Requires="p14">
           <p:contentPart p14:bwMode="auto" r:id="rId3">
             <p14:nvContentPartPr>
               <p14:cNvPr id="3" name="Ink 2">
@@ -5827,7 +5911,7 @@
             </p14:xfrm>
           </p:contentPart>
         </mc:Choice>
-        <mc:Fallback>
+        <mc:Fallback xmlns="">
           <p:pic>
             <p:nvPicPr>
               <p:cNvPr id="3" name="Ink 2">
@@ -5969,8 +6053,8 @@
           </a:extLst>
         </p:spPr>
       </p:pic>
-      <mc:AlternateContent xmlns:mc="http://schemas.openxmlformats.org/markup-compatibility/2006">
-        <mc:Choice xmlns:p14="http://schemas.microsoft.com/office/powerpoint/2010/main" Requires="p14">
+      <mc:AlternateContent xmlns:mc="http://schemas.openxmlformats.org/markup-compatibility/2006" xmlns:p14="http://schemas.microsoft.com/office/powerpoint/2010/main">
+        <mc:Choice Requires="p14">
           <p:contentPart p14:bwMode="auto" r:id="rId3">
             <p14:nvContentPartPr>
               <p14:cNvPr id="3" name="Ink 2">
@@ -5989,7 +6073,7 @@
             </p14:xfrm>
           </p:contentPart>
         </mc:Choice>
-        <mc:Fallback>
+        <mc:Fallback xmlns="">
           <p:pic>
             <p:nvPicPr>
               <p:cNvPr id="3" name="Ink 2">
@@ -6170,8 +6254,8 @@
           </a:p>
         </p:txBody>
       </p:sp>
-      <mc:AlternateContent xmlns:mc="http://schemas.openxmlformats.org/markup-compatibility/2006">
-        <mc:Choice xmlns:p14="http://schemas.microsoft.com/office/powerpoint/2010/main" Requires="p14">
+      <mc:AlternateContent xmlns:mc="http://schemas.openxmlformats.org/markup-compatibility/2006" xmlns:p14="http://schemas.microsoft.com/office/powerpoint/2010/main">
+        <mc:Choice Requires="p14">
           <p:contentPart p14:bwMode="auto" r:id="rId2">
             <p14:nvContentPartPr>
               <p14:cNvPr id="4" name="Ink 3">
@@ -6190,7 +6274,7 @@
             </p14:xfrm>
           </p:contentPart>
         </mc:Choice>
-        <mc:Fallback>
+        <mc:Fallback xmlns="">
           <p:pic>
             <p:nvPicPr>
               <p:cNvPr id="4" name="Ink 3">
@@ -6331,8 +6415,8 @@
           </a:prstGeom>
         </p:spPr>
       </p:pic>
-      <mc:AlternateContent xmlns:mc="http://schemas.openxmlformats.org/markup-compatibility/2006">
-        <mc:Choice xmlns:p14="http://schemas.microsoft.com/office/powerpoint/2010/main" Requires="p14">
+      <mc:AlternateContent xmlns:mc="http://schemas.openxmlformats.org/markup-compatibility/2006" xmlns:p14="http://schemas.microsoft.com/office/powerpoint/2010/main">
+        <mc:Choice Requires="p14">
           <p:contentPart p14:bwMode="auto" r:id="rId3">
             <p14:nvContentPartPr>
               <p14:cNvPr id="4" name="Ink 3">
@@ -6351,7 +6435,7 @@
             </p14:xfrm>
           </p:contentPart>
         </mc:Choice>
-        <mc:Fallback>
+        <mc:Fallback xmlns="">
           <p:pic>
             <p:nvPicPr>
               <p:cNvPr id="4" name="Ink 3">
@@ -7136,8 +7220,8 @@
           </a:p>
         </p:txBody>
       </p:sp>
-      <mc:AlternateContent xmlns:mc="http://schemas.openxmlformats.org/markup-compatibility/2006">
-        <mc:Choice xmlns:p14="http://schemas.microsoft.com/office/powerpoint/2010/main" Requires="p14">
+      <mc:AlternateContent xmlns:mc="http://schemas.openxmlformats.org/markup-compatibility/2006" xmlns:p14="http://schemas.microsoft.com/office/powerpoint/2010/main">
+        <mc:Choice Requires="p14">
           <p:contentPart p14:bwMode="auto" r:id="rId3">
             <p14:nvContentPartPr>
               <p14:cNvPr id="4" name="Ink 3">
@@ -7156,7 +7240,7 @@
             </p14:xfrm>
           </p:contentPart>
         </mc:Choice>
-        <mc:Fallback>
+        <mc:Fallback xmlns="">
           <p:pic>
             <p:nvPicPr>
               <p:cNvPr id="4" name="Ink 3">
@@ -7396,8 +7480,8 @@
           </a:p>
         </p:txBody>
       </p:sp>
-      <mc:AlternateContent xmlns:mc="http://schemas.openxmlformats.org/markup-compatibility/2006">
-        <mc:Choice xmlns:p14="http://schemas.microsoft.com/office/powerpoint/2010/main" Requires="p14">
+      <mc:AlternateContent xmlns:mc="http://schemas.openxmlformats.org/markup-compatibility/2006" xmlns:p14="http://schemas.microsoft.com/office/powerpoint/2010/main">
+        <mc:Choice Requires="p14">
           <p:contentPart p14:bwMode="auto" r:id="rId3">
             <p14:nvContentPartPr>
               <p14:cNvPr id="5" name="Ink 4">
@@ -7416,7 +7500,7 @@
             </p14:xfrm>
           </p:contentPart>
         </mc:Choice>
-        <mc:Fallback>
+        <mc:Fallback xmlns="">
           <p:pic>
             <p:nvPicPr>
               <p:cNvPr id="5" name="Ink 4">
@@ -7537,8 +7621,8 @@
           </a:prstGeom>
         </p:spPr>
       </p:pic>
-      <mc:AlternateContent xmlns:mc="http://schemas.openxmlformats.org/markup-compatibility/2006">
-        <mc:Choice xmlns:p14="http://schemas.microsoft.com/office/powerpoint/2010/main" Requires="p14">
+      <mc:AlternateContent xmlns:mc="http://schemas.openxmlformats.org/markup-compatibility/2006" xmlns:p14="http://schemas.microsoft.com/office/powerpoint/2010/main">
+        <mc:Choice Requires="p14">
           <p:contentPart p14:bwMode="auto" r:id="rId3">
             <p14:nvContentPartPr>
               <p14:cNvPr id="3" name="Ink 2">
@@ -7557,7 +7641,7 @@
             </p14:xfrm>
           </p:contentPart>
         </mc:Choice>
-        <mc:Fallback>
+        <mc:Fallback xmlns="">
           <p:pic>
             <p:nvPicPr>
               <p:cNvPr id="3" name="Ink 2">
@@ -7861,8 +7945,8 @@
           </a:extLst>
         </p:spPr>
       </p:pic>
-      <mc:AlternateContent xmlns:mc="http://schemas.openxmlformats.org/markup-compatibility/2006">
-        <mc:Choice xmlns:p14="http://schemas.microsoft.com/office/powerpoint/2010/main" Requires="p14">
+      <mc:AlternateContent xmlns:mc="http://schemas.openxmlformats.org/markup-compatibility/2006" xmlns:p14="http://schemas.microsoft.com/office/powerpoint/2010/main">
+        <mc:Choice Requires="p14">
           <p:contentPart p14:bwMode="auto" r:id="rId4">
             <p14:nvContentPartPr>
               <p14:cNvPr id="5" name="Ink 4">
@@ -7881,7 +7965,7 @@
             </p14:xfrm>
           </p:contentPart>
         </mc:Choice>
-        <mc:Fallback>
+        <mc:Fallback xmlns="">
           <p:pic>
             <p:nvPicPr>
               <p:cNvPr id="5" name="Ink 4">
@@ -8689,8 +8773,8 @@
           </a:p>
         </p:txBody>
       </p:sp>
-      <mc:AlternateContent xmlns:mc="http://schemas.openxmlformats.org/markup-compatibility/2006">
-        <mc:Choice xmlns:p14="http://schemas.microsoft.com/office/powerpoint/2010/main" Requires="p14">
+      <mc:AlternateContent xmlns:mc="http://schemas.openxmlformats.org/markup-compatibility/2006" xmlns:p14="http://schemas.microsoft.com/office/powerpoint/2010/main">
+        <mc:Choice Requires="p14">
           <p:contentPart p14:bwMode="auto" r:id="rId2">
             <p14:nvContentPartPr>
               <p14:cNvPr id="13" name="Ink 12">
@@ -8709,7 +8793,7 @@
             </p14:xfrm>
           </p:contentPart>
         </mc:Choice>
-        <mc:Fallback>
+        <mc:Fallback xmlns="">
           <p:pic>
             <p:nvPicPr>
               <p:cNvPr id="13" name="Ink 12">
@@ -8837,7 +8921,7 @@
           <p:nvPr/>
         </p:nvPicPr>
         <p:blipFill>
-          <a:blip r:embed="rId2"/>
+          <a:blip r:embed="rId3"/>
           <a:stretch>
             <a:fillRect/>
           </a:stretch>
@@ -8867,7 +8951,7 @@
           <p:nvPr/>
         </p:nvPicPr>
         <p:blipFill>
-          <a:blip r:embed="rId3"/>
+          <a:blip r:embed="rId4"/>
           <a:stretch>
             <a:fillRect/>
           </a:stretch>
@@ -8943,7 +9027,7 @@
           <p:nvPr/>
         </p:nvPicPr>
         <p:blipFill>
-          <a:blip r:embed="rId4" cstate="print">
+          <a:blip r:embed="rId5" cstate="print">
             <a:extLst>
               <a:ext uri="{28A0092B-C50C-407E-A947-70E740481C1C}">
                 <a14:useLocalDpi xmlns:a14="http://schemas.microsoft.com/office/drawing/2010/main" val="0"/>
@@ -8990,7 +9074,7 @@
           <p:nvPr/>
         </p:nvPicPr>
         <p:blipFill>
-          <a:blip r:embed="rId5" cstate="print">
+          <a:blip r:embed="rId6" cstate="print">
             <a:extLst>
               <a:ext uri="{28A0092B-C50C-407E-A947-70E740481C1C}">
                 <a14:useLocalDpi xmlns:a14="http://schemas.microsoft.com/office/drawing/2010/main" val="0"/>
@@ -9037,7 +9121,7 @@
           <p:nvPr/>
         </p:nvPicPr>
         <p:blipFill>
-          <a:blip r:embed="rId2"/>
+          <a:blip r:embed="rId3"/>
           <a:stretch>
             <a:fillRect/>
           </a:stretch>
@@ -9067,7 +9151,7 @@
           <p:nvPr/>
         </p:nvPicPr>
         <p:blipFill>
-          <a:blip r:embed="rId2"/>
+          <a:blip r:embed="rId3"/>
           <a:stretch>
             <a:fillRect/>
           </a:stretch>
@@ -9097,7 +9181,7 @@
           <p:nvPr/>
         </p:nvPicPr>
         <p:blipFill>
-          <a:blip r:embed="rId2"/>
+          <a:blip r:embed="rId3"/>
           <a:stretch>
             <a:fillRect/>
           </a:stretch>
@@ -9134,7 +9218,7 @@
         </p:grpSpPr>
         <mc:AlternateContent xmlns:mc="http://schemas.openxmlformats.org/markup-compatibility/2006" xmlns:p14="http://schemas.microsoft.com/office/powerpoint/2010/main">
           <mc:Choice Requires="p14">
-            <p:contentPart p14:bwMode="auto" r:id="rId6">
+            <p:contentPart p14:bwMode="auto" r:id="rId7">
               <p14:nvContentPartPr>
                 <p14:cNvPr id="39" name="Ink 38">
                   <a:extLst>
@@ -9166,7 +9250,7 @@
                 <p:nvPr/>
               </p:nvPicPr>
               <p:blipFill>
-                <a:blip r:embed="rId7"/>
+                <a:blip r:embed="rId8"/>
                 <a:stretch>
                   <a:fillRect/>
                 </a:stretch>
@@ -9185,7 +9269,7 @@
         </mc:AlternateContent>
         <mc:AlternateContent xmlns:mc="http://schemas.openxmlformats.org/markup-compatibility/2006" xmlns:p14="http://schemas.microsoft.com/office/powerpoint/2010/main">
           <mc:Choice Requires="p14">
-            <p:contentPart p14:bwMode="auto" r:id="rId8">
+            <p:contentPart p14:bwMode="auto" r:id="rId9">
               <p14:nvContentPartPr>
                 <p14:cNvPr id="40" name="Ink 39">
                   <a:extLst>
@@ -9217,7 +9301,7 @@
                 <p:nvPr/>
               </p:nvPicPr>
               <p:blipFill>
-                <a:blip r:embed="rId9"/>
+                <a:blip r:embed="rId10"/>
                 <a:stretch>
                   <a:fillRect/>
                 </a:stretch>
@@ -9237,7 +9321,7 @@
       </p:grpSp>
       <mc:AlternateContent xmlns:mc="http://schemas.openxmlformats.org/markup-compatibility/2006" xmlns:p14="http://schemas.microsoft.com/office/powerpoint/2010/main">
         <mc:Choice Requires="p14">
-          <p:contentPart p14:bwMode="auto" r:id="rId10">
+          <p:contentPart p14:bwMode="auto" r:id="rId11">
             <p14:nvContentPartPr>
               <p14:cNvPr id="47" name="Ink 46">
                 <a:extLst>
@@ -9269,7 +9353,7 @@
               <p:nvPr/>
             </p:nvPicPr>
             <p:blipFill>
-              <a:blip r:embed="rId11"/>
+              <a:blip r:embed="rId12"/>
               <a:stretch>
                 <a:fillRect/>
               </a:stretch>
@@ -9288,7 +9372,7 @@
       </mc:AlternateContent>
       <mc:AlternateContent xmlns:mc="http://schemas.openxmlformats.org/markup-compatibility/2006" xmlns:p14="http://schemas.microsoft.com/office/powerpoint/2010/main">
         <mc:Choice Requires="p14">
-          <p:contentPart p14:bwMode="auto" r:id="rId12">
+          <p:contentPart p14:bwMode="auto" r:id="rId13">
             <p14:nvContentPartPr>
               <p14:cNvPr id="53" name="Ink 52">
                 <a:extLst>
@@ -9320,7 +9404,7 @@
               <p:nvPr/>
             </p:nvPicPr>
             <p:blipFill>
-              <a:blip r:embed="rId13"/>
+              <a:blip r:embed="rId14"/>
               <a:stretch>
                 <a:fillRect/>
               </a:stretch>
@@ -9351,7 +9435,7 @@
         </p:nvSpPr>
         <p:spPr>
           <a:xfrm>
-            <a:off x="4576122" y="4858124"/>
+            <a:off x="4622400" y="4835229"/>
             <a:ext cx="1545000" cy="1292231"/>
           </a:xfrm>
           <a:prstGeom prst="rect">
@@ -9381,14 +9465,14 @@
             <a:pPr algn="ctr"/>
             <a:r>
               <a:rPr lang="en-IE" sz="2400" dirty="0"/>
-              <a:t>Server</a:t>
+              <a:t>Broker</a:t>
             </a:r>
           </a:p>
         </p:txBody>
       </p:sp>
       <mc:AlternateContent xmlns:mc="http://schemas.openxmlformats.org/markup-compatibility/2006" xmlns:p14="http://schemas.microsoft.com/office/powerpoint/2010/main">
         <mc:Choice Requires="p14">
-          <p:contentPart p14:bwMode="auto" r:id="rId14">
+          <p:contentPart p14:bwMode="auto" r:id="rId15">
             <p14:nvContentPartPr>
               <p14:cNvPr id="1075" name="Ink 1074">
                 <a:extLst>
@@ -9420,7 +9504,7 @@
               <p:nvPr/>
             </p:nvPicPr>
             <p:blipFill>
-              <a:blip r:embed="rId15"/>
+              <a:blip r:embed="rId16"/>
               <a:stretch>
                 <a:fillRect/>
               </a:stretch>
@@ -9550,7 +9634,7 @@
           <p:nvPr/>
         </p:nvPicPr>
         <p:blipFill>
-          <a:blip r:embed="rId16">
+          <a:blip r:embed="rId17">
             <a:extLst>
               <a:ext uri="{28A0092B-C50C-407E-A947-70E740481C1C}">
                 <a14:useLocalDpi xmlns:a14="http://schemas.microsoft.com/office/drawing/2010/main" val="0"/>
@@ -9597,7 +9681,7 @@
           <p:nvPr/>
         </p:nvPicPr>
         <p:blipFill>
-          <a:blip r:embed="rId17" cstate="print">
+          <a:blip r:embed="rId18" cstate="print">
             <a:extLst>
               <a:ext uri="{28A0092B-C50C-407E-A947-70E740481C1C}">
                 <a14:useLocalDpi xmlns:a14="http://schemas.microsoft.com/office/drawing/2010/main" val="0"/>
@@ -9934,7 +10018,7 @@
           <p:nvPr/>
         </p:nvPicPr>
         <p:blipFill>
-          <a:blip r:embed="rId2"/>
+          <a:blip r:embed="rId3"/>
           <a:stretch>
             <a:fillRect/>
           </a:stretch>
@@ -9964,7 +10048,7 @@
           <p:nvPr/>
         </p:nvPicPr>
         <p:blipFill>
-          <a:blip r:embed="rId2"/>
+          <a:blip r:embed="rId3"/>
           <a:stretch>
             <a:fillRect/>
           </a:stretch>
@@ -9994,7 +10078,7 @@
           <p:nvPr/>
         </p:nvPicPr>
         <p:blipFill>
-          <a:blip r:embed="rId2"/>
+          <a:blip r:embed="rId3"/>
           <a:stretch>
             <a:fillRect/>
           </a:stretch>
@@ -11483,8 +11567,8 @@
           </a:p>
         </p:txBody>
       </p:sp>
-      <mc:AlternateContent xmlns:mc="http://schemas.openxmlformats.org/markup-compatibility/2006">
-        <mc:Choice xmlns:p14="http://schemas.microsoft.com/office/powerpoint/2010/main" Requires="p14">
+      <mc:AlternateContent xmlns:mc="http://schemas.openxmlformats.org/markup-compatibility/2006" xmlns:p14="http://schemas.microsoft.com/office/powerpoint/2010/main">
+        <mc:Choice Requires="p14">
           <p:contentPart p14:bwMode="auto" r:id="rId3">
             <p14:nvContentPartPr>
               <p14:cNvPr id="4" name="Ink 3">
@@ -11503,7 +11587,7 @@
             </p14:xfrm>
           </p:contentPart>
         </mc:Choice>
-        <mc:Fallback>
+        <mc:Fallback xmlns="">
           <p:pic>
             <p:nvPicPr>
               <p:cNvPr id="4" name="Ink 3">
@@ -11806,8 +11890,8 @@
           </a:p>
         </p:txBody>
       </p:sp>
-      <mc:AlternateContent xmlns:mc="http://schemas.openxmlformats.org/markup-compatibility/2006">
-        <mc:Choice xmlns:p14="http://schemas.microsoft.com/office/powerpoint/2010/main" Requires="p14">
+      <mc:AlternateContent xmlns:mc="http://schemas.openxmlformats.org/markup-compatibility/2006" xmlns:p14="http://schemas.microsoft.com/office/powerpoint/2010/main">
+        <mc:Choice Requires="p14">
           <p:contentPart p14:bwMode="auto" r:id="rId5">
             <p14:nvContentPartPr>
               <p14:cNvPr id="4" name="Ink 3">
@@ -11826,7 +11910,7 @@
             </p14:xfrm>
           </p:contentPart>
         </mc:Choice>
-        <mc:Fallback>
+        <mc:Fallback xmlns="">
           <p:pic>
             <p:nvPicPr>
               <p:cNvPr id="4" name="Ink 3">
@@ -12083,8 +12167,8 @@
           </a:p>
         </p:txBody>
       </p:sp>
-      <mc:AlternateContent xmlns:mc="http://schemas.openxmlformats.org/markup-compatibility/2006">
-        <mc:Choice xmlns:p14="http://schemas.microsoft.com/office/powerpoint/2010/main" Requires="p14">
+      <mc:AlternateContent xmlns:mc="http://schemas.openxmlformats.org/markup-compatibility/2006" xmlns:p14="http://schemas.microsoft.com/office/powerpoint/2010/main">
+        <mc:Choice Requires="p14">
           <p:contentPart p14:bwMode="auto" r:id="rId3">
             <p14:nvContentPartPr>
               <p14:cNvPr id="4" name="Ink 3">
@@ -12103,7 +12187,7 @@
             </p14:xfrm>
           </p:contentPart>
         </mc:Choice>
-        <mc:Fallback>
+        <mc:Fallback xmlns="">
           <p:pic>
             <p:nvPicPr>
               <p:cNvPr id="4" name="Ink 3">
@@ -12435,8 +12519,8 @@
           </a:extLst>
         </p:spPr>
       </p:pic>
-      <mc:AlternateContent xmlns:mc="http://schemas.openxmlformats.org/markup-compatibility/2006">
-        <mc:Choice xmlns:p14="http://schemas.microsoft.com/office/powerpoint/2010/main" Requires="p14">
+      <mc:AlternateContent xmlns:mc="http://schemas.openxmlformats.org/markup-compatibility/2006" xmlns:p14="http://schemas.microsoft.com/office/powerpoint/2010/main">
+        <mc:Choice Requires="p14">
           <p:contentPart p14:bwMode="auto" r:id="rId5">
             <p14:nvContentPartPr>
               <p14:cNvPr id="4" name="Ink 3">
@@ -12455,7 +12539,7 @@
             </p14:xfrm>
           </p:contentPart>
         </mc:Choice>
-        <mc:Fallback>
+        <mc:Fallback xmlns="">
           <p:pic>
             <p:nvPicPr>
               <p:cNvPr id="4" name="Ink 3">
@@ -12731,8 +12815,8 @@
           </a:extLst>
         </p:spPr>
       </p:pic>
-      <mc:AlternateContent xmlns:mc="http://schemas.openxmlformats.org/markup-compatibility/2006">
-        <mc:Choice xmlns:p14="http://schemas.microsoft.com/office/powerpoint/2010/main" Requires="p14">
+      <mc:AlternateContent xmlns:mc="http://schemas.openxmlformats.org/markup-compatibility/2006" xmlns:p14="http://schemas.microsoft.com/office/powerpoint/2010/main">
+        <mc:Choice Requires="p14">
           <p:contentPart p14:bwMode="auto" r:id="rId3">
             <p14:nvContentPartPr>
               <p14:cNvPr id="4" name="Ink 3">
@@ -12751,7 +12835,7 @@
             </p14:xfrm>
           </p:contentPart>
         </mc:Choice>
-        <mc:Fallback>
+        <mc:Fallback xmlns="">
           <p:pic>
             <p:nvPicPr>
               <p:cNvPr id="4" name="Ink 3">
@@ -13002,8 +13086,8 @@
           </a:p>
         </p:txBody>
       </p:sp>
-      <mc:AlternateContent xmlns:mc="http://schemas.openxmlformats.org/markup-compatibility/2006">
-        <mc:Choice xmlns:p14="http://schemas.microsoft.com/office/powerpoint/2010/main" Requires="p14">
+      <mc:AlternateContent xmlns:mc="http://schemas.openxmlformats.org/markup-compatibility/2006" xmlns:p14="http://schemas.microsoft.com/office/powerpoint/2010/main">
+        <mc:Choice Requires="p14">
           <p:contentPart p14:bwMode="auto" r:id="rId3">
             <p14:nvContentPartPr>
               <p14:cNvPr id="5" name="Ink 4">
@@ -13022,7 +13106,7 @@
             </p14:xfrm>
           </p:contentPart>
         </mc:Choice>
-        <mc:Fallback>
+        <mc:Fallback xmlns="">
           <p:pic>
             <p:nvPicPr>
               <p:cNvPr id="5" name="Ink 4">
